--- a/Evolutionary game theory.pptx
+++ b/Evolutionary game theory.pptx
@@ -4,15 +4,23 @@
   <p:sldMasterIdLst>
     <p:sldMasterId id="2147484060" r:id="rId1"/>
   </p:sldMasterIdLst>
+  <p:notesMasterIdLst>
+    <p:notesMasterId r:id="rId15"/>
+  </p:notesMasterIdLst>
   <p:sldIdLst>
     <p:sldId id="256" r:id="rId2"/>
     <p:sldId id="258" r:id="rId3"/>
     <p:sldId id="260" r:id="rId4"/>
-    <p:sldId id="261" r:id="rId5"/>
-    <p:sldId id="264" r:id="rId6"/>
-    <p:sldId id="263" r:id="rId7"/>
-    <p:sldId id="265" r:id="rId8"/>
-    <p:sldId id="262" r:id="rId9"/>
+    <p:sldId id="266" r:id="rId5"/>
+    <p:sldId id="261" r:id="rId6"/>
+    <p:sldId id="264" r:id="rId7"/>
+    <p:sldId id="263" r:id="rId8"/>
+    <p:sldId id="265" r:id="rId9"/>
+    <p:sldId id="262" r:id="rId10"/>
+    <p:sldId id="267" r:id="rId11"/>
+    <p:sldId id="268" r:id="rId12"/>
+    <p:sldId id="269" r:id="rId13"/>
+    <p:sldId id="271" r:id="rId14"/>
   </p:sldIdLst>
   <p:sldSz cx="12192000" cy="6858000"/>
   <p:notesSz cx="6858000" cy="9144000"/>
@@ -111,7 +119,530 @@
       </a:defRPr>
     </a:lvl9pPr>
   </p:defaultTextStyle>
+  <p:extLst>
+    <p:ext uri="{EFAFB233-063F-42B5-8137-9DF3F51BA10A}">
+      <p15:sldGuideLst xmlns:p15="http://schemas.microsoft.com/office/powerpoint/2012/main"/>
+    </p:ext>
+  </p:extLst>
 </p:presentation>
+</file>
+
+<file path=ppt/notesMasters/notesMaster1.xml><?xml version="1.0" encoding="utf-8"?>
+<p:notesMaster xmlns:a="http://schemas.openxmlformats.org/drawingml/2006/main" xmlns:r="http://schemas.openxmlformats.org/officeDocument/2006/relationships" xmlns:p="http://schemas.openxmlformats.org/presentationml/2006/main">
+  <p:cSld>
+    <p:bg>
+      <p:bgRef idx="1001">
+        <a:schemeClr val="bg1"/>
+      </p:bgRef>
+    </p:bg>
+    <p:spTree>
+      <p:nvGrpSpPr>
+        <p:cNvPr id="1" name=""/>
+        <p:cNvGrpSpPr/>
+        <p:nvPr/>
+      </p:nvGrpSpPr>
+      <p:grpSpPr>
+        <a:xfrm>
+          <a:off x="0" y="0"/>
+          <a:ext cx="0" cy="0"/>
+          <a:chOff x="0" y="0"/>
+          <a:chExt cx="0" cy="0"/>
+        </a:xfrm>
+      </p:grpSpPr>
+      <p:sp>
+        <p:nvSpPr>
+          <p:cNvPr id="2" name="Marcador de encabezado 1"/>
+          <p:cNvSpPr>
+            <a:spLocks noGrp="1"/>
+          </p:cNvSpPr>
+          <p:nvPr>
+            <p:ph type="hdr" sz="quarter"/>
+          </p:nvPr>
+        </p:nvSpPr>
+        <p:spPr>
+          <a:xfrm>
+            <a:off x="0" y="0"/>
+            <a:ext cx="2971800" cy="458788"/>
+          </a:xfrm>
+          <a:prstGeom prst="rect">
+            <a:avLst/>
+          </a:prstGeom>
+        </p:spPr>
+        <p:txBody>
+          <a:bodyPr vert="horz" lIns="91440" tIns="45720" rIns="91440" bIns="45720" rtlCol="0"/>
+          <a:lstStyle>
+            <a:lvl1pPr algn="l">
+              <a:defRPr sz="1200"/>
+            </a:lvl1pPr>
+          </a:lstStyle>
+          <a:p>
+            <a:endParaRPr lang="en-US"/>
+          </a:p>
+        </p:txBody>
+      </p:sp>
+      <p:sp>
+        <p:nvSpPr>
+          <p:cNvPr id="3" name="Marcador de fecha 2"/>
+          <p:cNvSpPr>
+            <a:spLocks noGrp="1"/>
+          </p:cNvSpPr>
+          <p:nvPr>
+            <p:ph type="dt" idx="1"/>
+          </p:nvPr>
+        </p:nvSpPr>
+        <p:spPr>
+          <a:xfrm>
+            <a:off x="3884613" y="0"/>
+            <a:ext cx="2971800" cy="458788"/>
+          </a:xfrm>
+          <a:prstGeom prst="rect">
+            <a:avLst/>
+          </a:prstGeom>
+        </p:spPr>
+        <p:txBody>
+          <a:bodyPr vert="horz" lIns="91440" tIns="45720" rIns="91440" bIns="45720" rtlCol="0"/>
+          <a:lstStyle>
+            <a:lvl1pPr algn="r">
+              <a:defRPr sz="1200"/>
+            </a:lvl1pPr>
+          </a:lstStyle>
+          <a:p>
+            <a:fld id="{E8A96423-E2BE-406A-8E00-50EA8C0F26E1}" type="datetimeFigureOut">
+              <a:rPr lang="en-US" smtClean="0"/>
+              <a:t>5/21/2026</a:t>
+            </a:fld>
+            <a:endParaRPr lang="en-US"/>
+          </a:p>
+        </p:txBody>
+      </p:sp>
+      <p:sp>
+        <p:nvSpPr>
+          <p:cNvPr id="4" name="Marcador de imagen de diapositiva 3"/>
+          <p:cNvSpPr>
+            <a:spLocks noGrp="1" noRot="1" noChangeAspect="1"/>
+          </p:cNvSpPr>
+          <p:nvPr>
+            <p:ph type="sldImg" idx="2"/>
+          </p:nvPr>
+        </p:nvSpPr>
+        <p:spPr>
+          <a:xfrm>
+            <a:off x="685800" y="1143000"/>
+            <a:ext cx="5486400" cy="3086100"/>
+          </a:xfrm>
+          <a:prstGeom prst="rect">
+            <a:avLst/>
+          </a:prstGeom>
+          <a:noFill/>
+          <a:ln w="12700">
+            <a:solidFill>
+              <a:prstClr val="black"/>
+            </a:solidFill>
+          </a:ln>
+        </p:spPr>
+        <p:txBody>
+          <a:bodyPr vert="horz" lIns="91440" tIns="45720" rIns="91440" bIns="45720" rtlCol="0" anchor="ctr"/>
+          <a:lstStyle/>
+          <a:p>
+            <a:endParaRPr lang="en-US"/>
+          </a:p>
+        </p:txBody>
+      </p:sp>
+      <p:sp>
+        <p:nvSpPr>
+          <p:cNvPr id="5" name="Marcador de notas 4"/>
+          <p:cNvSpPr>
+            <a:spLocks noGrp="1"/>
+          </p:cNvSpPr>
+          <p:nvPr>
+            <p:ph type="body" sz="quarter" idx="3"/>
+          </p:nvPr>
+        </p:nvSpPr>
+        <p:spPr>
+          <a:xfrm>
+            <a:off x="685800" y="4400550"/>
+            <a:ext cx="5486400" cy="3600450"/>
+          </a:xfrm>
+          <a:prstGeom prst="rect">
+            <a:avLst/>
+          </a:prstGeom>
+        </p:spPr>
+        <p:txBody>
+          <a:bodyPr vert="horz" lIns="91440" tIns="45720" rIns="91440" bIns="45720" rtlCol="0"/>
+          <a:lstStyle/>
+          <a:p>
+            <a:pPr lvl="0"/>
+            <a:r>
+              <a:rPr lang="es-ES"/>
+              <a:t>Haga clic para modificar los estilos de texto del patrón</a:t>
+            </a:r>
+          </a:p>
+          <a:p>
+            <a:pPr lvl="1"/>
+            <a:r>
+              <a:rPr lang="es-ES"/>
+              <a:t>Segundo nivel</a:t>
+            </a:r>
+          </a:p>
+          <a:p>
+            <a:pPr lvl="2"/>
+            <a:r>
+              <a:rPr lang="es-ES"/>
+              <a:t>Tercer nivel</a:t>
+            </a:r>
+          </a:p>
+          <a:p>
+            <a:pPr lvl="3"/>
+            <a:r>
+              <a:rPr lang="es-ES"/>
+              <a:t>Cuarto nivel</a:t>
+            </a:r>
+          </a:p>
+          <a:p>
+            <a:pPr lvl="4"/>
+            <a:r>
+              <a:rPr lang="es-ES"/>
+              <a:t>Quinto nivel</a:t>
+            </a:r>
+            <a:endParaRPr lang="en-US"/>
+          </a:p>
+        </p:txBody>
+      </p:sp>
+      <p:sp>
+        <p:nvSpPr>
+          <p:cNvPr id="6" name="Marcador de pie de página 5"/>
+          <p:cNvSpPr>
+            <a:spLocks noGrp="1"/>
+          </p:cNvSpPr>
+          <p:nvPr>
+            <p:ph type="ftr" sz="quarter" idx="4"/>
+          </p:nvPr>
+        </p:nvSpPr>
+        <p:spPr>
+          <a:xfrm>
+            <a:off x="0" y="8685213"/>
+            <a:ext cx="2971800" cy="458787"/>
+          </a:xfrm>
+          <a:prstGeom prst="rect">
+            <a:avLst/>
+          </a:prstGeom>
+        </p:spPr>
+        <p:txBody>
+          <a:bodyPr vert="horz" lIns="91440" tIns="45720" rIns="91440" bIns="45720" rtlCol="0" anchor="b"/>
+          <a:lstStyle>
+            <a:lvl1pPr algn="l">
+              <a:defRPr sz="1200"/>
+            </a:lvl1pPr>
+          </a:lstStyle>
+          <a:p>
+            <a:endParaRPr lang="en-US"/>
+          </a:p>
+        </p:txBody>
+      </p:sp>
+      <p:sp>
+        <p:nvSpPr>
+          <p:cNvPr id="7" name="Marcador de número de diapositiva 6"/>
+          <p:cNvSpPr>
+            <a:spLocks noGrp="1"/>
+          </p:cNvSpPr>
+          <p:nvPr>
+            <p:ph type="sldNum" sz="quarter" idx="5"/>
+          </p:nvPr>
+        </p:nvSpPr>
+        <p:spPr>
+          <a:xfrm>
+            <a:off x="3884613" y="8685213"/>
+            <a:ext cx="2971800" cy="458787"/>
+          </a:xfrm>
+          <a:prstGeom prst="rect">
+            <a:avLst/>
+          </a:prstGeom>
+        </p:spPr>
+        <p:txBody>
+          <a:bodyPr vert="horz" lIns="91440" tIns="45720" rIns="91440" bIns="45720" rtlCol="0" anchor="b"/>
+          <a:lstStyle>
+            <a:lvl1pPr algn="r">
+              <a:defRPr sz="1200"/>
+            </a:lvl1pPr>
+          </a:lstStyle>
+          <a:p>
+            <a:fld id="{2C18E92B-89E1-424D-92B5-BDD68C18C3D6}" type="slidenum">
+              <a:rPr lang="en-US" smtClean="0"/>
+              <a:t>‹Nº›</a:t>
+            </a:fld>
+            <a:endParaRPr lang="en-US"/>
+          </a:p>
+        </p:txBody>
+      </p:sp>
+    </p:spTree>
+    <p:extLst>
+      <p:ext uri="{BB962C8B-B14F-4D97-AF65-F5344CB8AC3E}">
+        <p14:creationId xmlns:p14="http://schemas.microsoft.com/office/powerpoint/2010/main" val="1240529504"/>
+      </p:ext>
+    </p:extLst>
+  </p:cSld>
+  <p:clrMap bg1="lt1" tx1="dk1" bg2="lt2" tx2="dk2" accent1="accent1" accent2="accent2" accent3="accent3" accent4="accent4" accent5="accent5" accent6="accent6" hlink="hlink" folHlink="folHlink"/>
+  <p:notesStyle>
+    <a:lvl1pPr marL="0" algn="l" defTabSz="914400" rtl="0" eaLnBrk="1" latinLnBrk="0" hangingPunct="1">
+      <a:defRPr sz="1200" kern="1200">
+        <a:solidFill>
+          <a:schemeClr val="tx1"/>
+        </a:solidFill>
+        <a:latin typeface="+mn-lt"/>
+        <a:ea typeface="+mn-ea"/>
+        <a:cs typeface="+mn-cs"/>
+      </a:defRPr>
+    </a:lvl1pPr>
+    <a:lvl2pPr marL="457200" algn="l" defTabSz="914400" rtl="0" eaLnBrk="1" latinLnBrk="0" hangingPunct="1">
+      <a:defRPr sz="1200" kern="1200">
+        <a:solidFill>
+          <a:schemeClr val="tx1"/>
+        </a:solidFill>
+        <a:latin typeface="+mn-lt"/>
+        <a:ea typeface="+mn-ea"/>
+        <a:cs typeface="+mn-cs"/>
+      </a:defRPr>
+    </a:lvl2pPr>
+    <a:lvl3pPr marL="914400" algn="l" defTabSz="914400" rtl="0" eaLnBrk="1" latinLnBrk="0" hangingPunct="1">
+      <a:defRPr sz="1200" kern="1200">
+        <a:solidFill>
+          <a:schemeClr val="tx1"/>
+        </a:solidFill>
+        <a:latin typeface="+mn-lt"/>
+        <a:ea typeface="+mn-ea"/>
+        <a:cs typeface="+mn-cs"/>
+      </a:defRPr>
+    </a:lvl3pPr>
+    <a:lvl4pPr marL="1371600" algn="l" defTabSz="914400" rtl="0" eaLnBrk="1" latinLnBrk="0" hangingPunct="1">
+      <a:defRPr sz="1200" kern="1200">
+        <a:solidFill>
+          <a:schemeClr val="tx1"/>
+        </a:solidFill>
+        <a:latin typeface="+mn-lt"/>
+        <a:ea typeface="+mn-ea"/>
+        <a:cs typeface="+mn-cs"/>
+      </a:defRPr>
+    </a:lvl4pPr>
+    <a:lvl5pPr marL="1828800" algn="l" defTabSz="914400" rtl="0" eaLnBrk="1" latinLnBrk="0" hangingPunct="1">
+      <a:defRPr sz="1200" kern="1200">
+        <a:solidFill>
+          <a:schemeClr val="tx1"/>
+        </a:solidFill>
+        <a:latin typeface="+mn-lt"/>
+        <a:ea typeface="+mn-ea"/>
+        <a:cs typeface="+mn-cs"/>
+      </a:defRPr>
+    </a:lvl5pPr>
+    <a:lvl6pPr marL="2286000" algn="l" defTabSz="914400" rtl="0" eaLnBrk="1" latinLnBrk="0" hangingPunct="1">
+      <a:defRPr sz="1200" kern="1200">
+        <a:solidFill>
+          <a:schemeClr val="tx1"/>
+        </a:solidFill>
+        <a:latin typeface="+mn-lt"/>
+        <a:ea typeface="+mn-ea"/>
+        <a:cs typeface="+mn-cs"/>
+      </a:defRPr>
+    </a:lvl6pPr>
+    <a:lvl7pPr marL="2743200" algn="l" defTabSz="914400" rtl="0" eaLnBrk="1" latinLnBrk="0" hangingPunct="1">
+      <a:defRPr sz="1200" kern="1200">
+        <a:solidFill>
+          <a:schemeClr val="tx1"/>
+        </a:solidFill>
+        <a:latin typeface="+mn-lt"/>
+        <a:ea typeface="+mn-ea"/>
+        <a:cs typeface="+mn-cs"/>
+      </a:defRPr>
+    </a:lvl7pPr>
+    <a:lvl8pPr marL="3200400" algn="l" defTabSz="914400" rtl="0" eaLnBrk="1" latinLnBrk="0" hangingPunct="1">
+      <a:defRPr sz="1200" kern="1200">
+        <a:solidFill>
+          <a:schemeClr val="tx1"/>
+        </a:solidFill>
+        <a:latin typeface="+mn-lt"/>
+        <a:ea typeface="+mn-ea"/>
+        <a:cs typeface="+mn-cs"/>
+      </a:defRPr>
+    </a:lvl8pPr>
+    <a:lvl9pPr marL="3657600" algn="l" defTabSz="914400" rtl="0" eaLnBrk="1" latinLnBrk="0" hangingPunct="1">
+      <a:defRPr sz="1200" kern="1200">
+        <a:solidFill>
+          <a:schemeClr val="tx1"/>
+        </a:solidFill>
+        <a:latin typeface="+mn-lt"/>
+        <a:ea typeface="+mn-ea"/>
+        <a:cs typeface="+mn-cs"/>
+      </a:defRPr>
+    </a:lvl9pPr>
+  </p:notesStyle>
+</p:notesMaster>
+</file>
+
+<file path=ppt/notesSlides/notesSlide1.xml><?xml version="1.0" encoding="utf-8"?>
+<p:notes xmlns:a="http://schemas.openxmlformats.org/drawingml/2006/main" xmlns:r="http://schemas.openxmlformats.org/officeDocument/2006/relationships" xmlns:p="http://schemas.openxmlformats.org/presentationml/2006/main">
+  <p:cSld>
+    <p:spTree>
+      <p:nvGrpSpPr>
+        <p:cNvPr id="1" name=""/>
+        <p:cNvGrpSpPr/>
+        <p:nvPr/>
+      </p:nvGrpSpPr>
+      <p:grpSpPr>
+        <a:xfrm>
+          <a:off x="0" y="0"/>
+          <a:ext cx="0" cy="0"/>
+          <a:chOff x="0" y="0"/>
+          <a:chExt cx="0" cy="0"/>
+        </a:xfrm>
+      </p:grpSpPr>
+      <p:sp>
+        <p:nvSpPr>
+          <p:cNvPr id="2" name="Marcador de imagen de diapositiva 1"/>
+          <p:cNvSpPr>
+            <a:spLocks noGrp="1" noRot="1" noChangeAspect="1"/>
+          </p:cNvSpPr>
+          <p:nvPr>
+            <p:ph type="sldImg"/>
+          </p:nvPr>
+        </p:nvSpPr>
+        <p:spPr/>
+      </p:sp>
+      <p:sp>
+        <p:nvSpPr>
+          <p:cNvPr id="3" name="Marcador de notas 2"/>
+          <p:cNvSpPr>
+            <a:spLocks noGrp="1"/>
+          </p:cNvSpPr>
+          <p:nvPr>
+            <p:ph type="body" idx="1"/>
+          </p:nvPr>
+        </p:nvSpPr>
+        <p:spPr/>
+        <p:txBody>
+          <a:bodyPr/>
+          <a:lstStyle/>
+          <a:p>
+            <a:endParaRPr lang="en-US" dirty="0"/>
+          </a:p>
+        </p:txBody>
+      </p:sp>
+      <p:sp>
+        <p:nvSpPr>
+          <p:cNvPr id="4" name="Marcador de número de diapositiva 3"/>
+          <p:cNvSpPr>
+            <a:spLocks noGrp="1"/>
+          </p:cNvSpPr>
+          <p:nvPr>
+            <p:ph type="sldNum" sz="quarter" idx="5"/>
+          </p:nvPr>
+        </p:nvSpPr>
+        <p:spPr/>
+        <p:txBody>
+          <a:bodyPr/>
+          <a:lstStyle/>
+          <a:p>
+            <a:fld id="{2C18E92B-89E1-424D-92B5-BDD68C18C3D6}" type="slidenum">
+              <a:rPr lang="en-US" smtClean="0"/>
+              <a:t>5</a:t>
+            </a:fld>
+            <a:endParaRPr lang="en-US"/>
+          </a:p>
+        </p:txBody>
+      </p:sp>
+    </p:spTree>
+    <p:extLst>
+      <p:ext uri="{BB962C8B-B14F-4D97-AF65-F5344CB8AC3E}">
+        <p14:creationId xmlns:p14="http://schemas.microsoft.com/office/powerpoint/2010/main" val="3152171551"/>
+      </p:ext>
+    </p:extLst>
+  </p:cSld>
+  <p:clrMapOvr>
+    <a:masterClrMapping/>
+  </p:clrMapOvr>
+</p:notes>
+</file>
+
+<file path=ppt/notesSlides/notesSlide2.xml><?xml version="1.0" encoding="utf-8"?>
+<p:notes xmlns:a="http://schemas.openxmlformats.org/drawingml/2006/main" xmlns:r="http://schemas.openxmlformats.org/officeDocument/2006/relationships" xmlns:p="http://schemas.openxmlformats.org/presentationml/2006/main">
+  <p:cSld>
+    <p:spTree>
+      <p:nvGrpSpPr>
+        <p:cNvPr id="1" name=""/>
+        <p:cNvGrpSpPr/>
+        <p:nvPr/>
+      </p:nvGrpSpPr>
+      <p:grpSpPr>
+        <a:xfrm>
+          <a:off x="0" y="0"/>
+          <a:ext cx="0" cy="0"/>
+          <a:chOff x="0" y="0"/>
+          <a:chExt cx="0" cy="0"/>
+        </a:xfrm>
+      </p:grpSpPr>
+      <p:sp>
+        <p:nvSpPr>
+          <p:cNvPr id="2" name="Marcador de imagen de diapositiva 1"/>
+          <p:cNvSpPr>
+            <a:spLocks noGrp="1" noRot="1" noChangeAspect="1"/>
+          </p:cNvSpPr>
+          <p:nvPr>
+            <p:ph type="sldImg"/>
+          </p:nvPr>
+        </p:nvSpPr>
+        <p:spPr/>
+      </p:sp>
+      <p:sp>
+        <p:nvSpPr>
+          <p:cNvPr id="3" name="Marcador de notas 2"/>
+          <p:cNvSpPr>
+            <a:spLocks noGrp="1"/>
+          </p:cNvSpPr>
+          <p:nvPr>
+            <p:ph type="body" idx="1"/>
+          </p:nvPr>
+        </p:nvSpPr>
+        <p:spPr/>
+        <p:txBody>
+          <a:bodyPr/>
+          <a:lstStyle/>
+          <a:p>
+            <a:endParaRPr lang="en-US" dirty="0"/>
+          </a:p>
+        </p:txBody>
+      </p:sp>
+      <p:sp>
+        <p:nvSpPr>
+          <p:cNvPr id="4" name="Marcador de número de diapositiva 3"/>
+          <p:cNvSpPr>
+            <a:spLocks noGrp="1"/>
+          </p:cNvSpPr>
+          <p:nvPr>
+            <p:ph type="sldNum" sz="quarter" idx="5"/>
+          </p:nvPr>
+        </p:nvSpPr>
+        <p:spPr/>
+        <p:txBody>
+          <a:bodyPr/>
+          <a:lstStyle/>
+          <a:p>
+            <a:fld id="{2C18E92B-89E1-424D-92B5-BDD68C18C3D6}" type="slidenum">
+              <a:rPr lang="en-US" smtClean="0"/>
+              <a:t>10</a:t>
+            </a:fld>
+            <a:endParaRPr lang="en-US"/>
+          </a:p>
+        </p:txBody>
+      </p:sp>
+    </p:spTree>
+    <p:extLst>
+      <p:ext uri="{BB962C8B-B14F-4D97-AF65-F5344CB8AC3E}">
+        <p14:creationId xmlns:p14="http://schemas.microsoft.com/office/powerpoint/2010/main" val="3226949896"/>
+      </p:ext>
+    </p:extLst>
+  </p:cSld>
+  <p:clrMapOvr>
+    <a:masterClrMapping/>
+  </p:clrMapOvr>
+</p:notes>
 </file>
 
 <file path=ppt/slideLayouts/slideLayout1.xml><?xml version="1.0" encoding="utf-8"?>
@@ -170,6 +701,13 @@
             <a:schemeClr val="lt1"/>
           </a:fontRef>
         </p:style>
+        <p:txBody>
+          <a:bodyPr/>
+          <a:lstStyle/>
+          <a:p>
+            <a:endParaRPr lang="en-US"/>
+          </a:p>
+        </p:txBody>
       </p:sp>
       <p:sp>
         <p:nvSpPr>
@@ -208,6 +746,13 @@
             <a:schemeClr val="lt1"/>
           </a:fontRef>
         </p:style>
+        <p:txBody>
+          <a:bodyPr/>
+          <a:lstStyle/>
+          <a:p>
+            <a:endParaRPr lang="en-US"/>
+          </a:p>
+        </p:txBody>
       </p:sp>
       <p:sp>
         <p:nvSpPr>
@@ -342,7 +887,7 @@
           <a:p>
             <a:fld id="{E31BA835-12AC-4E8F-955A-EA3F4DE2791F}" type="datetime1">
               <a:rPr lang="en-US" smtClean="0"/>
-              <a:t>5/20/2026</a:t>
+              <a:t>5/21/2026</a:t>
             </a:fld>
             <a:endParaRPr lang="en-US"/>
           </a:p>
@@ -551,7 +1096,7 @@
           <a:p>
             <a:fld id="{E31BA835-12AC-4E8F-955A-EA3F4DE2791F}" type="datetime1">
               <a:rPr lang="en-US" smtClean="0"/>
-              <a:t>5/20/2026</a:t>
+              <a:t>5/21/2026</a:t>
             </a:fld>
             <a:endParaRPr lang="en-US"/>
           </a:p>
@@ -810,7 +1355,7 @@
           <a:p>
             <a:fld id="{E31BA835-12AC-4E8F-955A-EA3F4DE2791F}" type="datetime1">
               <a:rPr lang="en-US" smtClean="0"/>
-              <a:t>5/20/2026</a:t>
+              <a:t>5/21/2026</a:t>
             </a:fld>
             <a:endParaRPr lang="en-US"/>
           </a:p>
@@ -981,7 +1526,7 @@
           <a:p>
             <a:fld id="{E31BA835-12AC-4E8F-955A-EA3F4DE2791F}" type="datetime1">
               <a:rPr lang="en-US" smtClean="0"/>
-              <a:t>5/20/2026</a:t>
+              <a:t>5/21/2026</a:t>
             </a:fld>
             <a:endParaRPr lang="en-US"/>
           </a:p>
@@ -1319,7 +1864,7 @@
           <a:p>
             <a:fld id="{E31BA835-12AC-4E8F-955A-EA3F4DE2791F}" type="datetime1">
               <a:rPr lang="en-US" smtClean="0"/>
-              <a:t>5/20/2026</a:t>
+              <a:t>5/21/2026</a:t>
             </a:fld>
             <a:endParaRPr lang="en-US"/>
           </a:p>
@@ -1595,7 +2140,7 @@
           <a:p>
             <a:fld id="{E31BA835-12AC-4E8F-955A-EA3F4DE2791F}" type="datetime1">
               <a:rPr lang="en-US" smtClean="0"/>
-              <a:t>5/20/2026</a:t>
+              <a:t>5/21/2026</a:t>
             </a:fld>
             <a:endParaRPr lang="en-US"/>
           </a:p>
@@ -1975,7 +2520,7 @@
           <a:p>
             <a:fld id="{E31BA835-12AC-4E8F-955A-EA3F4DE2791F}" type="datetime1">
               <a:rPr lang="en-US" smtClean="0"/>
-              <a:t>5/20/2026</a:t>
+              <a:t>5/21/2026</a:t>
             </a:fld>
             <a:endParaRPr lang="en-US"/>
           </a:p>
@@ -2094,7 +2639,7 @@
           <a:p>
             <a:fld id="{E31BA835-12AC-4E8F-955A-EA3F4DE2791F}" type="datetime1">
               <a:rPr lang="en-US" smtClean="0"/>
-              <a:t>5/20/2026</a:t>
+              <a:t>5/21/2026</a:t>
             </a:fld>
             <a:endParaRPr lang="en-US"/>
           </a:p>
@@ -2268,7 +2813,7 @@
           <a:p>
             <a:fld id="{E31BA835-12AC-4E8F-955A-EA3F4DE2791F}" type="datetime1">
               <a:rPr lang="en-US" smtClean="0"/>
-              <a:t>5/20/2026</a:t>
+              <a:t>5/21/2026</a:t>
             </a:fld>
             <a:endParaRPr lang="en-US"/>
           </a:p>
@@ -2625,7 +3170,7 @@
           <a:p>
             <a:fld id="{E31BA835-12AC-4E8F-955A-EA3F4DE2791F}" type="datetime1">
               <a:rPr lang="en-US" smtClean="0"/>
-              <a:t>5/20/2026</a:t>
+              <a:t>5/21/2026</a:t>
             </a:fld>
             <a:endParaRPr lang="en-US"/>
           </a:p>
@@ -3005,7 +3550,7 @@
           <a:p>
             <a:fld id="{E31BA835-12AC-4E8F-955A-EA3F4DE2791F}" type="datetime1">
               <a:rPr lang="en-US" smtClean="0"/>
-              <a:t>5/20/2026</a:t>
+              <a:t>5/21/2026</a:t>
             </a:fld>
             <a:endParaRPr lang="en-US"/>
           </a:p>
@@ -3128,6 +3673,13 @@
             <a:schemeClr val="lt1"/>
           </a:fontRef>
         </p:style>
+        <p:txBody>
+          <a:bodyPr/>
+          <a:lstStyle/>
+          <a:p>
+            <a:endParaRPr lang="en-US"/>
+          </a:p>
+        </p:txBody>
       </p:sp>
       <p:sp>
         <p:nvSpPr>
@@ -3166,6 +3718,13 @@
             <a:schemeClr val="lt1"/>
           </a:fontRef>
         </p:style>
+        <p:txBody>
+          <a:bodyPr/>
+          <a:lstStyle/>
+          <a:p>
+            <a:endParaRPr lang="en-US"/>
+          </a:p>
+        </p:txBody>
       </p:sp>
       <p:sp>
         <p:nvSpPr>
@@ -3295,7 +3854,7 @@
           <a:p>
             <a:fld id="{E31BA835-12AC-4E8F-955A-EA3F4DE2791F}" type="datetime1">
               <a:rPr lang="en-US" smtClean="0"/>
-              <a:t>5/20/2026</a:t>
+              <a:t>5/21/2026</a:t>
             </a:fld>
             <a:endParaRPr lang="en-US"/>
           </a:p>
@@ -3970,6 +4529,865 @@
 </p:sld>
 </file>
 
+<file path=ppt/slides/slide10.xml><?xml version="1.0" encoding="utf-8"?>
+<p:sld xmlns:a="http://schemas.openxmlformats.org/drawingml/2006/main" xmlns:r="http://schemas.openxmlformats.org/officeDocument/2006/relationships" xmlns:p="http://schemas.openxmlformats.org/presentationml/2006/main">
+  <p:cSld>
+    <p:spTree>
+      <p:nvGrpSpPr>
+        <p:cNvPr id="1" name="">
+          <a:extLst>
+            <a:ext uri="{FF2B5EF4-FFF2-40B4-BE49-F238E27FC236}">
+              <a16:creationId xmlns:a16="http://schemas.microsoft.com/office/drawing/2014/main" id="{F8322314-F5AC-F900-700C-362CBDA18946}"/>
+            </a:ext>
+          </a:extLst>
+        </p:cNvPr>
+        <p:cNvGrpSpPr/>
+        <p:nvPr/>
+      </p:nvGrpSpPr>
+      <p:grpSpPr>
+        <a:xfrm>
+          <a:off x="0" y="0"/>
+          <a:ext cx="0" cy="0"/>
+          <a:chOff x="0" y="0"/>
+          <a:chExt cx="0" cy="0"/>
+        </a:xfrm>
+      </p:grpSpPr>
+      <p:pic>
+        <p:nvPicPr>
+          <p:cNvPr id="4" name="Picture 3">
+            <a:extLst>
+              <a:ext uri="{FF2B5EF4-FFF2-40B4-BE49-F238E27FC236}">
+                <a16:creationId xmlns:a16="http://schemas.microsoft.com/office/drawing/2014/main" id="{DAB1FD75-4613-030E-3499-D564E2C4AC30}"/>
+              </a:ext>
+            </a:extLst>
+          </p:cNvPr>
+          <p:cNvPicPr>
+            <a:picLocks noGrp="1" noRot="1" noMove="1" noResize="1" noEditPoints="1" noAdjustHandles="1" noChangeArrowheads="1" noChangeShapeType="1" noCrop="1"/>
+          </p:cNvPicPr>
+          <p:nvPr/>
+        </p:nvPicPr>
+        <p:blipFill>
+          <a:blip r:embed="rId3"/>
+          <a:srcRect t="20213"/>
+          <a:stretch>
+            <a:fillRect/>
+          </a:stretch>
+        </p:blipFill>
+        <p:spPr>
+          <a:xfrm>
+            <a:off x="0" y="0"/>
+            <a:ext cx="12192000" cy="6857989"/>
+          </a:xfrm>
+          <a:prstGeom prst="rect">
+            <a:avLst/>
+          </a:prstGeom>
+        </p:spPr>
+      </p:pic>
+      <p:sp>
+        <p:nvSpPr>
+          <p:cNvPr id="5" name="Rectángulo 4">
+            <a:extLst>
+              <a:ext uri="{FF2B5EF4-FFF2-40B4-BE49-F238E27FC236}">
+                <a16:creationId xmlns:a16="http://schemas.microsoft.com/office/drawing/2014/main" id="{100724C4-8F00-1861-6AA8-40C6F1316BBC}"/>
+              </a:ext>
+            </a:extLst>
+          </p:cNvPr>
+          <p:cNvSpPr>
+            <a:spLocks noGrp="1" noRot="1" noMove="1" noResize="1" noEditPoints="1" noAdjustHandles="1" noChangeArrowheads="1" noChangeShapeType="1"/>
+          </p:cNvSpPr>
+          <p:nvPr/>
+        </p:nvSpPr>
+        <p:spPr>
+          <a:xfrm>
+            <a:off x="957072" y="697264"/>
+            <a:ext cx="10198608" cy="987552"/>
+          </a:xfrm>
+          <a:prstGeom prst="rect">
+            <a:avLst/>
+          </a:prstGeom>
+        </p:spPr>
+        <p:style>
+          <a:lnRef idx="2">
+            <a:schemeClr val="dk1"/>
+          </a:lnRef>
+          <a:fillRef idx="1">
+            <a:schemeClr val="lt1"/>
+          </a:fillRef>
+          <a:effectRef idx="0">
+            <a:schemeClr val="dk1"/>
+          </a:effectRef>
+          <a:fontRef idx="minor">
+            <a:schemeClr val="dk1"/>
+          </a:fontRef>
+        </p:style>
+        <p:txBody>
+          <a:bodyPr rtlCol="0" anchor="ctr"/>
+          <a:lstStyle/>
+          <a:p>
+            <a:pPr algn="ctr"/>
+            <a:endParaRPr lang="en-US"/>
+          </a:p>
+        </p:txBody>
+      </p:sp>
+      <p:sp>
+        <p:nvSpPr>
+          <p:cNvPr id="2" name="Título 1">
+            <a:extLst>
+              <a:ext uri="{FF2B5EF4-FFF2-40B4-BE49-F238E27FC236}">
+                <a16:creationId xmlns:a16="http://schemas.microsoft.com/office/drawing/2014/main" id="{09DB2206-4E91-293F-8469-936FCC8DFFF0}"/>
+              </a:ext>
+            </a:extLst>
+          </p:cNvPr>
+          <p:cNvSpPr>
+            <a:spLocks noGrp="1"/>
+          </p:cNvSpPr>
+          <p:nvPr>
+            <p:ph type="title"/>
+          </p:nvPr>
+        </p:nvSpPr>
+        <p:spPr>
+          <a:xfrm>
+            <a:off x="957071" y="765110"/>
+            <a:ext cx="10127695" cy="790872"/>
+          </a:xfrm>
+        </p:spPr>
+        <p:txBody>
+          <a:bodyPr>
+            <a:normAutofit/>
+          </a:bodyPr>
+          <a:lstStyle/>
+          <a:p>
+            <a:pPr algn="ctr"/>
+            <a:r>
+              <a:rPr lang="en-US" dirty="0">
+                <a:solidFill>
+                  <a:schemeClr val="tx1"/>
+                </a:solidFill>
+              </a:rPr>
+              <a:t>Average cooperator fraction dynamics</a:t>
+            </a:r>
+          </a:p>
+        </p:txBody>
+      </p:sp>
+      <p:sp>
+        <p:nvSpPr>
+          <p:cNvPr id="6" name="Rectángulo 5">
+            <a:extLst>
+              <a:ext uri="{FF2B5EF4-FFF2-40B4-BE49-F238E27FC236}">
+                <a16:creationId xmlns:a16="http://schemas.microsoft.com/office/drawing/2014/main" id="{454AA9CF-42D1-8575-3ADB-390B5173792D}"/>
+              </a:ext>
+            </a:extLst>
+          </p:cNvPr>
+          <p:cNvSpPr>
+            <a:spLocks/>
+          </p:cNvSpPr>
+          <p:nvPr/>
+        </p:nvSpPr>
+        <p:spPr>
+          <a:xfrm>
+            <a:off x="7172324" y="2023962"/>
+            <a:ext cx="4314825" cy="4290709"/>
+          </a:xfrm>
+          <a:prstGeom prst="rect">
+            <a:avLst/>
+          </a:prstGeom>
+          <a:solidFill>
+            <a:schemeClr val="bg1">
+              <a:lumMod val="95000"/>
+            </a:schemeClr>
+          </a:solidFill>
+          <a:ln>
+            <a:solidFill>
+              <a:schemeClr val="tx2"/>
+            </a:solidFill>
+          </a:ln>
+        </p:spPr>
+        <p:style>
+          <a:lnRef idx="2">
+            <a:schemeClr val="accent1">
+              <a:shade val="15000"/>
+            </a:schemeClr>
+          </a:lnRef>
+          <a:fillRef idx="1">
+            <a:schemeClr val="accent1"/>
+          </a:fillRef>
+          <a:effectRef idx="0">
+            <a:schemeClr val="accent1"/>
+          </a:effectRef>
+          <a:fontRef idx="minor">
+            <a:schemeClr val="lt1"/>
+          </a:fontRef>
+        </p:style>
+        <p:txBody>
+          <a:bodyPr rtlCol="0" anchor="ctr"/>
+          <a:lstStyle/>
+          <a:p>
+            <a:pPr algn="ctr"/>
+            <a:endParaRPr lang="en-US"/>
+          </a:p>
+        </p:txBody>
+      </p:sp>
+      <p:pic>
+        <p:nvPicPr>
+          <p:cNvPr id="7" name="Marcador de contenido 6">
+            <a:extLst>
+              <a:ext uri="{FF2B5EF4-FFF2-40B4-BE49-F238E27FC236}">
+                <a16:creationId xmlns:a16="http://schemas.microsoft.com/office/drawing/2014/main" id="{52C97C4D-4A41-DFDB-4B64-CA799C04B2D0}"/>
+              </a:ext>
+            </a:extLst>
+          </p:cNvPr>
+          <p:cNvPicPr>
+            <a:picLocks noGrp="1" noChangeAspect="1"/>
+          </p:cNvPicPr>
+          <p:nvPr>
+            <p:ph idx="1"/>
+          </p:nvPr>
+        </p:nvPicPr>
+        <p:blipFill>
+          <a:blip r:embed="rId4">
+            <a:extLst>
+              <a:ext uri="{28A0092B-C50C-407E-A947-70E740481C1C}">
+                <a14:useLocalDpi xmlns:a14="http://schemas.microsoft.com/office/drawing/2010/main" val="0"/>
+              </a:ext>
+            </a:extLst>
+          </a:blip>
+          <a:srcRect t="9083" b="-1"/>
+          <a:stretch>
+            <a:fillRect/>
+          </a:stretch>
+        </p:blipFill>
+        <p:spPr>
+          <a:xfrm>
+            <a:off x="614356" y="2506614"/>
+            <a:ext cx="6400813" cy="3325403"/>
+          </a:xfrm>
+          <a:prstGeom prst="rect">
+            <a:avLst/>
+          </a:prstGeom>
+        </p:spPr>
+      </p:pic>
+    </p:spTree>
+    <p:extLst>
+      <p:ext uri="{BB962C8B-B14F-4D97-AF65-F5344CB8AC3E}">
+        <p14:creationId xmlns:p14="http://schemas.microsoft.com/office/powerpoint/2010/main" val="31039525"/>
+      </p:ext>
+    </p:extLst>
+  </p:cSld>
+  <p:clrMapOvr>
+    <a:masterClrMapping/>
+  </p:clrMapOvr>
+</p:sld>
+</file>
+
+<file path=ppt/slides/slide11.xml><?xml version="1.0" encoding="utf-8"?>
+<p:sld xmlns:a="http://schemas.openxmlformats.org/drawingml/2006/main" xmlns:r="http://schemas.openxmlformats.org/officeDocument/2006/relationships" xmlns:p="http://schemas.openxmlformats.org/presentationml/2006/main">
+  <p:cSld>
+    <p:spTree>
+      <p:nvGrpSpPr>
+        <p:cNvPr id="1" name="">
+          <a:extLst>
+            <a:ext uri="{FF2B5EF4-FFF2-40B4-BE49-F238E27FC236}">
+              <a16:creationId xmlns:a16="http://schemas.microsoft.com/office/drawing/2014/main" id="{76EAEC6C-B27B-A1BA-827C-87FF0EFC66BA}"/>
+            </a:ext>
+          </a:extLst>
+        </p:cNvPr>
+        <p:cNvGrpSpPr/>
+        <p:nvPr/>
+      </p:nvGrpSpPr>
+      <p:grpSpPr>
+        <a:xfrm>
+          <a:off x="0" y="0"/>
+          <a:ext cx="0" cy="0"/>
+          <a:chOff x="0" y="0"/>
+          <a:chExt cx="0" cy="0"/>
+        </a:xfrm>
+      </p:grpSpPr>
+      <p:pic>
+        <p:nvPicPr>
+          <p:cNvPr id="4" name="Picture 3">
+            <a:extLst>
+              <a:ext uri="{FF2B5EF4-FFF2-40B4-BE49-F238E27FC236}">
+                <a16:creationId xmlns:a16="http://schemas.microsoft.com/office/drawing/2014/main" id="{CF7A821C-0292-9683-5435-A1682AF07AF4}"/>
+              </a:ext>
+            </a:extLst>
+          </p:cNvPr>
+          <p:cNvPicPr>
+            <a:picLocks noGrp="1" noRot="1" noMove="1" noResize="1" noEditPoints="1" noAdjustHandles="1" noChangeArrowheads="1" noChangeShapeType="1" noCrop="1"/>
+          </p:cNvPicPr>
+          <p:nvPr/>
+        </p:nvPicPr>
+        <p:blipFill>
+          <a:blip r:embed="rId2"/>
+          <a:srcRect t="20213"/>
+          <a:stretch>
+            <a:fillRect/>
+          </a:stretch>
+        </p:blipFill>
+        <p:spPr>
+          <a:xfrm>
+            <a:off x="0" y="0"/>
+            <a:ext cx="12192000" cy="6857989"/>
+          </a:xfrm>
+          <a:prstGeom prst="rect">
+            <a:avLst/>
+          </a:prstGeom>
+        </p:spPr>
+      </p:pic>
+      <p:sp>
+        <p:nvSpPr>
+          <p:cNvPr id="5" name="Rectángulo 4">
+            <a:extLst>
+              <a:ext uri="{FF2B5EF4-FFF2-40B4-BE49-F238E27FC236}">
+                <a16:creationId xmlns:a16="http://schemas.microsoft.com/office/drawing/2014/main" id="{506ACEB4-E658-2833-8F8F-1DEAE65A3330}"/>
+              </a:ext>
+            </a:extLst>
+          </p:cNvPr>
+          <p:cNvSpPr>
+            <a:spLocks noGrp="1" noRot="1" noMove="1" noResize="1" noEditPoints="1" noAdjustHandles="1" noChangeArrowheads="1" noChangeShapeType="1"/>
+          </p:cNvSpPr>
+          <p:nvPr/>
+        </p:nvSpPr>
+        <p:spPr>
+          <a:xfrm>
+            <a:off x="957072" y="697264"/>
+            <a:ext cx="10198608" cy="987552"/>
+          </a:xfrm>
+          <a:prstGeom prst="rect">
+            <a:avLst/>
+          </a:prstGeom>
+        </p:spPr>
+        <p:style>
+          <a:lnRef idx="2">
+            <a:schemeClr val="dk1"/>
+          </a:lnRef>
+          <a:fillRef idx="1">
+            <a:schemeClr val="lt1"/>
+          </a:fillRef>
+          <a:effectRef idx="0">
+            <a:schemeClr val="dk1"/>
+          </a:effectRef>
+          <a:fontRef idx="minor">
+            <a:schemeClr val="dk1"/>
+          </a:fontRef>
+        </p:style>
+        <p:txBody>
+          <a:bodyPr rtlCol="0" anchor="ctr"/>
+          <a:lstStyle/>
+          <a:p>
+            <a:pPr algn="ctr"/>
+            <a:endParaRPr lang="en-US"/>
+          </a:p>
+        </p:txBody>
+      </p:sp>
+      <p:sp>
+        <p:nvSpPr>
+          <p:cNvPr id="2" name="Título 1">
+            <a:extLst>
+              <a:ext uri="{FF2B5EF4-FFF2-40B4-BE49-F238E27FC236}">
+                <a16:creationId xmlns:a16="http://schemas.microsoft.com/office/drawing/2014/main" id="{D79D0F49-C2BB-9557-A7C1-183FA15A4DA6}"/>
+              </a:ext>
+            </a:extLst>
+          </p:cNvPr>
+          <p:cNvSpPr>
+            <a:spLocks noGrp="1"/>
+          </p:cNvSpPr>
+          <p:nvPr>
+            <p:ph type="title"/>
+          </p:nvPr>
+        </p:nvSpPr>
+        <p:spPr>
+          <a:xfrm>
+            <a:off x="957071" y="765110"/>
+            <a:ext cx="10127695" cy="790872"/>
+          </a:xfrm>
+        </p:spPr>
+        <p:txBody>
+          <a:bodyPr>
+            <a:normAutofit fontScale="90000"/>
+          </a:bodyPr>
+          <a:lstStyle/>
+          <a:p>
+            <a:pPr algn="ctr"/>
+            <a:r>
+              <a:rPr lang="en-US" dirty="0">
+                <a:solidFill>
+                  <a:schemeClr val="tx1"/>
+                </a:solidFill>
+              </a:rPr>
+              <a:t>Competition between selection and growth</a:t>
+            </a:r>
+          </a:p>
+        </p:txBody>
+      </p:sp>
+      <p:sp>
+        <p:nvSpPr>
+          <p:cNvPr id="6" name="Rectángulo 5">
+            <a:extLst>
+              <a:ext uri="{FF2B5EF4-FFF2-40B4-BE49-F238E27FC236}">
+                <a16:creationId xmlns:a16="http://schemas.microsoft.com/office/drawing/2014/main" id="{5C615D35-0622-95FC-BFEA-D6C8BA4209A4}"/>
+              </a:ext>
+            </a:extLst>
+          </p:cNvPr>
+          <p:cNvSpPr>
+            <a:spLocks/>
+          </p:cNvSpPr>
+          <p:nvPr/>
+        </p:nvSpPr>
+        <p:spPr>
+          <a:xfrm>
+            <a:off x="6467474" y="2023962"/>
+            <a:ext cx="5124451" cy="4290709"/>
+          </a:xfrm>
+          <a:prstGeom prst="rect">
+            <a:avLst/>
+          </a:prstGeom>
+          <a:solidFill>
+            <a:schemeClr val="bg1">
+              <a:lumMod val="95000"/>
+            </a:schemeClr>
+          </a:solidFill>
+          <a:ln>
+            <a:solidFill>
+              <a:schemeClr val="tx2"/>
+            </a:solidFill>
+          </a:ln>
+        </p:spPr>
+        <p:style>
+          <a:lnRef idx="2">
+            <a:schemeClr val="accent1">
+              <a:shade val="15000"/>
+            </a:schemeClr>
+          </a:lnRef>
+          <a:fillRef idx="1">
+            <a:schemeClr val="accent1"/>
+          </a:fillRef>
+          <a:effectRef idx="0">
+            <a:schemeClr val="accent1"/>
+          </a:effectRef>
+          <a:fontRef idx="minor">
+            <a:schemeClr val="lt1"/>
+          </a:fontRef>
+        </p:style>
+        <p:txBody>
+          <a:bodyPr rtlCol="0" anchor="ctr"/>
+          <a:lstStyle/>
+          <a:p>
+            <a:pPr algn="ctr"/>
+            <a:endParaRPr lang="en-US"/>
+          </a:p>
+        </p:txBody>
+      </p:sp>
+      <p:pic>
+        <p:nvPicPr>
+          <p:cNvPr id="7" name="Marcador de contenido 6">
+            <a:extLst>
+              <a:ext uri="{FF2B5EF4-FFF2-40B4-BE49-F238E27FC236}">
+                <a16:creationId xmlns:a16="http://schemas.microsoft.com/office/drawing/2014/main" id="{0C19D8CA-9A3D-76CC-BD9B-2F79DA2111E6}"/>
+              </a:ext>
+            </a:extLst>
+          </p:cNvPr>
+          <p:cNvPicPr>
+            <a:picLocks noGrp="1" noChangeAspect="1"/>
+          </p:cNvPicPr>
+          <p:nvPr>
+            <p:ph idx="1"/>
+          </p:nvPr>
+        </p:nvPicPr>
+        <p:blipFill>
+          <a:blip r:embed="rId3">
+            <a:extLst>
+              <a:ext uri="{28A0092B-C50C-407E-A947-70E740481C1C}">
+                <a14:useLocalDpi xmlns:a14="http://schemas.microsoft.com/office/drawing/2010/main" val="0"/>
+              </a:ext>
+            </a:extLst>
+          </a:blip>
+          <a:stretch>
+            <a:fillRect/>
+          </a:stretch>
+        </p:blipFill>
+        <p:spPr>
+          <a:xfrm>
+            <a:off x="483869" y="2023961"/>
+            <a:ext cx="5809655" cy="4290709"/>
+          </a:xfrm>
+          <a:prstGeom prst="rect">
+            <a:avLst/>
+          </a:prstGeom>
+        </p:spPr>
+      </p:pic>
+    </p:spTree>
+    <p:extLst>
+      <p:ext uri="{BB962C8B-B14F-4D97-AF65-F5344CB8AC3E}">
+        <p14:creationId xmlns:p14="http://schemas.microsoft.com/office/powerpoint/2010/main" val="2982044152"/>
+      </p:ext>
+    </p:extLst>
+  </p:cSld>
+  <p:clrMapOvr>
+    <a:masterClrMapping/>
+  </p:clrMapOvr>
+</p:sld>
+</file>
+
+<file path=ppt/slides/slide12.xml><?xml version="1.0" encoding="utf-8"?>
+<p:sld xmlns:a="http://schemas.openxmlformats.org/drawingml/2006/main" xmlns:r="http://schemas.openxmlformats.org/officeDocument/2006/relationships" xmlns:p="http://schemas.openxmlformats.org/presentationml/2006/main">
+  <p:cSld>
+    <p:spTree>
+      <p:nvGrpSpPr>
+        <p:cNvPr id="1" name="">
+          <a:extLst>
+            <a:ext uri="{FF2B5EF4-FFF2-40B4-BE49-F238E27FC236}">
+              <a16:creationId xmlns:a16="http://schemas.microsoft.com/office/drawing/2014/main" id="{784D9106-6380-BFC4-E95F-873C901107F2}"/>
+            </a:ext>
+          </a:extLst>
+        </p:cNvPr>
+        <p:cNvGrpSpPr/>
+        <p:nvPr/>
+      </p:nvGrpSpPr>
+      <p:grpSpPr>
+        <a:xfrm>
+          <a:off x="0" y="0"/>
+          <a:ext cx="0" cy="0"/>
+          <a:chOff x="0" y="0"/>
+          <a:chExt cx="0" cy="0"/>
+        </a:xfrm>
+      </p:grpSpPr>
+      <p:pic>
+        <p:nvPicPr>
+          <p:cNvPr id="4" name="Picture 3">
+            <a:extLst>
+              <a:ext uri="{FF2B5EF4-FFF2-40B4-BE49-F238E27FC236}">
+                <a16:creationId xmlns:a16="http://schemas.microsoft.com/office/drawing/2014/main" id="{A0707E8A-0BF5-D42E-4D64-2732A6FB61E4}"/>
+              </a:ext>
+            </a:extLst>
+          </p:cNvPr>
+          <p:cNvPicPr>
+            <a:picLocks noGrp="1" noRot="1" noMove="1" noResize="1" noEditPoints="1" noAdjustHandles="1" noChangeArrowheads="1" noChangeShapeType="1" noCrop="1"/>
+          </p:cNvPicPr>
+          <p:nvPr/>
+        </p:nvPicPr>
+        <p:blipFill>
+          <a:blip r:embed="rId2"/>
+          <a:srcRect t="20213"/>
+          <a:stretch>
+            <a:fillRect/>
+          </a:stretch>
+        </p:blipFill>
+        <p:spPr>
+          <a:xfrm>
+            <a:off x="0" y="0"/>
+            <a:ext cx="12192000" cy="6857989"/>
+          </a:xfrm>
+          <a:prstGeom prst="rect">
+            <a:avLst/>
+          </a:prstGeom>
+        </p:spPr>
+      </p:pic>
+      <p:sp>
+        <p:nvSpPr>
+          <p:cNvPr id="5" name="Rectángulo 4">
+            <a:extLst>
+              <a:ext uri="{FF2B5EF4-FFF2-40B4-BE49-F238E27FC236}">
+                <a16:creationId xmlns:a16="http://schemas.microsoft.com/office/drawing/2014/main" id="{E126BCB5-0DDA-CE5C-FD0C-D578DBDD6A4B}"/>
+              </a:ext>
+            </a:extLst>
+          </p:cNvPr>
+          <p:cNvSpPr>
+            <a:spLocks noGrp="1" noRot="1" noMove="1" noResize="1" noEditPoints="1" noAdjustHandles="1" noChangeArrowheads="1" noChangeShapeType="1"/>
+          </p:cNvSpPr>
+          <p:nvPr/>
+        </p:nvSpPr>
+        <p:spPr>
+          <a:xfrm>
+            <a:off x="957072" y="697264"/>
+            <a:ext cx="10198608" cy="987552"/>
+          </a:xfrm>
+          <a:prstGeom prst="rect">
+            <a:avLst/>
+          </a:prstGeom>
+        </p:spPr>
+        <p:style>
+          <a:lnRef idx="2">
+            <a:schemeClr val="dk1"/>
+          </a:lnRef>
+          <a:fillRef idx="1">
+            <a:schemeClr val="lt1"/>
+          </a:fillRef>
+          <a:effectRef idx="0">
+            <a:schemeClr val="dk1"/>
+          </a:effectRef>
+          <a:fontRef idx="minor">
+            <a:schemeClr val="dk1"/>
+          </a:fontRef>
+        </p:style>
+        <p:txBody>
+          <a:bodyPr rtlCol="0" anchor="ctr"/>
+          <a:lstStyle/>
+          <a:p>
+            <a:pPr algn="ctr"/>
+            <a:endParaRPr lang="en-US"/>
+          </a:p>
+        </p:txBody>
+      </p:sp>
+      <p:sp>
+        <p:nvSpPr>
+          <p:cNvPr id="2" name="Título 1">
+            <a:extLst>
+              <a:ext uri="{FF2B5EF4-FFF2-40B4-BE49-F238E27FC236}">
+                <a16:creationId xmlns:a16="http://schemas.microsoft.com/office/drawing/2014/main" id="{179AAD70-88DB-D9DA-7619-B4336FF8A339}"/>
+              </a:ext>
+            </a:extLst>
+          </p:cNvPr>
+          <p:cNvSpPr>
+            <a:spLocks noGrp="1"/>
+          </p:cNvSpPr>
+          <p:nvPr>
+            <p:ph type="title"/>
+          </p:nvPr>
+        </p:nvSpPr>
+        <p:spPr>
+          <a:xfrm>
+            <a:off x="957071" y="765110"/>
+            <a:ext cx="10127695" cy="790872"/>
+          </a:xfrm>
+        </p:spPr>
+        <p:txBody>
+          <a:bodyPr>
+            <a:normAutofit/>
+          </a:bodyPr>
+          <a:lstStyle/>
+          <a:p>
+            <a:pPr algn="ctr"/>
+            <a:r>
+              <a:rPr lang="en-US" dirty="0">
+                <a:solidFill>
+                  <a:schemeClr val="tx1"/>
+                </a:solidFill>
+              </a:rPr>
+              <a:t>Conclusions</a:t>
+            </a:r>
+          </a:p>
+        </p:txBody>
+      </p:sp>
+      <p:sp>
+        <p:nvSpPr>
+          <p:cNvPr id="6" name="Rectángulo 5">
+            <a:extLst>
+              <a:ext uri="{FF2B5EF4-FFF2-40B4-BE49-F238E27FC236}">
+                <a16:creationId xmlns:a16="http://schemas.microsoft.com/office/drawing/2014/main" id="{816B3BDF-8602-C687-CF56-70756DA646A3}"/>
+              </a:ext>
+            </a:extLst>
+          </p:cNvPr>
+          <p:cNvSpPr>
+            <a:spLocks noGrp="1" noRot="1" noMove="1" noResize="1" noEditPoints="1" noAdjustHandles="1" noChangeArrowheads="1" noChangeShapeType="1"/>
+          </p:cNvSpPr>
+          <p:nvPr/>
+        </p:nvSpPr>
+        <p:spPr>
+          <a:xfrm>
+            <a:off x="957072" y="2023962"/>
+            <a:ext cx="10198608" cy="4290709"/>
+          </a:xfrm>
+          <a:prstGeom prst="rect">
+            <a:avLst/>
+          </a:prstGeom>
+          <a:solidFill>
+            <a:schemeClr val="bg1">
+              <a:lumMod val="95000"/>
+            </a:schemeClr>
+          </a:solidFill>
+          <a:ln>
+            <a:solidFill>
+              <a:schemeClr val="tx2"/>
+            </a:solidFill>
+          </a:ln>
+        </p:spPr>
+        <p:style>
+          <a:lnRef idx="2">
+            <a:schemeClr val="accent1">
+              <a:shade val="15000"/>
+            </a:schemeClr>
+          </a:lnRef>
+          <a:fillRef idx="1">
+            <a:schemeClr val="accent1"/>
+          </a:fillRef>
+          <a:effectRef idx="0">
+            <a:schemeClr val="accent1"/>
+          </a:effectRef>
+          <a:fontRef idx="minor">
+            <a:schemeClr val="lt1"/>
+          </a:fontRef>
+        </p:style>
+        <p:txBody>
+          <a:bodyPr rtlCol="0" anchor="ctr"/>
+          <a:lstStyle/>
+          <a:p>
+            <a:pPr algn="ctr"/>
+            <a:endParaRPr lang="en-US"/>
+          </a:p>
+        </p:txBody>
+      </p:sp>
+      <p:sp>
+        <p:nvSpPr>
+          <p:cNvPr id="8" name="Marcador de contenido 7">
+            <a:extLst>
+              <a:ext uri="{FF2B5EF4-FFF2-40B4-BE49-F238E27FC236}">
+                <a16:creationId xmlns:a16="http://schemas.microsoft.com/office/drawing/2014/main" id="{96DECFE0-E118-4D46-EA45-B4BA01F88AF3}"/>
+              </a:ext>
+            </a:extLst>
+          </p:cNvPr>
+          <p:cNvSpPr>
+            <a:spLocks noGrp="1"/>
+          </p:cNvSpPr>
+          <p:nvPr>
+            <p:ph idx="1"/>
+          </p:nvPr>
+        </p:nvSpPr>
+        <p:spPr>
+          <a:xfrm>
+            <a:off x="1097280" y="2069530"/>
+            <a:ext cx="10058400" cy="4023360"/>
+          </a:xfrm>
+        </p:spPr>
+        <p:txBody>
+          <a:bodyPr/>
+          <a:lstStyle/>
+          <a:p>
+            <a:endParaRPr lang="en-US" dirty="0"/>
+          </a:p>
+        </p:txBody>
+      </p:sp>
+    </p:spTree>
+    <p:extLst>
+      <p:ext uri="{BB962C8B-B14F-4D97-AF65-F5344CB8AC3E}">
+        <p14:creationId xmlns:p14="http://schemas.microsoft.com/office/powerpoint/2010/main" val="3051654395"/>
+      </p:ext>
+    </p:extLst>
+  </p:cSld>
+  <p:clrMapOvr>
+    <a:masterClrMapping/>
+  </p:clrMapOvr>
+</p:sld>
+</file>
+
+<file path=ppt/slides/slide13.xml><?xml version="1.0" encoding="utf-8"?>
+<p:sld xmlns:a="http://schemas.openxmlformats.org/drawingml/2006/main" xmlns:r="http://schemas.openxmlformats.org/officeDocument/2006/relationships" xmlns:p="http://schemas.openxmlformats.org/presentationml/2006/main">
+  <p:cSld>
+    <p:bg>
+      <p:bgPr>
+        <a:solidFill>
+          <a:schemeClr val="bg1"/>
+        </a:solidFill>
+        <a:effectLst/>
+      </p:bgPr>
+    </p:bg>
+    <p:spTree>
+      <p:nvGrpSpPr>
+        <p:cNvPr id="1" name="">
+          <a:extLst>
+            <a:ext uri="{FF2B5EF4-FFF2-40B4-BE49-F238E27FC236}">
+              <a16:creationId xmlns:a16="http://schemas.microsoft.com/office/drawing/2014/main" id="{64C1D276-B651-332B-B2AA-B301DC446AB0}"/>
+            </a:ext>
+          </a:extLst>
+        </p:cNvPr>
+        <p:cNvGrpSpPr/>
+        <p:nvPr/>
+      </p:nvGrpSpPr>
+      <p:grpSpPr>
+        <a:xfrm>
+          <a:off x="0" y="0"/>
+          <a:ext cx="0" cy="0"/>
+          <a:chOff x="0" y="0"/>
+          <a:chExt cx="0" cy="0"/>
+        </a:xfrm>
+      </p:grpSpPr>
+      <p:pic>
+        <p:nvPicPr>
+          <p:cNvPr id="4" name="Picture 3">
+            <a:extLst>
+              <a:ext uri="{FF2B5EF4-FFF2-40B4-BE49-F238E27FC236}">
+                <a16:creationId xmlns:a16="http://schemas.microsoft.com/office/drawing/2014/main" id="{C1B9965A-350E-C12B-2E4C-5EB8A6B5D683}"/>
+              </a:ext>
+            </a:extLst>
+          </p:cNvPr>
+          <p:cNvPicPr>
+            <a:picLocks noGrp="1" noRot="1" noChangeAspect="1" noMove="1" noResize="1" noEditPoints="1" noAdjustHandles="1" noChangeArrowheads="1" noChangeShapeType="1" noCrop="1"/>
+          </p:cNvPicPr>
+          <p:nvPr/>
+        </p:nvPicPr>
+        <p:blipFill>
+          <a:blip r:embed="rId2"/>
+          <a:srcRect t="20213"/>
+          <a:stretch>
+            <a:fillRect/>
+          </a:stretch>
+        </p:blipFill>
+        <p:spPr>
+          <a:xfrm>
+            <a:off x="0" y="0"/>
+            <a:ext cx="12192000" cy="6857989"/>
+          </a:xfrm>
+          <a:prstGeom prst="rect">
+            <a:avLst/>
+          </a:prstGeom>
+        </p:spPr>
+      </p:pic>
+      <p:sp>
+        <p:nvSpPr>
+          <p:cNvPr id="10" name="Título 1">
+            <a:extLst>
+              <a:ext uri="{FF2B5EF4-FFF2-40B4-BE49-F238E27FC236}">
+                <a16:creationId xmlns:a16="http://schemas.microsoft.com/office/drawing/2014/main" id="{C00B0B38-EE88-2C74-CFEE-93AA01EBACB5}"/>
+              </a:ext>
+            </a:extLst>
+          </p:cNvPr>
+          <p:cNvSpPr>
+            <a:spLocks noGrp="1"/>
+          </p:cNvSpPr>
+          <p:nvPr>
+            <p:ph type="ctrTitle"/>
+          </p:nvPr>
+        </p:nvSpPr>
+        <p:spPr>
+          <a:xfrm>
+            <a:off x="0" y="2935027"/>
+            <a:ext cx="12192000" cy="987933"/>
+          </a:xfrm>
+        </p:spPr>
+        <p:txBody>
+          <a:bodyPr>
+            <a:normAutofit fontScale="90000"/>
+          </a:bodyPr>
+          <a:lstStyle/>
+          <a:p>
+            <a:pPr algn="ctr">
+              <a:lnSpc>
+                <a:spcPct val="100000"/>
+              </a:lnSpc>
+            </a:pPr>
+            <a:r>
+              <a:rPr lang="en-US" sz="6000" dirty="0">
+                <a:solidFill>
+                  <a:schemeClr val="bg1"/>
+                </a:solidFill>
+              </a:rPr>
+              <a:t>Thanks! &lt;3</a:t>
+            </a:r>
+          </a:p>
+        </p:txBody>
+      </p:sp>
+    </p:spTree>
+    <p:extLst>
+      <p:ext uri="{BB962C8B-B14F-4D97-AF65-F5344CB8AC3E}">
+        <p14:creationId xmlns:p14="http://schemas.microsoft.com/office/powerpoint/2010/main" val="3666982622"/>
+      </p:ext>
+    </p:extLst>
+  </p:cSld>
+  <p:clrMapOvr>
+    <a:overrideClrMapping bg1="dk1" tx1="lt1" bg2="dk2" tx2="lt2" accent1="accent1" accent2="accent2" accent3="accent3" accent4="accent4" accent5="accent5" accent6="accent6" hlink="hlink" folHlink="folHlink"/>
+  </p:clrMapOvr>
+</p:sld>
+</file>
+
 <file path=ppt/slides/slide2.xml><?xml version="1.0" encoding="utf-8"?>
 <p:sld xmlns:a="http://schemas.openxmlformats.org/drawingml/2006/main" xmlns:r="http://schemas.openxmlformats.org/officeDocument/2006/relationships" xmlns:p="http://schemas.openxmlformats.org/presentationml/2006/main">
   <p:cSld>
@@ -4461,7 +5879,7 @@
         <p:spPr>
           <a:xfrm>
             <a:off x="957072" y="2023962"/>
-            <a:ext cx="10198608" cy="4290709"/>
+            <a:ext cx="4544568" cy="4290709"/>
           </a:xfrm>
           <a:prstGeom prst="rect">
             <a:avLst/>
@@ -4504,38 +5922,385 @@
       </p:sp>
       <p:sp>
         <p:nvSpPr>
-          <p:cNvPr id="8" name="Marcador de contenido 7">
+          <p:cNvPr id="3" name="Rectángulo 2">
             <a:extLst>
               <a:ext uri="{FF2B5EF4-FFF2-40B4-BE49-F238E27FC236}">
-                <a16:creationId xmlns:a16="http://schemas.microsoft.com/office/drawing/2014/main" id="{1897D75B-FE58-6A98-BB4A-3C339A8C7B10}"/>
+                <a16:creationId xmlns:a16="http://schemas.microsoft.com/office/drawing/2014/main" id="{E8BBE903-F1C1-D5D2-B252-099285A58E89}"/>
               </a:ext>
             </a:extLst>
           </p:cNvPr>
           <p:cNvSpPr>
-            <a:spLocks noGrp="1"/>
-          </p:cNvSpPr>
-          <p:nvPr>
-            <p:ph idx="1"/>
-          </p:nvPr>
-        </p:nvSpPr>
-        <p:spPr>
-          <a:xfrm>
-            <a:off x="1097280" y="2023962"/>
-            <a:ext cx="10058400" cy="3845132"/>
-          </a:xfrm>
-        </p:spPr>
-        <p:txBody>
-          <a:bodyPr/>
-          <a:lstStyle/>
-          <a:p>
-            <a:endParaRPr lang="en-US" dirty="0">
-              <a:solidFill>
-                <a:schemeClr val="tx1"/>
-              </a:solidFill>
+            <a:spLocks noGrp="1" noRot="1" noMove="1" noResize="1" noEditPoints="1" noAdjustHandles="1" noChangeArrowheads="1" noChangeShapeType="1"/>
+          </p:cNvSpPr>
+          <p:nvPr/>
+        </p:nvSpPr>
+        <p:spPr>
+          <a:xfrm>
+            <a:off x="6611112" y="2023962"/>
+            <a:ext cx="4544568" cy="4290709"/>
+          </a:xfrm>
+          <a:prstGeom prst="rect">
+            <a:avLst/>
+          </a:prstGeom>
+          <a:solidFill>
+            <a:schemeClr val="bg1">
+              <a:lumMod val="95000"/>
+            </a:schemeClr>
+          </a:solidFill>
+          <a:ln>
+            <a:solidFill>
+              <a:schemeClr val="tx2"/>
+            </a:solidFill>
+          </a:ln>
+        </p:spPr>
+        <p:style>
+          <a:lnRef idx="2">
+            <a:schemeClr val="accent1">
+              <a:shade val="15000"/>
+            </a:schemeClr>
+          </a:lnRef>
+          <a:fillRef idx="1">
+            <a:schemeClr val="accent1"/>
+          </a:fillRef>
+          <a:effectRef idx="0">
+            <a:schemeClr val="accent1"/>
+          </a:effectRef>
+          <a:fontRef idx="minor">
+            <a:schemeClr val="lt1"/>
+          </a:fontRef>
+        </p:style>
+        <p:txBody>
+          <a:bodyPr rtlCol="0" anchor="ctr"/>
+          <a:lstStyle/>
+          <a:p>
+            <a:pPr algn="ctr"/>
+            <a:endParaRPr lang="en-US"/>
+          </a:p>
+        </p:txBody>
+      </p:sp>
+      <p:sp>
+        <p:nvSpPr>
+          <p:cNvPr id="9" name="CuadroTexto 8">
+            <a:extLst>
+              <a:ext uri="{FF2B5EF4-FFF2-40B4-BE49-F238E27FC236}">
+                <a16:creationId xmlns:a16="http://schemas.microsoft.com/office/drawing/2014/main" id="{29957E8A-348D-B889-4464-F97244593D19}"/>
+              </a:ext>
+            </a:extLst>
+          </p:cNvPr>
+          <p:cNvSpPr txBox="1"/>
+          <p:nvPr/>
+        </p:nvSpPr>
+        <p:spPr>
+          <a:xfrm>
+            <a:off x="957071" y="2080594"/>
+            <a:ext cx="4544569" cy="461665"/>
+          </a:xfrm>
+          <a:prstGeom prst="rect">
+            <a:avLst/>
+          </a:prstGeom>
+          <a:noFill/>
+        </p:spPr>
+        <p:txBody>
+          <a:bodyPr wrap="square">
+            <a:spAutoFit/>
+          </a:bodyPr>
+          <a:lstStyle/>
+          <a:p>
+            <a:pPr algn="ctr"/>
+            <a:r>
+              <a:rPr lang="en-US" sz="2400" dirty="0">
+                <a:solidFill>
+                  <a:schemeClr val="tx1"/>
+                </a:solidFill>
+                <a:latin typeface="+mj-lt"/>
+              </a:rPr>
+              <a:t>Evolutionary game theory</a:t>
+            </a:r>
+            <a:endParaRPr lang="en-US" sz="2400" dirty="0">
+              <a:latin typeface="+mj-lt"/>
             </a:endParaRPr>
           </a:p>
         </p:txBody>
       </p:sp>
+      <p:sp>
+        <p:nvSpPr>
+          <p:cNvPr id="10" name="CuadroTexto 9">
+            <a:extLst>
+              <a:ext uri="{FF2B5EF4-FFF2-40B4-BE49-F238E27FC236}">
+                <a16:creationId xmlns:a16="http://schemas.microsoft.com/office/drawing/2014/main" id="{2C968038-8D8B-13AE-EA49-5F8314F8E330}"/>
+              </a:ext>
+            </a:extLst>
+          </p:cNvPr>
+          <p:cNvSpPr txBox="1"/>
+          <p:nvPr/>
+        </p:nvSpPr>
+        <p:spPr>
+          <a:xfrm>
+            <a:off x="6611111" y="2080593"/>
+            <a:ext cx="4544569" cy="461665"/>
+          </a:xfrm>
+          <a:prstGeom prst="rect">
+            <a:avLst/>
+          </a:prstGeom>
+          <a:noFill/>
+        </p:spPr>
+        <p:txBody>
+          <a:bodyPr wrap="square">
+            <a:spAutoFit/>
+          </a:bodyPr>
+          <a:lstStyle/>
+          <a:p>
+            <a:pPr algn="ctr"/>
+            <a:r>
+              <a:rPr lang="en-US" sz="2400" dirty="0">
+                <a:solidFill>
+                  <a:schemeClr val="tx1"/>
+                </a:solidFill>
+                <a:latin typeface="+mj-lt"/>
+              </a:rPr>
+              <a:t>Ecology</a:t>
+            </a:r>
+            <a:endParaRPr lang="en-US" sz="2400" dirty="0">
+              <a:latin typeface="+mj-lt"/>
+            </a:endParaRPr>
+          </a:p>
+        </p:txBody>
+      </p:sp>
+      <p:sp>
+        <p:nvSpPr>
+          <p:cNvPr id="15" name="CuadroTexto 14">
+            <a:extLst>
+              <a:ext uri="{FF2B5EF4-FFF2-40B4-BE49-F238E27FC236}">
+                <a16:creationId xmlns:a16="http://schemas.microsoft.com/office/drawing/2014/main" id="{FB40D58F-6C79-9DD7-B761-CDEFB13824B4}"/>
+              </a:ext>
+            </a:extLst>
+          </p:cNvPr>
+          <p:cNvSpPr txBox="1"/>
+          <p:nvPr/>
+        </p:nvSpPr>
+        <p:spPr>
+          <a:xfrm>
+            <a:off x="1229196" y="2714183"/>
+            <a:ext cx="4272444" cy="1429622"/>
+          </a:xfrm>
+          <a:prstGeom prst="rect">
+            <a:avLst/>
+          </a:prstGeom>
+          <a:noFill/>
+        </p:spPr>
+        <p:txBody>
+          <a:bodyPr wrap="square">
+            <a:spAutoFit/>
+          </a:bodyPr>
+          <a:lstStyle/>
+          <a:p>
+            <a:pPr algn="just">
+              <a:lnSpc>
+                <a:spcPct val="150000"/>
+              </a:lnSpc>
+            </a:pPr>
+            <a:r>
+              <a:rPr lang="en-US" sz="2000" dirty="0">
+                <a:solidFill>
+                  <a:schemeClr val="tx1"/>
+                </a:solidFill>
+              </a:rPr>
+              <a:t>Species’ Traits/Strategies: A, B</a:t>
+            </a:r>
+          </a:p>
+          <a:p>
+            <a:pPr algn="just">
+              <a:lnSpc>
+                <a:spcPct val="150000"/>
+              </a:lnSpc>
+            </a:pPr>
+            <a:r>
+              <a:rPr lang="en-US" sz="2000" dirty="0"/>
+              <a:t>Fraction of individuals with A: x</a:t>
+            </a:r>
+          </a:p>
+          <a:p>
+            <a:pPr algn="just">
+              <a:lnSpc>
+                <a:spcPct val="150000"/>
+              </a:lnSpc>
+            </a:pPr>
+            <a:r>
+              <a:rPr lang="en-US" sz="2000" dirty="0"/>
+              <a:t>Dynamics: Replicator equation</a:t>
+            </a:r>
+          </a:p>
+        </p:txBody>
+      </p:sp>
+      <p:pic>
+        <p:nvPicPr>
+          <p:cNvPr id="17" name="Imagen 16">
+            <a:extLst>
+              <a:ext uri="{FF2B5EF4-FFF2-40B4-BE49-F238E27FC236}">
+                <a16:creationId xmlns:a16="http://schemas.microsoft.com/office/drawing/2014/main" id="{BF3D6C8A-BE5D-6BBB-F789-6D86F91AC0AF}"/>
+              </a:ext>
+            </a:extLst>
+          </p:cNvPr>
+          <p:cNvPicPr>
+            <a:picLocks noChangeAspect="1"/>
+          </p:cNvPicPr>
+          <p:nvPr/>
+        </p:nvPicPr>
+        <p:blipFill>
+          <a:blip r:embed="rId3"/>
+          <a:srcRect t="47840"/>
+          <a:stretch>
+            <a:fillRect/>
+          </a:stretch>
+        </p:blipFill>
+        <p:spPr>
+          <a:xfrm>
+            <a:off x="2252960" y="4909557"/>
+            <a:ext cx="1952790" cy="524535"/>
+          </a:xfrm>
+          <a:prstGeom prst="rect">
+            <a:avLst/>
+          </a:prstGeom>
+        </p:spPr>
+      </p:pic>
+      <p:pic>
+        <p:nvPicPr>
+          <p:cNvPr id="19" name="Imagen 18">
+            <a:extLst>
+              <a:ext uri="{FF2B5EF4-FFF2-40B4-BE49-F238E27FC236}">
+                <a16:creationId xmlns:a16="http://schemas.microsoft.com/office/drawing/2014/main" id="{0092F207-9EF9-3B5C-815E-BA7CDD2E9DDA}"/>
+              </a:ext>
+            </a:extLst>
+          </p:cNvPr>
+          <p:cNvPicPr>
+            <a:picLocks noChangeAspect="1"/>
+          </p:cNvPicPr>
+          <p:nvPr/>
+        </p:nvPicPr>
+        <p:blipFill>
+          <a:blip r:embed="rId4"/>
+          <a:srcRect t="49654"/>
+          <a:stretch>
+            <a:fillRect/>
+          </a:stretch>
+        </p:blipFill>
+        <p:spPr>
+          <a:xfrm>
+            <a:off x="8098514" y="4284870"/>
+            <a:ext cx="1569761" cy="506293"/>
+          </a:xfrm>
+          <a:prstGeom prst="rect">
+            <a:avLst/>
+          </a:prstGeom>
+        </p:spPr>
+      </p:pic>
+      <p:sp>
+        <p:nvSpPr>
+          <p:cNvPr id="21" name="CuadroTexto 20">
+            <a:extLst>
+              <a:ext uri="{FF2B5EF4-FFF2-40B4-BE49-F238E27FC236}">
+                <a16:creationId xmlns:a16="http://schemas.microsoft.com/office/drawing/2014/main" id="{47309D3E-55AA-5883-DCA1-91D00CDBC8ED}"/>
+              </a:ext>
+            </a:extLst>
+          </p:cNvPr>
+          <p:cNvSpPr txBox="1"/>
+          <p:nvPr/>
+        </p:nvSpPr>
+        <p:spPr>
+          <a:xfrm>
+            <a:off x="6962484" y="2761366"/>
+            <a:ext cx="4272444" cy="506292"/>
+          </a:xfrm>
+          <a:prstGeom prst="rect">
+            <a:avLst/>
+          </a:prstGeom>
+          <a:noFill/>
+        </p:spPr>
+        <p:txBody>
+          <a:bodyPr wrap="square">
+            <a:spAutoFit/>
+          </a:bodyPr>
+          <a:lstStyle/>
+          <a:p>
+            <a:pPr algn="just">
+              <a:lnSpc>
+                <a:spcPct val="150000"/>
+              </a:lnSpc>
+            </a:pPr>
+            <a:r>
+              <a:rPr lang="en-US" sz="2000" dirty="0">
+                <a:solidFill>
+                  <a:schemeClr val="tx1"/>
+                </a:solidFill>
+              </a:rPr>
+              <a:t>Total size of population: N</a:t>
+            </a:r>
+            <a:endParaRPr lang="en-US" sz="2000" dirty="0"/>
+          </a:p>
+        </p:txBody>
+      </p:sp>
+      <p:pic>
+        <p:nvPicPr>
+          <p:cNvPr id="22" name="Imagen 21">
+            <a:extLst>
+              <a:ext uri="{FF2B5EF4-FFF2-40B4-BE49-F238E27FC236}">
+                <a16:creationId xmlns:a16="http://schemas.microsoft.com/office/drawing/2014/main" id="{EEBBD0F0-50E7-D00E-BD31-3F6F5F654DC9}"/>
+              </a:ext>
+            </a:extLst>
+          </p:cNvPr>
+          <p:cNvPicPr>
+            <a:picLocks noChangeAspect="1"/>
+          </p:cNvPicPr>
+          <p:nvPr/>
+        </p:nvPicPr>
+        <p:blipFill>
+          <a:blip r:embed="rId3"/>
+          <a:srcRect b="47840"/>
+          <a:stretch>
+            <a:fillRect/>
+          </a:stretch>
+        </p:blipFill>
+        <p:spPr>
+          <a:xfrm>
+            <a:off x="2252960" y="4428465"/>
+            <a:ext cx="1952790" cy="524535"/>
+          </a:xfrm>
+          <a:prstGeom prst="rect">
+            <a:avLst/>
+          </a:prstGeom>
+        </p:spPr>
+      </p:pic>
+      <p:pic>
+        <p:nvPicPr>
+          <p:cNvPr id="23" name="Imagen 22">
+            <a:extLst>
+              <a:ext uri="{FF2B5EF4-FFF2-40B4-BE49-F238E27FC236}">
+                <a16:creationId xmlns:a16="http://schemas.microsoft.com/office/drawing/2014/main" id="{FE38D983-1C54-A14D-2E24-92564961F69F}"/>
+              </a:ext>
+            </a:extLst>
+          </p:cNvPr>
+          <p:cNvPicPr>
+            <a:picLocks noChangeAspect="1"/>
+          </p:cNvPicPr>
+          <p:nvPr/>
+        </p:nvPicPr>
+        <p:blipFill>
+          <a:blip r:embed="rId4"/>
+          <a:srcRect b="49654"/>
+          <a:stretch>
+            <a:fillRect/>
+          </a:stretch>
+        </p:blipFill>
+        <p:spPr>
+          <a:xfrm>
+            <a:off x="8098514" y="3785536"/>
+            <a:ext cx="1569761" cy="506292"/>
+          </a:xfrm>
+          <a:prstGeom prst="rect">
+            <a:avLst/>
+          </a:prstGeom>
+        </p:spPr>
+      </p:pic>
     </p:spTree>
     <p:extLst>
       <p:ext uri="{BB962C8B-B14F-4D97-AF65-F5344CB8AC3E}">
@@ -4546,10 +6311,687 @@
   <p:clrMapOvr>
     <a:masterClrMapping/>
   </p:clrMapOvr>
+  <p:timing>
+    <p:tnLst>
+      <p:par>
+        <p:cTn id="1" dur="indefinite" restart="never" nodeType="tmRoot">
+          <p:childTnLst>
+            <p:seq concurrent="1" nextAc="seek">
+              <p:cTn id="2" dur="indefinite" nodeType="mainSeq">
+                <p:childTnLst>
+                  <p:par>
+                    <p:cTn id="3" fill="hold">
+                      <p:stCondLst>
+                        <p:cond delay="indefinite"/>
+                      </p:stCondLst>
+                      <p:childTnLst>
+                        <p:par>
+                          <p:cTn id="4" fill="hold">
+                            <p:stCondLst>
+                              <p:cond delay="0"/>
+                            </p:stCondLst>
+                            <p:childTnLst>
+                              <p:par>
+                                <p:cTn id="5" presetID="1" presetClass="entr" presetSubtype="0" fill="hold" nodeType="clickEffect">
+                                  <p:stCondLst>
+                                    <p:cond delay="0"/>
+                                  </p:stCondLst>
+                                  <p:childTnLst>
+                                    <p:set>
+                                      <p:cBhvr>
+                                        <p:cTn id="6" dur="1" fill="hold">
+                                          <p:stCondLst>
+                                            <p:cond delay="0"/>
+                                          </p:stCondLst>
+                                        </p:cTn>
+                                        <p:tgtEl>
+                                          <p:spTgt spid="19"/>
+                                        </p:tgtEl>
+                                        <p:attrNameLst>
+                                          <p:attrName>style.visibility</p:attrName>
+                                        </p:attrNameLst>
+                                      </p:cBhvr>
+                                      <p:to>
+                                        <p:strVal val="visible"/>
+                                      </p:to>
+                                    </p:set>
+                                  </p:childTnLst>
+                                </p:cTn>
+                              </p:par>
+                              <p:par>
+                                <p:cTn id="7" presetID="1" presetClass="entr" presetSubtype="0" fill="hold" nodeType="withEffect">
+                                  <p:stCondLst>
+                                    <p:cond delay="0"/>
+                                  </p:stCondLst>
+                                  <p:childTnLst>
+                                    <p:set>
+                                      <p:cBhvr>
+                                        <p:cTn id="8" dur="1" fill="hold">
+                                          <p:stCondLst>
+                                            <p:cond delay="0"/>
+                                          </p:stCondLst>
+                                        </p:cTn>
+                                        <p:tgtEl>
+                                          <p:spTgt spid="17"/>
+                                        </p:tgtEl>
+                                        <p:attrNameLst>
+                                          <p:attrName>style.visibility</p:attrName>
+                                        </p:attrNameLst>
+                                      </p:cBhvr>
+                                      <p:to>
+                                        <p:strVal val="visible"/>
+                                      </p:to>
+                                    </p:set>
+                                  </p:childTnLst>
+                                </p:cTn>
+                              </p:par>
+                            </p:childTnLst>
+                          </p:cTn>
+                        </p:par>
+                      </p:childTnLst>
+                    </p:cTn>
+                  </p:par>
+                </p:childTnLst>
+              </p:cTn>
+              <p:prevCondLst>
+                <p:cond evt="onPrev" delay="0">
+                  <p:tgtEl>
+                    <p:sldTgt/>
+                  </p:tgtEl>
+                </p:cond>
+              </p:prevCondLst>
+              <p:nextCondLst>
+                <p:cond evt="onNext" delay="0">
+                  <p:tgtEl>
+                    <p:sldTgt/>
+                  </p:tgtEl>
+                </p:cond>
+              </p:nextCondLst>
+            </p:seq>
+          </p:childTnLst>
+        </p:cTn>
+      </p:par>
+    </p:tnLst>
+  </p:timing>
 </p:sld>
 </file>
 
 <file path=ppt/slides/slide4.xml><?xml version="1.0" encoding="utf-8"?>
+<p:sld xmlns:a="http://schemas.openxmlformats.org/drawingml/2006/main" xmlns:r="http://schemas.openxmlformats.org/officeDocument/2006/relationships" xmlns:p="http://schemas.openxmlformats.org/presentationml/2006/main">
+  <p:cSld>
+    <p:spTree>
+      <p:nvGrpSpPr>
+        <p:cNvPr id="1" name="">
+          <a:extLst>
+            <a:ext uri="{FF2B5EF4-FFF2-40B4-BE49-F238E27FC236}">
+              <a16:creationId xmlns:a16="http://schemas.microsoft.com/office/drawing/2014/main" id="{C872B815-320C-DC5B-1513-9FCED0B1A91E}"/>
+            </a:ext>
+          </a:extLst>
+        </p:cNvPr>
+        <p:cNvGrpSpPr/>
+        <p:nvPr/>
+      </p:nvGrpSpPr>
+      <p:grpSpPr>
+        <a:xfrm>
+          <a:off x="0" y="0"/>
+          <a:ext cx="0" cy="0"/>
+          <a:chOff x="0" y="0"/>
+          <a:chExt cx="0" cy="0"/>
+        </a:xfrm>
+      </p:grpSpPr>
+      <p:pic>
+        <p:nvPicPr>
+          <p:cNvPr id="4" name="Picture 3">
+            <a:extLst>
+              <a:ext uri="{FF2B5EF4-FFF2-40B4-BE49-F238E27FC236}">
+                <a16:creationId xmlns:a16="http://schemas.microsoft.com/office/drawing/2014/main" id="{D6B30E75-2959-800F-B79A-6C7B3ECA8E13}"/>
+              </a:ext>
+            </a:extLst>
+          </p:cNvPr>
+          <p:cNvPicPr>
+            <a:picLocks noGrp="1" noRot="1" noMove="1" noResize="1" noEditPoints="1" noAdjustHandles="1" noChangeArrowheads="1" noChangeShapeType="1" noCrop="1"/>
+          </p:cNvPicPr>
+          <p:nvPr/>
+        </p:nvPicPr>
+        <p:blipFill>
+          <a:blip r:embed="rId2"/>
+          <a:srcRect t="20213"/>
+          <a:stretch>
+            <a:fillRect/>
+          </a:stretch>
+        </p:blipFill>
+        <p:spPr>
+          <a:xfrm>
+            <a:off x="0" y="0"/>
+            <a:ext cx="12192000" cy="6857989"/>
+          </a:xfrm>
+          <a:prstGeom prst="rect">
+            <a:avLst/>
+          </a:prstGeom>
+        </p:spPr>
+      </p:pic>
+      <p:sp>
+        <p:nvSpPr>
+          <p:cNvPr id="5" name="Rectángulo 4">
+            <a:extLst>
+              <a:ext uri="{FF2B5EF4-FFF2-40B4-BE49-F238E27FC236}">
+                <a16:creationId xmlns:a16="http://schemas.microsoft.com/office/drawing/2014/main" id="{C9B663F9-3476-40CB-20F2-D8421C113585}"/>
+              </a:ext>
+            </a:extLst>
+          </p:cNvPr>
+          <p:cNvSpPr>
+            <a:spLocks noGrp="1" noRot="1" noMove="1" noResize="1" noEditPoints="1" noAdjustHandles="1" noChangeArrowheads="1" noChangeShapeType="1"/>
+          </p:cNvSpPr>
+          <p:nvPr/>
+        </p:nvSpPr>
+        <p:spPr>
+          <a:xfrm>
+            <a:off x="957072" y="697264"/>
+            <a:ext cx="10198608" cy="987552"/>
+          </a:xfrm>
+          <a:prstGeom prst="rect">
+            <a:avLst/>
+          </a:prstGeom>
+        </p:spPr>
+        <p:style>
+          <a:lnRef idx="2">
+            <a:schemeClr val="dk1"/>
+          </a:lnRef>
+          <a:fillRef idx="1">
+            <a:schemeClr val="lt1"/>
+          </a:fillRef>
+          <a:effectRef idx="0">
+            <a:schemeClr val="dk1"/>
+          </a:effectRef>
+          <a:fontRef idx="minor">
+            <a:schemeClr val="dk1"/>
+          </a:fontRef>
+        </p:style>
+        <p:txBody>
+          <a:bodyPr rtlCol="0" anchor="ctr"/>
+          <a:lstStyle/>
+          <a:p>
+            <a:pPr algn="ctr"/>
+            <a:endParaRPr lang="en-US"/>
+          </a:p>
+        </p:txBody>
+      </p:sp>
+      <p:sp>
+        <p:nvSpPr>
+          <p:cNvPr id="2" name="Título 1">
+            <a:extLst>
+              <a:ext uri="{FF2B5EF4-FFF2-40B4-BE49-F238E27FC236}">
+                <a16:creationId xmlns:a16="http://schemas.microsoft.com/office/drawing/2014/main" id="{D2FEECC2-811B-CC54-346C-4CC86F7B5EB3}"/>
+              </a:ext>
+            </a:extLst>
+          </p:cNvPr>
+          <p:cNvSpPr>
+            <a:spLocks noGrp="1"/>
+          </p:cNvSpPr>
+          <p:nvPr>
+            <p:ph type="title"/>
+          </p:nvPr>
+        </p:nvSpPr>
+        <p:spPr>
+          <a:xfrm>
+            <a:off x="957071" y="765110"/>
+            <a:ext cx="10127695" cy="790872"/>
+          </a:xfrm>
+        </p:spPr>
+        <p:txBody>
+          <a:bodyPr>
+            <a:normAutofit/>
+          </a:bodyPr>
+          <a:lstStyle/>
+          <a:p>
+            <a:pPr algn="ctr"/>
+            <a:r>
+              <a:rPr lang="en-US" dirty="0">
+                <a:solidFill>
+                  <a:schemeClr val="tx1"/>
+                </a:solidFill>
+              </a:rPr>
+              <a:t>Introduction</a:t>
+            </a:r>
+          </a:p>
+        </p:txBody>
+      </p:sp>
+      <p:sp>
+        <p:nvSpPr>
+          <p:cNvPr id="3" name="Rectángulo 2">
+            <a:extLst>
+              <a:ext uri="{FF2B5EF4-FFF2-40B4-BE49-F238E27FC236}">
+                <a16:creationId xmlns:a16="http://schemas.microsoft.com/office/drawing/2014/main" id="{E3011D06-04DF-4F35-E3E2-104E854C7071}"/>
+              </a:ext>
+            </a:extLst>
+          </p:cNvPr>
+          <p:cNvSpPr>
+            <a:spLocks noGrp="1" noRot="1" noMove="1" noResize="1" noEditPoints="1" noAdjustHandles="1" noChangeArrowheads="1" noChangeShapeType="1"/>
+          </p:cNvSpPr>
+          <p:nvPr/>
+        </p:nvSpPr>
+        <p:spPr>
+          <a:xfrm>
+            <a:off x="6611112" y="2023962"/>
+            <a:ext cx="4544568" cy="4290709"/>
+          </a:xfrm>
+          <a:prstGeom prst="rect">
+            <a:avLst/>
+          </a:prstGeom>
+          <a:solidFill>
+            <a:schemeClr val="bg1">
+              <a:lumMod val="95000"/>
+            </a:schemeClr>
+          </a:solidFill>
+          <a:ln>
+            <a:solidFill>
+              <a:schemeClr val="tx2"/>
+            </a:solidFill>
+          </a:ln>
+        </p:spPr>
+        <p:style>
+          <a:lnRef idx="2">
+            <a:schemeClr val="accent1">
+              <a:shade val="15000"/>
+            </a:schemeClr>
+          </a:lnRef>
+          <a:fillRef idx="1">
+            <a:schemeClr val="accent1"/>
+          </a:fillRef>
+          <a:effectRef idx="0">
+            <a:schemeClr val="accent1"/>
+          </a:effectRef>
+          <a:fontRef idx="minor">
+            <a:schemeClr val="lt1"/>
+          </a:fontRef>
+        </p:style>
+        <p:txBody>
+          <a:bodyPr rtlCol="0" anchor="ctr"/>
+          <a:lstStyle/>
+          <a:p>
+            <a:pPr algn="ctr"/>
+            <a:endParaRPr lang="en-US"/>
+          </a:p>
+        </p:txBody>
+      </p:sp>
+      <p:sp>
+        <p:nvSpPr>
+          <p:cNvPr id="10" name="CuadroTexto 9">
+            <a:extLst>
+              <a:ext uri="{FF2B5EF4-FFF2-40B4-BE49-F238E27FC236}">
+                <a16:creationId xmlns:a16="http://schemas.microsoft.com/office/drawing/2014/main" id="{809E87EA-54A6-34C2-2D33-9524904432A3}"/>
+              </a:ext>
+            </a:extLst>
+          </p:cNvPr>
+          <p:cNvSpPr txBox="1"/>
+          <p:nvPr/>
+        </p:nvSpPr>
+        <p:spPr>
+          <a:xfrm>
+            <a:off x="6527137" y="3735654"/>
+            <a:ext cx="2290292" cy="400110"/>
+          </a:xfrm>
+          <a:prstGeom prst="rect">
+            <a:avLst/>
+          </a:prstGeom>
+          <a:noFill/>
+        </p:spPr>
+        <p:txBody>
+          <a:bodyPr wrap="square">
+            <a:spAutoFit/>
+          </a:bodyPr>
+          <a:lstStyle/>
+          <a:p>
+            <a:pPr algn="ctr"/>
+            <a:r>
+              <a:rPr lang="en-US" sz="2000" dirty="0">
+                <a:solidFill>
+                  <a:schemeClr val="tx1"/>
+                </a:solidFill>
+                <a:latin typeface="+mj-lt"/>
+              </a:rPr>
+              <a:t>New ant colony: </a:t>
+            </a:r>
+            <a:endParaRPr lang="en-US" sz="2000" dirty="0">
+              <a:latin typeface="+mj-lt"/>
+            </a:endParaRPr>
+          </a:p>
+        </p:txBody>
+      </p:sp>
+      <p:sp>
+        <p:nvSpPr>
+          <p:cNvPr id="16" name="Rectángulo: esquinas redondeadas 15">
+            <a:extLst>
+              <a:ext uri="{FF2B5EF4-FFF2-40B4-BE49-F238E27FC236}">
+                <a16:creationId xmlns:a16="http://schemas.microsoft.com/office/drawing/2014/main" id="{E65E18DD-040C-7B79-32FC-70DAAEB5EF44}"/>
+              </a:ext>
+            </a:extLst>
+          </p:cNvPr>
+          <p:cNvSpPr/>
+          <p:nvPr/>
+        </p:nvSpPr>
+        <p:spPr>
+          <a:xfrm>
+            <a:off x="6804660" y="2321092"/>
+            <a:ext cx="4214958" cy="1186471"/>
+          </a:xfrm>
+          <a:prstGeom prst="roundRect">
+            <a:avLst/>
+          </a:prstGeom>
+          <a:solidFill>
+            <a:schemeClr val="accent4">
+              <a:lumMod val="20000"/>
+              <a:lumOff val="80000"/>
+            </a:schemeClr>
+          </a:solidFill>
+          <a:ln w="38100">
+            <a:solidFill>
+              <a:schemeClr val="accent4">
+                <a:lumMod val="60000"/>
+                <a:lumOff val="40000"/>
+              </a:schemeClr>
+            </a:solidFill>
+          </a:ln>
+        </p:spPr>
+        <p:style>
+          <a:lnRef idx="2">
+            <a:schemeClr val="accent2"/>
+          </a:lnRef>
+          <a:fillRef idx="1">
+            <a:schemeClr val="lt1"/>
+          </a:fillRef>
+          <a:effectRef idx="0">
+            <a:schemeClr val="accent2"/>
+          </a:effectRef>
+          <a:fontRef idx="minor">
+            <a:schemeClr val="dk1"/>
+          </a:fontRef>
+        </p:style>
+        <p:txBody>
+          <a:bodyPr rtlCol="0" anchor="ctr"/>
+          <a:lstStyle/>
+          <a:p>
+            <a:pPr algn="ctr"/>
+            <a:endParaRPr lang="en-US"/>
+          </a:p>
+        </p:txBody>
+      </p:sp>
+      <p:sp>
+        <p:nvSpPr>
+          <p:cNvPr id="21" name="CuadroTexto 20">
+            <a:extLst>
+              <a:ext uri="{FF2B5EF4-FFF2-40B4-BE49-F238E27FC236}">
+                <a16:creationId xmlns:a16="http://schemas.microsoft.com/office/drawing/2014/main" id="{1F7FDE47-E943-F807-FF60-A93A1C5F757E}"/>
+              </a:ext>
+            </a:extLst>
+          </p:cNvPr>
+          <p:cNvSpPr txBox="1"/>
+          <p:nvPr/>
+        </p:nvSpPr>
+        <p:spPr>
+          <a:xfrm>
+            <a:off x="6611112" y="2253438"/>
+            <a:ext cx="4544568" cy="1143070"/>
+          </a:xfrm>
+          <a:prstGeom prst="rect">
+            <a:avLst/>
+          </a:prstGeom>
+          <a:noFill/>
+        </p:spPr>
+        <p:txBody>
+          <a:bodyPr wrap="square">
+            <a:spAutoFit/>
+          </a:bodyPr>
+          <a:lstStyle/>
+          <a:p>
+            <a:pPr algn="ctr">
+              <a:lnSpc>
+                <a:spcPct val="150000"/>
+              </a:lnSpc>
+            </a:pPr>
+            <a:r>
+              <a:rPr lang="en-US" sz="2400" dirty="0">
+                <a:solidFill>
+                  <a:schemeClr val="tx1"/>
+                </a:solidFill>
+              </a:rPr>
+              <a:t>Internal strategy and total population are not independent.</a:t>
+            </a:r>
+            <a:endParaRPr lang="en-US" sz="2400" dirty="0"/>
+          </a:p>
+        </p:txBody>
+      </p:sp>
+      <p:pic>
+        <p:nvPicPr>
+          <p:cNvPr id="12" name="Imagen 11">
+            <a:extLst>
+              <a:ext uri="{FF2B5EF4-FFF2-40B4-BE49-F238E27FC236}">
+                <a16:creationId xmlns:a16="http://schemas.microsoft.com/office/drawing/2014/main" id="{77AF00A6-D1FE-705E-FAE1-6F73C23AA42E}"/>
+              </a:ext>
+            </a:extLst>
+          </p:cNvPr>
+          <p:cNvPicPr>
+            <a:picLocks noChangeAspect="1"/>
+          </p:cNvPicPr>
+          <p:nvPr/>
+        </p:nvPicPr>
+        <p:blipFill>
+          <a:blip r:embed="rId3">
+            <a:extLst>
+              <a:ext uri="{28A0092B-C50C-407E-A947-70E740481C1C}">
+                <a14:useLocalDpi xmlns:a14="http://schemas.microsoft.com/office/drawing/2010/main" val="0"/>
+              </a:ext>
+            </a:extLst>
+          </a:blip>
+          <a:stretch>
+            <a:fillRect/>
+          </a:stretch>
+        </p:blipFill>
+        <p:spPr>
+          <a:xfrm>
+            <a:off x="1303456" y="2615956"/>
+            <a:ext cx="4318435" cy="2878956"/>
+          </a:xfrm>
+          <a:prstGeom prst="rect">
+            <a:avLst/>
+          </a:prstGeom>
+        </p:spPr>
+      </p:pic>
+      <p:sp>
+        <p:nvSpPr>
+          <p:cNvPr id="13" name="CuadroTexto 12">
+            <a:extLst>
+              <a:ext uri="{FF2B5EF4-FFF2-40B4-BE49-F238E27FC236}">
+                <a16:creationId xmlns:a16="http://schemas.microsoft.com/office/drawing/2014/main" id="{5BCA2DF9-0F0A-9FE0-E0F9-3E13A89D5390}"/>
+              </a:ext>
+            </a:extLst>
+          </p:cNvPr>
+          <p:cNvSpPr txBox="1"/>
+          <p:nvPr/>
+        </p:nvSpPr>
+        <p:spPr>
+          <a:xfrm>
+            <a:off x="6747174" y="4055434"/>
+            <a:ext cx="4272444" cy="1711366"/>
+          </a:xfrm>
+          <a:prstGeom prst="rect">
+            <a:avLst/>
+          </a:prstGeom>
+          <a:noFill/>
+        </p:spPr>
+        <p:txBody>
+          <a:bodyPr wrap="square">
+            <a:spAutoFit/>
+          </a:bodyPr>
+          <a:lstStyle/>
+          <a:p>
+            <a:pPr algn="just">
+              <a:lnSpc>
+                <a:spcPct val="150000"/>
+              </a:lnSpc>
+            </a:pPr>
+            <a:r>
+              <a:rPr lang="en-US" dirty="0">
+                <a:solidFill>
+                  <a:schemeClr val="tx1"/>
+                </a:solidFill>
+              </a:rPr>
+              <a:t>Individuals </a:t>
+            </a:r>
+            <a:r>
+              <a:rPr lang="en-US" dirty="0"/>
+              <a:t>that cooperate by foraging, defending the nest, or caring for larvae increase the growth rate and survival of the colony.</a:t>
+            </a:r>
+          </a:p>
+        </p:txBody>
+      </p:sp>
+    </p:spTree>
+    <p:extLst>
+      <p:ext uri="{BB962C8B-B14F-4D97-AF65-F5344CB8AC3E}">
+        <p14:creationId xmlns:p14="http://schemas.microsoft.com/office/powerpoint/2010/main" val="2903672839"/>
+      </p:ext>
+    </p:extLst>
+  </p:cSld>
+  <p:clrMapOvr>
+    <a:masterClrMapping/>
+  </p:clrMapOvr>
+  <p:timing>
+    <p:tnLst>
+      <p:par>
+        <p:cTn id="1" dur="indefinite" restart="never" nodeType="tmRoot">
+          <p:childTnLst>
+            <p:seq concurrent="1" nextAc="seek">
+              <p:cTn id="2" dur="indefinite" nodeType="mainSeq">
+                <p:childTnLst>
+                  <p:par>
+                    <p:cTn id="3" fill="hold">
+                      <p:stCondLst>
+                        <p:cond delay="indefinite"/>
+                      </p:stCondLst>
+                      <p:childTnLst>
+                        <p:par>
+                          <p:cTn id="4" fill="hold">
+                            <p:stCondLst>
+                              <p:cond delay="0"/>
+                            </p:stCondLst>
+                            <p:childTnLst>
+                              <p:par>
+                                <p:cTn id="5" presetID="1" presetClass="entr" presetSubtype="0" fill="hold" grpId="0" nodeType="clickEffect">
+                                  <p:stCondLst>
+                                    <p:cond delay="0"/>
+                                  </p:stCondLst>
+                                  <p:childTnLst>
+                                    <p:set>
+                                      <p:cBhvr>
+                                        <p:cTn id="6" dur="1" fill="hold">
+                                          <p:stCondLst>
+                                            <p:cond delay="0"/>
+                                          </p:stCondLst>
+                                        </p:cTn>
+                                        <p:tgtEl>
+                                          <p:spTgt spid="10"/>
+                                        </p:tgtEl>
+                                        <p:attrNameLst>
+                                          <p:attrName>style.visibility</p:attrName>
+                                        </p:attrNameLst>
+                                      </p:cBhvr>
+                                      <p:to>
+                                        <p:strVal val="visible"/>
+                                      </p:to>
+                                    </p:set>
+                                  </p:childTnLst>
+                                </p:cTn>
+                              </p:par>
+                              <p:par>
+                                <p:cTn id="7" presetID="1" presetClass="entr" presetSubtype="0" fill="hold" grpId="0" nodeType="withEffect">
+                                  <p:stCondLst>
+                                    <p:cond delay="0"/>
+                                  </p:stCondLst>
+                                  <p:childTnLst>
+                                    <p:set>
+                                      <p:cBhvr>
+                                        <p:cTn id="8" dur="1" fill="hold">
+                                          <p:stCondLst>
+                                            <p:cond delay="0"/>
+                                          </p:stCondLst>
+                                        </p:cTn>
+                                        <p:tgtEl>
+                                          <p:spTgt spid="13"/>
+                                        </p:tgtEl>
+                                        <p:attrNameLst>
+                                          <p:attrName>style.visibility</p:attrName>
+                                        </p:attrNameLst>
+                                      </p:cBhvr>
+                                      <p:to>
+                                        <p:strVal val="visible"/>
+                                      </p:to>
+                                    </p:set>
+                                  </p:childTnLst>
+                                </p:cTn>
+                              </p:par>
+                              <p:par>
+                                <p:cTn id="9" presetID="1" presetClass="entr" presetSubtype="0" fill="hold" nodeType="withEffect">
+                                  <p:stCondLst>
+                                    <p:cond delay="0"/>
+                                  </p:stCondLst>
+                                  <p:childTnLst>
+                                    <p:set>
+                                      <p:cBhvr>
+                                        <p:cTn id="10" dur="1" fill="hold">
+                                          <p:stCondLst>
+                                            <p:cond delay="0"/>
+                                          </p:stCondLst>
+                                        </p:cTn>
+                                        <p:tgtEl>
+                                          <p:spTgt spid="12"/>
+                                        </p:tgtEl>
+                                        <p:attrNameLst>
+                                          <p:attrName>style.visibility</p:attrName>
+                                        </p:attrNameLst>
+                                      </p:cBhvr>
+                                      <p:to>
+                                        <p:strVal val="visible"/>
+                                      </p:to>
+                                    </p:set>
+                                  </p:childTnLst>
+                                </p:cTn>
+                              </p:par>
+                            </p:childTnLst>
+                          </p:cTn>
+                        </p:par>
+                      </p:childTnLst>
+                    </p:cTn>
+                  </p:par>
+                </p:childTnLst>
+              </p:cTn>
+              <p:prevCondLst>
+                <p:cond evt="onPrev" delay="0">
+                  <p:tgtEl>
+                    <p:sldTgt/>
+                  </p:tgtEl>
+                </p:cond>
+              </p:prevCondLst>
+              <p:nextCondLst>
+                <p:cond evt="onNext" delay="0">
+                  <p:tgtEl>
+                    <p:sldTgt/>
+                  </p:tgtEl>
+                </p:cond>
+              </p:nextCondLst>
+            </p:seq>
+          </p:childTnLst>
+        </p:cTn>
+      </p:par>
+    </p:tnLst>
+    <p:bldLst>
+      <p:bldP spid="10" grpId="0"/>
+      <p:bldP spid="13" grpId="0"/>
+    </p:bldLst>
+  </p:timing>
+</p:sld>
+</file>
+
+<file path=ppt/slides/slide5.xml><?xml version="1.0" encoding="utf-8"?>
 <p:sld xmlns:a="http://schemas.openxmlformats.org/drawingml/2006/main" xmlns:r="http://schemas.openxmlformats.org/officeDocument/2006/relationships" xmlns:p="http://schemas.openxmlformats.org/presentationml/2006/main">
   <p:cSld>
     <p:spTree>
@@ -4587,7 +7029,7 @@
           <p:nvPr/>
         </p:nvPicPr>
         <p:blipFill>
-          <a:blip r:embed="rId2"/>
+          <a:blip r:embed="rId3"/>
           <a:srcRect t="20213"/>
           <a:stretch>
             <a:fillRect/>
@@ -4765,8 +7207,8 @@
         </p:nvSpPr>
         <p:spPr>
           <a:xfrm>
-            <a:off x="1097280" y="2108110"/>
-            <a:ext cx="10058400" cy="425964"/>
+            <a:off x="957071" y="2108110"/>
+            <a:ext cx="10198609" cy="425964"/>
           </a:xfrm>
         </p:spPr>
         <p:txBody>
@@ -4775,8 +7217,9 @@
           </a:bodyPr>
           <a:lstStyle/>
           <a:p>
-            <a:r>
-              <a:rPr lang="en-US" sz="2400" u="sng" dirty="0">
+            <a:pPr algn="ctr"/>
+            <a:r>
+              <a:rPr lang="en-US" sz="2400" dirty="0">
                 <a:solidFill>
                   <a:schemeClr val="tx1"/>
                 </a:solidFill>
@@ -4787,291 +7230,126 @@
           </a:p>
         </p:txBody>
       </p:sp>
-      <p:sp>
-        <p:nvSpPr>
-          <p:cNvPr id="3" name="Marcador de contenido 7">
+      <p:pic>
+        <p:nvPicPr>
+          <p:cNvPr id="9" name="Imagen 8">
             <a:extLst>
               <a:ext uri="{FF2B5EF4-FFF2-40B4-BE49-F238E27FC236}">
-                <a16:creationId xmlns:a16="http://schemas.microsoft.com/office/drawing/2014/main" id="{E0A0CFE9-6616-A435-A8AF-A1C2FD97FC34}"/>
+                <a16:creationId xmlns:a16="http://schemas.microsoft.com/office/drawing/2014/main" id="{D483363C-A0E1-364E-5689-F54E66667554}"/>
               </a:ext>
             </a:extLst>
           </p:cNvPr>
-          <p:cNvSpPr txBox="1">
-            <a:spLocks/>
-          </p:cNvSpPr>
+          <p:cNvPicPr>
+            <a:picLocks noChangeAspect="1"/>
+          </p:cNvPicPr>
           <p:nvPr/>
-        </p:nvSpPr>
-        <p:spPr>
-          <a:xfrm>
-            <a:off x="1176528" y="2660238"/>
-            <a:ext cx="10058400" cy="425964"/>
+        </p:nvPicPr>
+        <p:blipFill>
+          <a:blip r:embed="rId4"/>
+          <a:stretch>
+            <a:fillRect/>
+          </a:stretch>
+        </p:blipFill>
+        <p:spPr>
+          <a:xfrm>
+            <a:off x="8043612" y="853896"/>
+            <a:ext cx="2938524" cy="626748"/>
           </a:xfrm>
           <a:prstGeom prst="rect">
             <a:avLst/>
           </a:prstGeom>
         </p:spPr>
-        <p:txBody>
-          <a:bodyPr vert="horz" lIns="0" tIns="45720" rIns="0" bIns="45720" rtlCol="0">
-            <a:normAutofit/>
-          </a:bodyPr>
-          <a:lstStyle>
-            <a:lvl1pPr marL="91440" indent="-91440" algn="l" defTabSz="914400" rtl="0" eaLnBrk="1" latinLnBrk="0" hangingPunct="1">
-              <a:lnSpc>
-                <a:spcPct val="90000"/>
-              </a:lnSpc>
-              <a:spcBef>
-                <a:spcPts val="1200"/>
-              </a:spcBef>
-              <a:spcAft>
-                <a:spcPts val="200"/>
-              </a:spcAft>
-              <a:buClr>
-                <a:schemeClr val="accent1"/>
-              </a:buClr>
-              <a:buSzPct val="100000"/>
-              <a:buFont typeface="Calibri" panose="020F0502020204030204" pitchFamily="34" charset="0"/>
-              <a:buChar char=" "/>
-              <a:defRPr sz="2000" kern="1200">
-                <a:solidFill>
-                  <a:schemeClr val="tx1">
-                    <a:lumMod val="75000"/>
-                    <a:lumOff val="25000"/>
-                  </a:schemeClr>
-                </a:solidFill>
-                <a:latin typeface="+mn-lt"/>
-                <a:ea typeface="+mn-ea"/>
-                <a:cs typeface="+mn-cs"/>
-              </a:defRPr>
-            </a:lvl1pPr>
-            <a:lvl2pPr marL="384048" indent="-182880" algn="l" defTabSz="914400" rtl="0" eaLnBrk="1" latinLnBrk="0" hangingPunct="1">
-              <a:lnSpc>
-                <a:spcPct val="90000"/>
-              </a:lnSpc>
-              <a:spcBef>
-                <a:spcPts val="200"/>
-              </a:spcBef>
-              <a:spcAft>
-                <a:spcPts val="400"/>
-              </a:spcAft>
-              <a:buClr>
-                <a:schemeClr val="accent1"/>
-              </a:buClr>
-              <a:buFont typeface="Calibri" pitchFamily="34" charset="0"/>
-              <a:buChar char="◦"/>
-              <a:defRPr sz="1800" kern="1200">
-                <a:solidFill>
-                  <a:schemeClr val="tx1">
-                    <a:lumMod val="75000"/>
-                    <a:lumOff val="25000"/>
-                  </a:schemeClr>
-                </a:solidFill>
-                <a:latin typeface="+mn-lt"/>
-                <a:ea typeface="+mn-ea"/>
-                <a:cs typeface="+mn-cs"/>
-              </a:defRPr>
-            </a:lvl2pPr>
-            <a:lvl3pPr marL="566928" indent="-182880" algn="l" defTabSz="914400" rtl="0" eaLnBrk="1" latinLnBrk="0" hangingPunct="1">
-              <a:lnSpc>
-                <a:spcPct val="90000"/>
-              </a:lnSpc>
-              <a:spcBef>
-                <a:spcPts val="200"/>
-              </a:spcBef>
-              <a:spcAft>
-                <a:spcPts val="400"/>
-              </a:spcAft>
-              <a:buClr>
-                <a:schemeClr val="accent1"/>
-              </a:buClr>
-              <a:buFont typeface="Calibri" pitchFamily="34" charset="0"/>
-              <a:buChar char="◦"/>
-              <a:defRPr sz="1400" kern="1200">
-                <a:solidFill>
-                  <a:schemeClr val="tx1">
-                    <a:lumMod val="75000"/>
-                    <a:lumOff val="25000"/>
-                  </a:schemeClr>
-                </a:solidFill>
-                <a:latin typeface="+mn-lt"/>
-                <a:ea typeface="+mn-ea"/>
-                <a:cs typeface="+mn-cs"/>
-              </a:defRPr>
-            </a:lvl3pPr>
-            <a:lvl4pPr marL="749808" indent="-182880" algn="l" defTabSz="914400" rtl="0" eaLnBrk="1" latinLnBrk="0" hangingPunct="1">
-              <a:lnSpc>
-                <a:spcPct val="90000"/>
-              </a:lnSpc>
-              <a:spcBef>
-                <a:spcPts val="200"/>
-              </a:spcBef>
-              <a:spcAft>
-                <a:spcPts val="400"/>
-              </a:spcAft>
-              <a:buClr>
-                <a:schemeClr val="accent1"/>
-              </a:buClr>
-              <a:buFont typeface="Calibri" pitchFamily="34" charset="0"/>
-              <a:buChar char="◦"/>
-              <a:defRPr sz="1400" kern="1200">
-                <a:solidFill>
-                  <a:schemeClr val="tx1">
-                    <a:lumMod val="75000"/>
-                    <a:lumOff val="25000"/>
-                  </a:schemeClr>
-                </a:solidFill>
-                <a:latin typeface="+mn-lt"/>
-                <a:ea typeface="+mn-ea"/>
-                <a:cs typeface="+mn-cs"/>
-              </a:defRPr>
-            </a:lvl4pPr>
-            <a:lvl5pPr marL="932688" indent="-182880" algn="l" defTabSz="914400" rtl="0" eaLnBrk="1" latinLnBrk="0" hangingPunct="1">
-              <a:lnSpc>
-                <a:spcPct val="90000"/>
-              </a:lnSpc>
-              <a:spcBef>
-                <a:spcPts val="200"/>
-              </a:spcBef>
-              <a:spcAft>
-                <a:spcPts val="400"/>
-              </a:spcAft>
-              <a:buClr>
-                <a:schemeClr val="accent1"/>
-              </a:buClr>
-              <a:buFont typeface="Calibri" pitchFamily="34" charset="0"/>
-              <a:buChar char="◦"/>
-              <a:defRPr sz="1400" kern="1200">
-                <a:solidFill>
-                  <a:schemeClr val="tx1">
-                    <a:lumMod val="75000"/>
-                    <a:lumOff val="25000"/>
-                  </a:schemeClr>
-                </a:solidFill>
-                <a:latin typeface="+mn-lt"/>
-                <a:ea typeface="+mn-ea"/>
-                <a:cs typeface="+mn-cs"/>
-              </a:defRPr>
-            </a:lvl5pPr>
-            <a:lvl6pPr marL="1100000" indent="-228600" algn="l" defTabSz="914400" rtl="0" eaLnBrk="1" latinLnBrk="0" hangingPunct="1">
-              <a:lnSpc>
-                <a:spcPct val="90000"/>
-              </a:lnSpc>
-              <a:spcBef>
-                <a:spcPts val="200"/>
-              </a:spcBef>
-              <a:spcAft>
-                <a:spcPts val="400"/>
-              </a:spcAft>
-              <a:buClr>
-                <a:schemeClr val="accent1"/>
-              </a:buClr>
-              <a:buFont typeface="Calibri" pitchFamily="34" charset="0"/>
-              <a:buChar char="◦"/>
-              <a:defRPr sz="1400" kern="1200">
-                <a:solidFill>
-                  <a:schemeClr val="tx1">
-                    <a:lumMod val="75000"/>
-                    <a:lumOff val="25000"/>
-                  </a:schemeClr>
-                </a:solidFill>
-                <a:latin typeface="+mn-lt"/>
-                <a:ea typeface="+mn-ea"/>
-                <a:cs typeface="+mn-cs"/>
-              </a:defRPr>
-            </a:lvl6pPr>
-            <a:lvl7pPr marL="1300000" indent="-228600" algn="l" defTabSz="914400" rtl="0" eaLnBrk="1" latinLnBrk="0" hangingPunct="1">
-              <a:lnSpc>
-                <a:spcPct val="90000"/>
-              </a:lnSpc>
-              <a:spcBef>
-                <a:spcPts val="200"/>
-              </a:spcBef>
-              <a:spcAft>
-                <a:spcPts val="400"/>
-              </a:spcAft>
-              <a:buClr>
-                <a:schemeClr val="accent1"/>
-              </a:buClr>
-              <a:buFont typeface="Calibri" pitchFamily="34" charset="0"/>
-              <a:buChar char="◦"/>
-              <a:defRPr sz="1400" kern="1200">
-                <a:solidFill>
-                  <a:schemeClr val="tx1">
-                    <a:lumMod val="75000"/>
-                    <a:lumOff val="25000"/>
-                  </a:schemeClr>
-                </a:solidFill>
-                <a:latin typeface="+mn-lt"/>
-                <a:ea typeface="+mn-ea"/>
-                <a:cs typeface="+mn-cs"/>
-              </a:defRPr>
-            </a:lvl7pPr>
-            <a:lvl8pPr marL="1500000" indent="-228600" algn="l" defTabSz="914400" rtl="0" eaLnBrk="1" latinLnBrk="0" hangingPunct="1">
-              <a:lnSpc>
-                <a:spcPct val="90000"/>
-              </a:lnSpc>
-              <a:spcBef>
-                <a:spcPts val="200"/>
-              </a:spcBef>
-              <a:spcAft>
-                <a:spcPts val="400"/>
-              </a:spcAft>
-              <a:buClr>
-                <a:schemeClr val="accent1"/>
-              </a:buClr>
-              <a:buFont typeface="Calibri" pitchFamily="34" charset="0"/>
-              <a:buChar char="◦"/>
-              <a:defRPr sz="1400" kern="1200">
-                <a:solidFill>
-                  <a:schemeClr val="tx1">
-                    <a:lumMod val="75000"/>
-                    <a:lumOff val="25000"/>
-                  </a:schemeClr>
-                </a:solidFill>
-                <a:latin typeface="+mn-lt"/>
-                <a:ea typeface="+mn-ea"/>
-                <a:cs typeface="+mn-cs"/>
-              </a:defRPr>
-            </a:lvl8pPr>
-            <a:lvl9pPr marL="1700000" indent="-228600" algn="l" defTabSz="914400" rtl="0" eaLnBrk="1" latinLnBrk="0" hangingPunct="1">
-              <a:lnSpc>
-                <a:spcPct val="90000"/>
-              </a:lnSpc>
-              <a:spcBef>
-                <a:spcPts val="200"/>
-              </a:spcBef>
-              <a:spcAft>
-                <a:spcPts val="400"/>
-              </a:spcAft>
-              <a:buClr>
-                <a:schemeClr val="accent1"/>
-              </a:buClr>
-              <a:buFont typeface="Calibri" pitchFamily="34" charset="0"/>
-              <a:buChar char="◦"/>
-              <a:defRPr sz="1400" kern="1200">
-                <a:solidFill>
-                  <a:schemeClr val="tx1">
-                    <a:lumMod val="75000"/>
-                    <a:lumOff val="25000"/>
-                  </a:schemeClr>
-                </a:solidFill>
-                <a:latin typeface="+mn-lt"/>
-                <a:ea typeface="+mn-ea"/>
-                <a:cs typeface="+mn-cs"/>
-              </a:defRPr>
-            </a:lvl9pPr>
-          </a:lstStyle>
-          <a:p>
-            <a:r>
-              <a:rPr lang="en-US" dirty="0">
-                <a:solidFill>
-                  <a:schemeClr val="tx1"/>
-                </a:solidFill>
-              </a:rPr>
-              <a:t>Birth-death dynamics</a:t>
-            </a:r>
-          </a:p>
-        </p:txBody>
-      </p:sp>
+      </p:pic>
+      <p:pic>
+        <p:nvPicPr>
+          <p:cNvPr id="11" name="Imagen 10">
+            <a:extLst>
+              <a:ext uri="{FF2B5EF4-FFF2-40B4-BE49-F238E27FC236}">
+                <a16:creationId xmlns:a16="http://schemas.microsoft.com/office/drawing/2014/main" id="{8F4AAE92-79E6-DA2B-E0E7-4ECB7772DCBF}"/>
+              </a:ext>
+            </a:extLst>
+          </p:cNvPr>
+          <p:cNvPicPr>
+            <a:picLocks noChangeAspect="1"/>
+          </p:cNvPicPr>
+          <p:nvPr/>
+        </p:nvPicPr>
+        <p:blipFill>
+          <a:blip r:embed="rId5"/>
+          <a:stretch>
+            <a:fillRect/>
+          </a:stretch>
+        </p:blipFill>
+        <p:spPr>
+          <a:xfrm>
+            <a:off x="2129279" y="2977823"/>
+            <a:ext cx="8561504" cy="902342"/>
+          </a:xfrm>
+          <a:prstGeom prst="rect">
+            <a:avLst/>
+          </a:prstGeom>
+        </p:spPr>
+      </p:pic>
+      <p:pic>
+        <p:nvPicPr>
+          <p:cNvPr id="13" name="Imagen 12">
+            <a:extLst>
+              <a:ext uri="{FF2B5EF4-FFF2-40B4-BE49-F238E27FC236}">
+                <a16:creationId xmlns:a16="http://schemas.microsoft.com/office/drawing/2014/main" id="{D7548E4F-109F-DBA4-EC90-9EE21329E7E5}"/>
+              </a:ext>
+            </a:extLst>
+          </p:cNvPr>
+          <p:cNvPicPr>
+            <a:picLocks noChangeAspect="1"/>
+          </p:cNvPicPr>
+          <p:nvPr/>
+        </p:nvPicPr>
+        <p:blipFill>
+          <a:blip r:embed="rId6"/>
+          <a:stretch>
+            <a:fillRect/>
+          </a:stretch>
+        </p:blipFill>
+        <p:spPr>
+          <a:xfrm>
+            <a:off x="7653262" y="2164135"/>
+            <a:ext cx="1157363" cy="307265"/>
+          </a:xfrm>
+          <a:prstGeom prst="rect">
+            <a:avLst/>
+          </a:prstGeom>
+        </p:spPr>
+      </p:pic>
+      <p:pic>
+        <p:nvPicPr>
+          <p:cNvPr id="15" name="Imagen 14">
+            <a:extLst>
+              <a:ext uri="{FF2B5EF4-FFF2-40B4-BE49-F238E27FC236}">
+                <a16:creationId xmlns:a16="http://schemas.microsoft.com/office/drawing/2014/main" id="{5021F6AD-9BE2-E200-CAB2-87A53735EEE0}"/>
+              </a:ext>
+            </a:extLst>
+          </p:cNvPr>
+          <p:cNvPicPr>
+            <a:picLocks noChangeAspect="1"/>
+          </p:cNvPicPr>
+          <p:nvPr/>
+        </p:nvPicPr>
+        <p:blipFill>
+          <a:blip r:embed="rId7"/>
+          <a:stretch>
+            <a:fillRect/>
+          </a:stretch>
+        </p:blipFill>
+        <p:spPr>
+          <a:xfrm>
+            <a:off x="2666533" y="4415432"/>
+            <a:ext cx="7486997" cy="693240"/>
+          </a:xfrm>
+          <a:prstGeom prst="rect">
+            <a:avLst/>
+          </a:prstGeom>
+        </p:spPr>
+      </p:pic>
     </p:spTree>
     <p:extLst>
       <p:ext uri="{BB962C8B-B14F-4D97-AF65-F5344CB8AC3E}">
@@ -5082,10 +7360,112 @@
   <p:clrMapOvr>
     <a:masterClrMapping/>
   </p:clrMapOvr>
+  <p:timing>
+    <p:tnLst>
+      <p:par>
+        <p:cTn id="1" dur="indefinite" restart="never" nodeType="tmRoot">
+          <p:childTnLst>
+            <p:seq concurrent="1" nextAc="seek">
+              <p:cTn id="2" dur="indefinite" nodeType="mainSeq">
+                <p:childTnLst>
+                  <p:par>
+                    <p:cTn id="3" fill="hold">
+                      <p:stCondLst>
+                        <p:cond delay="indefinite"/>
+                      </p:stCondLst>
+                      <p:childTnLst>
+                        <p:par>
+                          <p:cTn id="4" fill="hold">
+                            <p:stCondLst>
+                              <p:cond delay="0"/>
+                            </p:stCondLst>
+                            <p:childTnLst>
+                              <p:par>
+                                <p:cTn id="5" presetID="1" presetClass="entr" presetSubtype="0" fill="hold" nodeType="clickEffect">
+                                  <p:stCondLst>
+                                    <p:cond delay="0"/>
+                                  </p:stCondLst>
+                                  <p:childTnLst>
+                                    <p:set>
+                                      <p:cBhvr>
+                                        <p:cTn id="6" dur="1" fill="hold">
+                                          <p:stCondLst>
+                                            <p:cond delay="0"/>
+                                          </p:stCondLst>
+                                        </p:cTn>
+                                        <p:tgtEl>
+                                          <p:spTgt spid="11"/>
+                                        </p:tgtEl>
+                                        <p:attrNameLst>
+                                          <p:attrName>style.visibility</p:attrName>
+                                        </p:attrNameLst>
+                                      </p:cBhvr>
+                                      <p:to>
+                                        <p:strVal val="visible"/>
+                                      </p:to>
+                                    </p:set>
+                                  </p:childTnLst>
+                                </p:cTn>
+                              </p:par>
+                              <p:par>
+                                <p:cTn id="7" presetID="1" presetClass="entr" presetSubtype="0" fill="hold" nodeType="withEffect">
+                                  <p:stCondLst>
+                                    <p:cond delay="0"/>
+                                  </p:stCondLst>
+                                  <p:childTnLst>
+                                    <p:set>
+                                      <p:cBhvr>
+                                        <p:cTn id="8" dur="1" fill="hold">
+                                          <p:stCondLst>
+                                            <p:cond delay="0"/>
+                                          </p:stCondLst>
+                                        </p:cTn>
+                                        <p:tgtEl>
+                                          <p:spTgt spid="15"/>
+                                        </p:tgtEl>
+                                        <p:attrNameLst>
+                                          <p:attrName>style.visibility</p:attrName>
+                                        </p:attrNameLst>
+                                      </p:cBhvr>
+                                      <p:to>
+                                        <p:strVal val="visible"/>
+                                      </p:to>
+                                    </p:set>
+                                  </p:childTnLst>
+                                </p:cTn>
+                              </p:par>
+                            </p:childTnLst>
+                          </p:cTn>
+                        </p:par>
+                      </p:childTnLst>
+                    </p:cTn>
+                  </p:par>
+                </p:childTnLst>
+              </p:cTn>
+              <p:prevCondLst>
+                <p:cond evt="onPrev" delay="0">
+                  <p:tgtEl>
+                    <p:sldTgt/>
+                  </p:tgtEl>
+                </p:cond>
+              </p:prevCondLst>
+              <p:nextCondLst>
+                <p:cond evt="onNext" delay="0">
+                  <p:tgtEl>
+                    <p:sldTgt/>
+                  </p:tgtEl>
+                </p:cond>
+              </p:nextCondLst>
+            </p:seq>
+          </p:childTnLst>
+        </p:cTn>
+      </p:par>
+    </p:tnLst>
+  </p:timing>
 </p:sld>
 </file>
 
-<file path=ppt/slides/slide5.xml><?xml version="1.0" encoding="utf-8"?>
+<file path=ppt/slides/slide6.xml><?xml version="1.0" encoding="utf-8"?>
 <p:sld xmlns:a="http://schemas.openxmlformats.org/drawingml/2006/main" xmlns:r="http://schemas.openxmlformats.org/officeDocument/2006/relationships" xmlns:p="http://schemas.openxmlformats.org/presentationml/2006/main">
   <p:cSld>
     <p:spTree>
@@ -5301,8 +7681,8 @@
         </p:nvSpPr>
         <p:spPr>
           <a:xfrm>
-            <a:off x="1097280" y="2108110"/>
-            <a:ext cx="10058400" cy="425964"/>
+            <a:off x="957071" y="2108110"/>
+            <a:ext cx="10198609" cy="425964"/>
           </a:xfrm>
         </p:spPr>
         <p:txBody>
@@ -5311,8 +7691,9 @@
           </a:bodyPr>
           <a:lstStyle/>
           <a:p>
-            <a:r>
-              <a:rPr lang="en-US" sz="2400" u="sng" dirty="0">
+            <a:pPr algn="ctr"/>
+            <a:r>
+              <a:rPr lang="en-US" sz="2400" dirty="0">
                 <a:solidFill>
                   <a:schemeClr val="tx1"/>
                 </a:solidFill>
@@ -5323,296 +7704,126 @@
           </a:p>
         </p:txBody>
       </p:sp>
-      <p:sp>
-        <p:nvSpPr>
-          <p:cNvPr id="3" name="Marcador de contenido 7">
+      <p:pic>
+        <p:nvPicPr>
+          <p:cNvPr id="9" name="Imagen 8">
             <a:extLst>
               <a:ext uri="{FF2B5EF4-FFF2-40B4-BE49-F238E27FC236}">
-                <a16:creationId xmlns:a16="http://schemas.microsoft.com/office/drawing/2014/main" id="{D5DAE671-EADC-0276-1F07-F7D1748F4023}"/>
+                <a16:creationId xmlns:a16="http://schemas.microsoft.com/office/drawing/2014/main" id="{D8E07D1D-C9EC-52FC-3539-C6E1D9F3FB98}"/>
               </a:ext>
             </a:extLst>
           </p:cNvPr>
-          <p:cNvSpPr txBox="1">
-            <a:spLocks/>
-          </p:cNvSpPr>
+          <p:cNvPicPr>
+            <a:picLocks noChangeAspect="1"/>
+          </p:cNvPicPr>
           <p:nvPr/>
-        </p:nvSpPr>
-        <p:spPr>
-          <a:xfrm>
-            <a:off x="1176528" y="2660238"/>
-            <a:ext cx="10058400" cy="425964"/>
+        </p:nvPicPr>
+        <p:blipFill>
+          <a:blip r:embed="rId3"/>
+          <a:stretch>
+            <a:fillRect/>
+          </a:stretch>
+        </p:blipFill>
+        <p:spPr>
+          <a:xfrm>
+            <a:off x="3181349" y="3432746"/>
+            <a:ext cx="6082155" cy="676811"/>
           </a:xfrm>
           <a:prstGeom prst="rect">
             <a:avLst/>
           </a:prstGeom>
         </p:spPr>
-        <p:txBody>
-          <a:bodyPr vert="horz" lIns="0" tIns="45720" rIns="0" bIns="45720" rtlCol="0">
-            <a:normAutofit/>
-          </a:bodyPr>
-          <a:lstStyle>
-            <a:lvl1pPr marL="91440" indent="-91440" algn="l" defTabSz="914400" rtl="0" eaLnBrk="1" latinLnBrk="0" hangingPunct="1">
-              <a:lnSpc>
-                <a:spcPct val="90000"/>
-              </a:lnSpc>
-              <a:spcBef>
-                <a:spcPts val="1200"/>
-              </a:spcBef>
-              <a:spcAft>
-                <a:spcPts val="200"/>
-              </a:spcAft>
-              <a:buClr>
-                <a:schemeClr val="accent1"/>
-              </a:buClr>
-              <a:buSzPct val="100000"/>
-              <a:buFont typeface="Calibri" panose="020F0502020204030204" pitchFamily="34" charset="0"/>
-              <a:buChar char=" "/>
-              <a:defRPr sz="2000" kern="1200">
-                <a:solidFill>
-                  <a:schemeClr val="tx1">
-                    <a:lumMod val="75000"/>
-                    <a:lumOff val="25000"/>
-                  </a:schemeClr>
-                </a:solidFill>
-                <a:latin typeface="+mn-lt"/>
-                <a:ea typeface="+mn-ea"/>
-                <a:cs typeface="+mn-cs"/>
-              </a:defRPr>
-            </a:lvl1pPr>
-            <a:lvl2pPr marL="384048" indent="-182880" algn="l" defTabSz="914400" rtl="0" eaLnBrk="1" latinLnBrk="0" hangingPunct="1">
-              <a:lnSpc>
-                <a:spcPct val="90000"/>
-              </a:lnSpc>
-              <a:spcBef>
-                <a:spcPts val="200"/>
-              </a:spcBef>
-              <a:spcAft>
-                <a:spcPts val="400"/>
-              </a:spcAft>
-              <a:buClr>
-                <a:schemeClr val="accent1"/>
-              </a:buClr>
-              <a:buFont typeface="Calibri" pitchFamily="34" charset="0"/>
-              <a:buChar char="◦"/>
-              <a:defRPr sz="1800" kern="1200">
-                <a:solidFill>
-                  <a:schemeClr val="tx1">
-                    <a:lumMod val="75000"/>
-                    <a:lumOff val="25000"/>
-                  </a:schemeClr>
-                </a:solidFill>
-                <a:latin typeface="+mn-lt"/>
-                <a:ea typeface="+mn-ea"/>
-                <a:cs typeface="+mn-cs"/>
-              </a:defRPr>
-            </a:lvl2pPr>
-            <a:lvl3pPr marL="566928" indent="-182880" algn="l" defTabSz="914400" rtl="0" eaLnBrk="1" latinLnBrk="0" hangingPunct="1">
-              <a:lnSpc>
-                <a:spcPct val="90000"/>
-              </a:lnSpc>
-              <a:spcBef>
-                <a:spcPts val="200"/>
-              </a:spcBef>
-              <a:spcAft>
-                <a:spcPts val="400"/>
-              </a:spcAft>
-              <a:buClr>
-                <a:schemeClr val="accent1"/>
-              </a:buClr>
-              <a:buFont typeface="Calibri" pitchFamily="34" charset="0"/>
-              <a:buChar char="◦"/>
-              <a:defRPr sz="1400" kern="1200">
-                <a:solidFill>
-                  <a:schemeClr val="tx1">
-                    <a:lumMod val="75000"/>
-                    <a:lumOff val="25000"/>
-                  </a:schemeClr>
-                </a:solidFill>
-                <a:latin typeface="+mn-lt"/>
-                <a:ea typeface="+mn-ea"/>
-                <a:cs typeface="+mn-cs"/>
-              </a:defRPr>
-            </a:lvl3pPr>
-            <a:lvl4pPr marL="749808" indent="-182880" algn="l" defTabSz="914400" rtl="0" eaLnBrk="1" latinLnBrk="0" hangingPunct="1">
-              <a:lnSpc>
-                <a:spcPct val="90000"/>
-              </a:lnSpc>
-              <a:spcBef>
-                <a:spcPts val="200"/>
-              </a:spcBef>
-              <a:spcAft>
-                <a:spcPts val="400"/>
-              </a:spcAft>
-              <a:buClr>
-                <a:schemeClr val="accent1"/>
-              </a:buClr>
-              <a:buFont typeface="Calibri" pitchFamily="34" charset="0"/>
-              <a:buChar char="◦"/>
-              <a:defRPr sz="1400" kern="1200">
-                <a:solidFill>
-                  <a:schemeClr val="tx1">
-                    <a:lumMod val="75000"/>
-                    <a:lumOff val="25000"/>
-                  </a:schemeClr>
-                </a:solidFill>
-                <a:latin typeface="+mn-lt"/>
-                <a:ea typeface="+mn-ea"/>
-                <a:cs typeface="+mn-cs"/>
-              </a:defRPr>
-            </a:lvl4pPr>
-            <a:lvl5pPr marL="932688" indent="-182880" algn="l" defTabSz="914400" rtl="0" eaLnBrk="1" latinLnBrk="0" hangingPunct="1">
-              <a:lnSpc>
-                <a:spcPct val="90000"/>
-              </a:lnSpc>
-              <a:spcBef>
-                <a:spcPts val="200"/>
-              </a:spcBef>
-              <a:spcAft>
-                <a:spcPts val="400"/>
-              </a:spcAft>
-              <a:buClr>
-                <a:schemeClr val="accent1"/>
-              </a:buClr>
-              <a:buFont typeface="Calibri" pitchFamily="34" charset="0"/>
-              <a:buChar char="◦"/>
-              <a:defRPr sz="1400" kern="1200">
-                <a:solidFill>
-                  <a:schemeClr val="tx1">
-                    <a:lumMod val="75000"/>
-                    <a:lumOff val="25000"/>
-                  </a:schemeClr>
-                </a:solidFill>
-                <a:latin typeface="+mn-lt"/>
-                <a:ea typeface="+mn-ea"/>
-                <a:cs typeface="+mn-cs"/>
-              </a:defRPr>
-            </a:lvl5pPr>
-            <a:lvl6pPr marL="1100000" indent="-228600" algn="l" defTabSz="914400" rtl="0" eaLnBrk="1" latinLnBrk="0" hangingPunct="1">
-              <a:lnSpc>
-                <a:spcPct val="90000"/>
-              </a:lnSpc>
-              <a:spcBef>
-                <a:spcPts val="200"/>
-              </a:spcBef>
-              <a:spcAft>
-                <a:spcPts val="400"/>
-              </a:spcAft>
-              <a:buClr>
-                <a:schemeClr val="accent1"/>
-              </a:buClr>
-              <a:buFont typeface="Calibri" pitchFamily="34" charset="0"/>
-              <a:buChar char="◦"/>
-              <a:defRPr sz="1400" kern="1200">
-                <a:solidFill>
-                  <a:schemeClr val="tx1">
-                    <a:lumMod val="75000"/>
-                    <a:lumOff val="25000"/>
-                  </a:schemeClr>
-                </a:solidFill>
-                <a:latin typeface="+mn-lt"/>
-                <a:ea typeface="+mn-ea"/>
-                <a:cs typeface="+mn-cs"/>
-              </a:defRPr>
-            </a:lvl6pPr>
-            <a:lvl7pPr marL="1300000" indent="-228600" algn="l" defTabSz="914400" rtl="0" eaLnBrk="1" latinLnBrk="0" hangingPunct="1">
-              <a:lnSpc>
-                <a:spcPct val="90000"/>
-              </a:lnSpc>
-              <a:spcBef>
-                <a:spcPts val="200"/>
-              </a:spcBef>
-              <a:spcAft>
-                <a:spcPts val="400"/>
-              </a:spcAft>
-              <a:buClr>
-                <a:schemeClr val="accent1"/>
-              </a:buClr>
-              <a:buFont typeface="Calibri" pitchFamily="34" charset="0"/>
-              <a:buChar char="◦"/>
-              <a:defRPr sz="1400" kern="1200">
-                <a:solidFill>
-                  <a:schemeClr val="tx1">
-                    <a:lumMod val="75000"/>
-                    <a:lumOff val="25000"/>
-                  </a:schemeClr>
-                </a:solidFill>
-                <a:latin typeface="+mn-lt"/>
-                <a:ea typeface="+mn-ea"/>
-                <a:cs typeface="+mn-cs"/>
-              </a:defRPr>
-            </a:lvl7pPr>
-            <a:lvl8pPr marL="1500000" indent="-228600" algn="l" defTabSz="914400" rtl="0" eaLnBrk="1" latinLnBrk="0" hangingPunct="1">
-              <a:lnSpc>
-                <a:spcPct val="90000"/>
-              </a:lnSpc>
-              <a:spcBef>
-                <a:spcPts val="200"/>
-              </a:spcBef>
-              <a:spcAft>
-                <a:spcPts val="400"/>
-              </a:spcAft>
-              <a:buClr>
-                <a:schemeClr val="accent1"/>
-              </a:buClr>
-              <a:buFont typeface="Calibri" pitchFamily="34" charset="0"/>
-              <a:buChar char="◦"/>
-              <a:defRPr sz="1400" kern="1200">
-                <a:solidFill>
-                  <a:schemeClr val="tx1">
-                    <a:lumMod val="75000"/>
-                    <a:lumOff val="25000"/>
-                  </a:schemeClr>
-                </a:solidFill>
-                <a:latin typeface="+mn-lt"/>
-                <a:ea typeface="+mn-ea"/>
-                <a:cs typeface="+mn-cs"/>
-              </a:defRPr>
-            </a:lvl8pPr>
-            <a:lvl9pPr marL="1700000" indent="-228600" algn="l" defTabSz="914400" rtl="0" eaLnBrk="1" latinLnBrk="0" hangingPunct="1">
-              <a:lnSpc>
-                <a:spcPct val="90000"/>
-              </a:lnSpc>
-              <a:spcBef>
-                <a:spcPts val="200"/>
-              </a:spcBef>
-              <a:spcAft>
-                <a:spcPts val="400"/>
-              </a:spcAft>
-              <a:buClr>
-                <a:schemeClr val="accent1"/>
-              </a:buClr>
-              <a:buFont typeface="Calibri" pitchFamily="34" charset="0"/>
-              <a:buChar char="◦"/>
-              <a:defRPr sz="1400" kern="1200">
-                <a:solidFill>
-                  <a:schemeClr val="tx1">
-                    <a:lumMod val="75000"/>
-                    <a:lumOff val="25000"/>
-                  </a:schemeClr>
-                </a:solidFill>
-                <a:latin typeface="+mn-lt"/>
-                <a:ea typeface="+mn-ea"/>
-                <a:cs typeface="+mn-cs"/>
-              </a:defRPr>
-            </a:lvl9pPr>
-          </a:lstStyle>
-          <a:p>
-            <a:r>
-              <a:rPr lang="en-US" dirty="0" err="1">
-                <a:solidFill>
-                  <a:schemeClr val="tx1"/>
-                </a:solidFill>
-              </a:rPr>
-              <a:t>vv</a:t>
-            </a:r>
-            <a:endParaRPr lang="en-US" dirty="0">
-              <a:solidFill>
-                <a:schemeClr val="tx1"/>
-              </a:solidFill>
-            </a:endParaRPr>
-          </a:p>
-        </p:txBody>
-      </p:sp>
+      </p:pic>
+      <p:pic>
+        <p:nvPicPr>
+          <p:cNvPr id="11" name="Imagen 10">
+            <a:extLst>
+              <a:ext uri="{FF2B5EF4-FFF2-40B4-BE49-F238E27FC236}">
+                <a16:creationId xmlns:a16="http://schemas.microsoft.com/office/drawing/2014/main" id="{5ECC1A27-6491-9AD1-48C7-29AF68A41AFF}"/>
+              </a:ext>
+            </a:extLst>
+          </p:cNvPr>
+          <p:cNvPicPr>
+            <a:picLocks noChangeAspect="1"/>
+          </p:cNvPicPr>
+          <p:nvPr/>
+        </p:nvPicPr>
+        <p:blipFill>
+          <a:blip r:embed="rId4"/>
+          <a:stretch>
+            <a:fillRect/>
+          </a:stretch>
+        </p:blipFill>
+        <p:spPr>
+          <a:xfrm>
+            <a:off x="3878503" y="4444848"/>
+            <a:ext cx="4671591" cy="370027"/>
+          </a:xfrm>
+          <a:prstGeom prst="rect">
+            <a:avLst/>
+          </a:prstGeom>
+        </p:spPr>
+      </p:pic>
+      <p:pic>
+        <p:nvPicPr>
+          <p:cNvPr id="13" name="Imagen 12">
+            <a:extLst>
+              <a:ext uri="{FF2B5EF4-FFF2-40B4-BE49-F238E27FC236}">
+                <a16:creationId xmlns:a16="http://schemas.microsoft.com/office/drawing/2014/main" id="{ED35169A-626E-4103-CD9B-B4391B41F803}"/>
+              </a:ext>
+            </a:extLst>
+          </p:cNvPr>
+          <p:cNvPicPr>
+            <a:picLocks noChangeAspect="1"/>
+          </p:cNvPicPr>
+          <p:nvPr/>
+        </p:nvPicPr>
+        <p:blipFill>
+          <a:blip r:embed="rId5"/>
+          <a:stretch>
+            <a:fillRect/>
+          </a:stretch>
+        </p:blipFill>
+        <p:spPr>
+          <a:xfrm>
+            <a:off x="3046793" y="2740415"/>
+            <a:ext cx="6335009" cy="433905"/>
+          </a:xfrm>
+          <a:prstGeom prst="rect">
+            <a:avLst/>
+          </a:prstGeom>
+        </p:spPr>
+      </p:pic>
+      <p:pic>
+        <p:nvPicPr>
+          <p:cNvPr id="15" name="Imagen 14">
+            <a:extLst>
+              <a:ext uri="{FF2B5EF4-FFF2-40B4-BE49-F238E27FC236}">
+                <a16:creationId xmlns:a16="http://schemas.microsoft.com/office/drawing/2014/main" id="{AA050236-4D50-B63A-D505-5A9E1115C62F}"/>
+              </a:ext>
+            </a:extLst>
+          </p:cNvPr>
+          <p:cNvPicPr>
+            <a:picLocks noChangeAspect="1"/>
+          </p:cNvPicPr>
+          <p:nvPr/>
+        </p:nvPicPr>
+        <p:blipFill>
+          <a:blip r:embed="rId6"/>
+          <a:stretch>
+            <a:fillRect/>
+          </a:stretch>
+        </p:blipFill>
+        <p:spPr>
+          <a:xfrm>
+            <a:off x="2019490" y="5206552"/>
+            <a:ext cx="8153020" cy="622952"/>
+          </a:xfrm>
+          <a:prstGeom prst="rect">
+            <a:avLst/>
+          </a:prstGeom>
+        </p:spPr>
+      </p:pic>
     </p:spTree>
     <p:extLst>
       <p:ext uri="{BB962C8B-B14F-4D97-AF65-F5344CB8AC3E}">
@@ -5623,10 +7834,157 @@
   <p:clrMapOvr>
     <a:masterClrMapping/>
   </p:clrMapOvr>
+  <p:timing>
+    <p:tnLst>
+      <p:par>
+        <p:cTn id="1" dur="indefinite" restart="never" nodeType="tmRoot">
+          <p:childTnLst>
+            <p:seq concurrent="1" nextAc="seek">
+              <p:cTn id="2" dur="indefinite" nodeType="mainSeq">
+                <p:childTnLst>
+                  <p:par>
+                    <p:cTn id="3" fill="hold">
+                      <p:stCondLst>
+                        <p:cond delay="indefinite"/>
+                      </p:stCondLst>
+                      <p:childTnLst>
+                        <p:par>
+                          <p:cTn id="4" fill="hold">
+                            <p:stCondLst>
+                              <p:cond delay="0"/>
+                            </p:stCondLst>
+                            <p:childTnLst>
+                              <p:par>
+                                <p:cTn id="5" presetID="1" presetClass="entr" presetSubtype="0" fill="hold" nodeType="clickEffect">
+                                  <p:stCondLst>
+                                    <p:cond delay="0"/>
+                                  </p:stCondLst>
+                                  <p:childTnLst>
+                                    <p:set>
+                                      <p:cBhvr>
+                                        <p:cTn id="6" dur="1" fill="hold">
+                                          <p:stCondLst>
+                                            <p:cond delay="0"/>
+                                          </p:stCondLst>
+                                        </p:cTn>
+                                        <p:tgtEl>
+                                          <p:spTgt spid="9"/>
+                                        </p:tgtEl>
+                                        <p:attrNameLst>
+                                          <p:attrName>style.visibility</p:attrName>
+                                        </p:attrNameLst>
+                                      </p:cBhvr>
+                                      <p:to>
+                                        <p:strVal val="visible"/>
+                                      </p:to>
+                                    </p:set>
+                                  </p:childTnLst>
+                                </p:cTn>
+                              </p:par>
+                              <p:par>
+                                <p:cTn id="7" presetID="1" presetClass="entr" presetSubtype="0" fill="hold" nodeType="withEffect">
+                                  <p:stCondLst>
+                                    <p:cond delay="0"/>
+                                  </p:stCondLst>
+                                  <p:childTnLst>
+                                    <p:set>
+                                      <p:cBhvr>
+                                        <p:cTn id="8" dur="1" fill="hold">
+                                          <p:stCondLst>
+                                            <p:cond delay="0"/>
+                                          </p:stCondLst>
+                                        </p:cTn>
+                                        <p:tgtEl>
+                                          <p:spTgt spid="11"/>
+                                        </p:tgtEl>
+                                        <p:attrNameLst>
+                                          <p:attrName>style.visibility</p:attrName>
+                                        </p:attrNameLst>
+                                      </p:cBhvr>
+                                      <p:to>
+                                        <p:strVal val="visible"/>
+                                      </p:to>
+                                    </p:set>
+                                  </p:childTnLst>
+                                </p:cTn>
+                              </p:par>
+                            </p:childTnLst>
+                          </p:cTn>
+                        </p:par>
+                      </p:childTnLst>
+                    </p:cTn>
+                  </p:par>
+                  <p:par>
+                    <p:cTn id="9" fill="hold">
+                      <p:stCondLst>
+                        <p:cond delay="indefinite"/>
+                      </p:stCondLst>
+                      <p:childTnLst>
+                        <p:par>
+                          <p:cTn id="10" fill="hold">
+                            <p:stCondLst>
+                              <p:cond delay="0"/>
+                            </p:stCondLst>
+                            <p:childTnLst>
+                              <p:par>
+                                <p:cTn id="11" presetID="1" presetClass="entr" presetSubtype="0" fill="hold" nodeType="clickEffect">
+                                  <p:stCondLst>
+                                    <p:cond delay="0"/>
+                                  </p:stCondLst>
+                                  <p:childTnLst>
+                                    <p:set>
+                                      <p:cBhvr>
+                                        <p:cTn id="12" dur="1" fill="hold">
+                                          <p:stCondLst>
+                                            <p:cond delay="0"/>
+                                          </p:stCondLst>
+                                        </p:cTn>
+                                        <p:tgtEl>
+                                          <p:spTgt spid="15"/>
+                                        </p:tgtEl>
+                                        <p:attrNameLst>
+                                          <p:attrName>style.visibility</p:attrName>
+                                        </p:attrNameLst>
+                                      </p:cBhvr>
+                                      <p:to>
+                                        <p:strVal val="visible"/>
+                                      </p:to>
+                                    </p:set>
+                                  </p:childTnLst>
+                                </p:cTn>
+                              </p:par>
+                            </p:childTnLst>
+                          </p:cTn>
+                        </p:par>
+                      </p:childTnLst>
+                    </p:cTn>
+                  </p:par>
+                </p:childTnLst>
+              </p:cTn>
+              <p:prevCondLst>
+                <p:cond evt="onPrev" delay="0">
+                  <p:tgtEl>
+                    <p:sldTgt/>
+                  </p:tgtEl>
+                </p:cond>
+              </p:prevCondLst>
+              <p:nextCondLst>
+                <p:cond evt="onNext" delay="0">
+                  <p:tgtEl>
+                    <p:sldTgt/>
+                  </p:tgtEl>
+                </p:cond>
+              </p:nextCondLst>
+            </p:seq>
+          </p:childTnLst>
+        </p:cTn>
+      </p:par>
+    </p:tnLst>
+  </p:timing>
 </p:sld>
 </file>
 
-<file path=ppt/slides/slide6.xml><?xml version="1.0" encoding="utf-8"?>
+<file path=ppt/slides/slide7.xml><?xml version="1.0" encoding="utf-8"?>
 <p:sld xmlns:a="http://schemas.openxmlformats.org/drawingml/2006/main" xmlns:r="http://schemas.openxmlformats.org/officeDocument/2006/relationships" xmlns:p="http://schemas.openxmlformats.org/presentationml/2006/main">
   <p:cSld>
     <p:spTree>
@@ -5824,40 +8182,126 @@
           </a:p>
         </p:txBody>
       </p:sp>
-      <p:sp>
-        <p:nvSpPr>
-          <p:cNvPr id="8" name="Marcador de contenido 7">
+      <p:pic>
+        <p:nvPicPr>
+          <p:cNvPr id="7" name="Imagen 6">
             <a:extLst>
               <a:ext uri="{FF2B5EF4-FFF2-40B4-BE49-F238E27FC236}">
-                <a16:creationId xmlns:a16="http://schemas.microsoft.com/office/drawing/2014/main" id="{45C3FB5C-A5E9-FF97-F0F8-C0A29C95D835}"/>
+                <a16:creationId xmlns:a16="http://schemas.microsoft.com/office/drawing/2014/main" id="{543CF807-46B1-0958-3EA0-86A85642C5B6}"/>
               </a:ext>
             </a:extLst>
           </p:cNvPr>
-          <p:cNvSpPr>
-            <a:spLocks noGrp="1"/>
-          </p:cNvSpPr>
-          <p:nvPr>
-            <p:ph idx="1"/>
-          </p:nvPr>
-        </p:nvSpPr>
-        <p:spPr>
-          <a:xfrm>
-            <a:off x="1097280" y="2023962"/>
-            <a:ext cx="10058400" cy="3845132"/>
-          </a:xfrm>
-        </p:spPr>
-        <p:txBody>
-          <a:bodyPr/>
-          <a:lstStyle/>
-          <a:p>
-            <a:endParaRPr lang="en-US" dirty="0">
-              <a:solidFill>
-                <a:schemeClr val="tx1"/>
-              </a:solidFill>
-            </a:endParaRPr>
-          </a:p>
-        </p:txBody>
-      </p:sp>
+          <p:cNvPicPr>
+            <a:picLocks noChangeAspect="1"/>
+          </p:cNvPicPr>
+          <p:nvPr/>
+        </p:nvPicPr>
+        <p:blipFill>
+          <a:blip r:embed="rId3"/>
+          <a:stretch>
+            <a:fillRect/>
+          </a:stretch>
+        </p:blipFill>
+        <p:spPr>
+          <a:xfrm>
+            <a:off x="1036320" y="2095306"/>
+            <a:ext cx="1871955" cy="1247970"/>
+          </a:xfrm>
+          <a:prstGeom prst="rect">
+            <a:avLst/>
+          </a:prstGeom>
+        </p:spPr>
+      </p:pic>
+      <p:pic>
+        <p:nvPicPr>
+          <p:cNvPr id="10" name="Imagen 9">
+            <a:extLst>
+              <a:ext uri="{FF2B5EF4-FFF2-40B4-BE49-F238E27FC236}">
+                <a16:creationId xmlns:a16="http://schemas.microsoft.com/office/drawing/2014/main" id="{DCF414BB-101B-6F3F-17F4-69F661985806}"/>
+              </a:ext>
+            </a:extLst>
+          </p:cNvPr>
+          <p:cNvPicPr>
+            <a:picLocks noChangeAspect="1"/>
+          </p:cNvPicPr>
+          <p:nvPr/>
+        </p:nvPicPr>
+        <p:blipFill>
+          <a:blip r:embed="rId4"/>
+          <a:stretch>
+            <a:fillRect/>
+          </a:stretch>
+        </p:blipFill>
+        <p:spPr>
+          <a:xfrm>
+            <a:off x="4338500" y="2783071"/>
+            <a:ext cx="3514999" cy="1305327"/>
+          </a:xfrm>
+          <a:prstGeom prst="rect">
+            <a:avLst/>
+          </a:prstGeom>
+        </p:spPr>
+      </p:pic>
+      <p:pic>
+        <p:nvPicPr>
+          <p:cNvPr id="12" name="Imagen 11">
+            <a:extLst>
+              <a:ext uri="{FF2B5EF4-FFF2-40B4-BE49-F238E27FC236}">
+                <a16:creationId xmlns:a16="http://schemas.microsoft.com/office/drawing/2014/main" id="{294036E2-EE99-16E0-135D-A4F94F9D7B7C}"/>
+              </a:ext>
+            </a:extLst>
+          </p:cNvPr>
+          <p:cNvPicPr>
+            <a:picLocks noChangeAspect="1"/>
+          </p:cNvPicPr>
+          <p:nvPr/>
+        </p:nvPicPr>
+        <p:blipFill>
+          <a:blip r:embed="rId5"/>
+          <a:stretch>
+            <a:fillRect/>
+          </a:stretch>
+        </p:blipFill>
+        <p:spPr>
+          <a:xfrm>
+            <a:off x="4138201" y="4427544"/>
+            <a:ext cx="2819794" cy="362001"/>
+          </a:xfrm>
+          <a:prstGeom prst="rect">
+            <a:avLst/>
+          </a:prstGeom>
+        </p:spPr>
+      </p:pic>
+      <p:pic>
+        <p:nvPicPr>
+          <p:cNvPr id="14" name="Imagen 13">
+            <a:extLst>
+              <a:ext uri="{FF2B5EF4-FFF2-40B4-BE49-F238E27FC236}">
+                <a16:creationId xmlns:a16="http://schemas.microsoft.com/office/drawing/2014/main" id="{46CCAC8D-0A3A-20EC-8443-5C9B1A25B32C}"/>
+              </a:ext>
+            </a:extLst>
+          </p:cNvPr>
+          <p:cNvPicPr>
+            <a:picLocks noChangeAspect="1"/>
+          </p:cNvPicPr>
+          <p:nvPr/>
+        </p:nvPicPr>
+        <p:blipFill>
+          <a:blip r:embed="rId6"/>
+          <a:stretch>
+            <a:fillRect/>
+          </a:stretch>
+        </p:blipFill>
+        <p:spPr>
+          <a:xfrm>
+            <a:off x="1036319" y="3660978"/>
+            <a:ext cx="2469065" cy="1002794"/>
+          </a:xfrm>
+          <a:prstGeom prst="rect">
+            <a:avLst/>
+          </a:prstGeom>
+        </p:spPr>
+      </p:pic>
     </p:spTree>
     <p:extLst>
       <p:ext uri="{BB962C8B-B14F-4D97-AF65-F5344CB8AC3E}">
@@ -5871,7 +8315,7 @@
 </p:sld>
 </file>
 
-<file path=ppt/slides/slide7.xml><?xml version="1.0" encoding="utf-8"?>
+<file path=ppt/slides/slide8.xml><?xml version="1.0" encoding="utf-8"?>
 <p:sld xmlns:a="http://schemas.openxmlformats.org/drawingml/2006/main" xmlns:r="http://schemas.openxmlformats.org/officeDocument/2006/relationships" xmlns:p="http://schemas.openxmlformats.org/presentationml/2006/main">
   <p:cSld>
     <p:spTree>
@@ -6006,7 +8450,7 @@
                   <a:schemeClr val="tx1"/>
                 </a:solidFill>
               </a:rPr>
-              <a:t>Prisoner’s dilemma game</a:t>
+              <a:t>Model modification </a:t>
             </a:r>
           </a:p>
         </p:txBody>
@@ -6069,40 +8513,66 @@
           </a:p>
         </p:txBody>
       </p:sp>
-      <p:sp>
-        <p:nvSpPr>
-          <p:cNvPr id="8" name="Marcador de contenido 7">
+      <p:pic>
+        <p:nvPicPr>
+          <p:cNvPr id="10" name="Imagen 9">
             <a:extLst>
               <a:ext uri="{FF2B5EF4-FFF2-40B4-BE49-F238E27FC236}">
-                <a16:creationId xmlns:a16="http://schemas.microsoft.com/office/drawing/2014/main" id="{9204203D-E481-FC23-6AC2-DC48BB473179}"/>
+                <a16:creationId xmlns:a16="http://schemas.microsoft.com/office/drawing/2014/main" id="{191FA759-843C-28DD-4400-B9B232C59ED1}"/>
               </a:ext>
             </a:extLst>
           </p:cNvPr>
-          <p:cNvSpPr>
-            <a:spLocks noGrp="1"/>
-          </p:cNvSpPr>
-          <p:nvPr>
-            <p:ph idx="1"/>
-          </p:nvPr>
-        </p:nvSpPr>
-        <p:spPr>
-          <a:xfrm>
-            <a:off x="1097280" y="2023962"/>
-            <a:ext cx="10058400" cy="3845132"/>
-          </a:xfrm>
-        </p:spPr>
-        <p:txBody>
-          <a:bodyPr/>
-          <a:lstStyle/>
-          <a:p>
-            <a:endParaRPr lang="en-US" dirty="0">
-              <a:solidFill>
-                <a:schemeClr val="tx1"/>
-              </a:solidFill>
-            </a:endParaRPr>
-          </a:p>
-        </p:txBody>
-      </p:sp>
+          <p:cNvPicPr>
+            <a:picLocks noChangeAspect="1"/>
+          </p:cNvPicPr>
+          <p:nvPr/>
+        </p:nvPicPr>
+        <p:blipFill>
+          <a:blip r:embed="rId3"/>
+          <a:stretch>
+            <a:fillRect/>
+          </a:stretch>
+        </p:blipFill>
+        <p:spPr>
+          <a:xfrm>
+            <a:off x="5262446" y="2919341"/>
+            <a:ext cx="1667108" cy="1019317"/>
+          </a:xfrm>
+          <a:prstGeom prst="rect">
+            <a:avLst/>
+          </a:prstGeom>
+        </p:spPr>
+      </p:pic>
+      <p:pic>
+        <p:nvPicPr>
+          <p:cNvPr id="12" name="Imagen 11">
+            <a:extLst>
+              <a:ext uri="{FF2B5EF4-FFF2-40B4-BE49-F238E27FC236}">
+                <a16:creationId xmlns:a16="http://schemas.microsoft.com/office/drawing/2014/main" id="{E318D6E0-C0F1-AC2D-33D2-A70FFADCE2DD}"/>
+              </a:ext>
+            </a:extLst>
+          </p:cNvPr>
+          <p:cNvPicPr>
+            <a:picLocks noChangeAspect="1"/>
+          </p:cNvPicPr>
+          <p:nvPr/>
+        </p:nvPicPr>
+        <p:blipFill>
+          <a:blip r:embed="rId4"/>
+          <a:stretch>
+            <a:fillRect/>
+          </a:stretch>
+        </p:blipFill>
+        <p:spPr>
+          <a:xfrm>
+            <a:off x="4686087" y="4315898"/>
+            <a:ext cx="3048425" cy="1247949"/>
+          </a:xfrm>
+          <a:prstGeom prst="rect">
+            <a:avLst/>
+          </a:prstGeom>
+        </p:spPr>
+      </p:pic>
     </p:spTree>
     <p:extLst>
       <p:ext uri="{BB962C8B-B14F-4D97-AF65-F5344CB8AC3E}">
@@ -6116,7 +8586,7 @@
 </p:sld>
 </file>
 
-<file path=ppt/slides/slide8.xml><?xml version="1.0" encoding="utf-8"?>
+<file path=ppt/slides/slide9.xml><?xml version="1.0" encoding="utf-8"?>
 <p:sld xmlns:a="http://schemas.openxmlformats.org/drawingml/2006/main" xmlns:r="http://schemas.openxmlformats.org/officeDocument/2006/relationships" xmlns:p="http://schemas.openxmlformats.org/presentationml/2006/main">
   <p:cSld>
     <p:spTree>
@@ -6245,11 +8715,14 @@
           <a:lstStyle/>
           <a:p>
             <a:pPr algn="ctr"/>
-            <a:endParaRPr lang="en-US" dirty="0">
-              <a:solidFill>
-                <a:schemeClr val="tx1"/>
-              </a:solidFill>
-            </a:endParaRPr>
+            <a:r>
+              <a:rPr lang="en-US" dirty="0">
+                <a:solidFill>
+                  <a:schemeClr val="tx1"/>
+                </a:solidFill>
+              </a:rPr>
+              <a:t>Average population dynamics</a:t>
+            </a:r>
           </a:p>
         </p:txBody>
       </p:sp>
@@ -6263,14 +8736,14 @@
             </a:extLst>
           </p:cNvPr>
           <p:cNvSpPr>
-            <a:spLocks noGrp="1" noRot="1" noMove="1" noResize="1" noEditPoints="1" noAdjustHandles="1" noChangeArrowheads="1" noChangeShapeType="1"/>
+            <a:spLocks/>
           </p:cNvSpPr>
           <p:nvPr/>
         </p:nvSpPr>
         <p:spPr>
           <a:xfrm>
-            <a:off x="957072" y="2023962"/>
-            <a:ext cx="10198608" cy="4290709"/>
+            <a:off x="6736076" y="4558168"/>
+            <a:ext cx="4737231" cy="1717241"/>
           </a:xfrm>
           <a:prstGeom prst="rect">
             <a:avLst/>
@@ -6311,40 +8784,82 @@
           </a:p>
         </p:txBody>
       </p:sp>
-      <p:sp>
-        <p:nvSpPr>
-          <p:cNvPr id="8" name="Marcador de contenido 7">
+      <p:pic>
+        <p:nvPicPr>
+          <p:cNvPr id="7" name="Marcador de contenido 6">
             <a:extLst>
               <a:ext uri="{FF2B5EF4-FFF2-40B4-BE49-F238E27FC236}">
-                <a16:creationId xmlns:a16="http://schemas.microsoft.com/office/drawing/2014/main" id="{0932B2E8-C625-1ED1-2E88-DA0AAFFF4F67}"/>
+                <a16:creationId xmlns:a16="http://schemas.microsoft.com/office/drawing/2014/main" id="{578E9287-B729-3243-E061-FB8DBECAA469}"/>
               </a:ext>
             </a:extLst>
           </p:cNvPr>
-          <p:cNvSpPr>
-            <a:spLocks noGrp="1"/>
-          </p:cNvSpPr>
+          <p:cNvPicPr>
+            <a:picLocks noGrp="1" noChangeAspect="1"/>
+          </p:cNvPicPr>
           <p:nvPr>
             <p:ph idx="1"/>
           </p:nvPr>
-        </p:nvSpPr>
-        <p:spPr>
-          <a:xfrm>
-            <a:off x="1097280" y="2023962"/>
-            <a:ext cx="10058400" cy="3845132"/>
-          </a:xfrm>
-        </p:spPr>
-        <p:txBody>
-          <a:bodyPr/>
-          <a:lstStyle/>
-          <a:p>
-            <a:endParaRPr lang="en-US" dirty="0">
-              <a:solidFill>
-                <a:schemeClr val="tx1"/>
-              </a:solidFill>
-            </a:endParaRPr>
-          </a:p>
-        </p:txBody>
-      </p:sp>
+        </p:nvPicPr>
+        <p:blipFill>
+          <a:blip r:embed="rId3">
+            <a:extLst>
+              <a:ext uri="{28A0092B-C50C-407E-A947-70E740481C1C}">
+                <a14:useLocalDpi xmlns:a14="http://schemas.microsoft.com/office/drawing/2010/main" val="0"/>
+              </a:ext>
+            </a:extLst>
+          </a:blip>
+          <a:srcRect t="9260"/>
+          <a:stretch>
+            <a:fillRect/>
+          </a:stretch>
+        </p:blipFill>
+        <p:spPr>
+          <a:xfrm>
+            <a:off x="495300" y="1913538"/>
+            <a:ext cx="6035933" cy="4361871"/>
+          </a:xfrm>
+          <a:prstGeom prst="rect">
+            <a:avLst/>
+          </a:prstGeom>
+        </p:spPr>
+      </p:pic>
+      <p:pic>
+        <p:nvPicPr>
+          <p:cNvPr id="10" name="Imagen 9">
+            <a:extLst>
+              <a:ext uri="{FF2B5EF4-FFF2-40B4-BE49-F238E27FC236}">
+                <a16:creationId xmlns:a16="http://schemas.microsoft.com/office/drawing/2014/main" id="{DB6A651C-6D2D-9A99-1C7A-FFFC9C928C6F}"/>
+              </a:ext>
+            </a:extLst>
+          </p:cNvPr>
+          <p:cNvPicPr>
+            <a:picLocks noChangeAspect="1"/>
+          </p:cNvPicPr>
+          <p:nvPr/>
+        </p:nvPicPr>
+        <p:blipFill>
+          <a:blip r:embed="rId4">
+            <a:extLst>
+              <a:ext uri="{28A0092B-C50C-407E-A947-70E740481C1C}">
+                <a14:useLocalDpi xmlns:a14="http://schemas.microsoft.com/office/drawing/2010/main" val="0"/>
+              </a:ext>
+            </a:extLst>
+          </a:blip>
+          <a:srcRect t="8678" r="1495"/>
+          <a:stretch>
+            <a:fillRect/>
+          </a:stretch>
+        </p:blipFill>
+        <p:spPr>
+          <a:xfrm>
+            <a:off x="6736076" y="1909559"/>
+            <a:ext cx="4737231" cy="2509591"/>
+          </a:xfrm>
+          <a:prstGeom prst="rect">
+            <a:avLst/>
+          </a:prstGeom>
+        </p:spPr>
+      </p:pic>
     </p:spTree>
     <p:extLst>
       <p:ext uri="{BB962C8B-B14F-4D97-AF65-F5344CB8AC3E}">
@@ -6639,4 +9154,319 @@
     </a:ext>
   </a:extLst>
 </a:theme>
+</file>
+
+<file path=ppt/theme/theme2.xml><?xml version="1.0" encoding="utf-8"?>
+<a:theme xmlns:a="http://schemas.openxmlformats.org/drawingml/2006/main" name="Tema de Office">
+  <a:themeElements>
+    <a:clrScheme name="Office">
+      <a:dk1>
+        <a:sysClr val="windowText" lastClr="000000"/>
+      </a:dk1>
+      <a:lt1>
+        <a:sysClr val="window" lastClr="FFFFFF"/>
+      </a:lt1>
+      <a:dk2>
+        <a:srgbClr val="0E2841"/>
+      </a:dk2>
+      <a:lt2>
+        <a:srgbClr val="E8E8E8"/>
+      </a:lt2>
+      <a:accent1>
+        <a:srgbClr val="156082"/>
+      </a:accent1>
+      <a:accent2>
+        <a:srgbClr val="E97132"/>
+      </a:accent2>
+      <a:accent3>
+        <a:srgbClr val="196B24"/>
+      </a:accent3>
+      <a:accent4>
+        <a:srgbClr val="0F9ED5"/>
+      </a:accent4>
+      <a:accent5>
+        <a:srgbClr val="A02B93"/>
+      </a:accent5>
+      <a:accent6>
+        <a:srgbClr val="4EA72E"/>
+      </a:accent6>
+      <a:hlink>
+        <a:srgbClr val="467886"/>
+      </a:hlink>
+      <a:folHlink>
+        <a:srgbClr val="96607D"/>
+      </a:folHlink>
+    </a:clrScheme>
+    <a:fontScheme name="Office">
+      <a:majorFont>
+        <a:latin typeface="Aptos Display" panose="02110004020202020204"/>
+        <a:ea typeface=""/>
+        <a:cs typeface=""/>
+        <a:font script="Jpan" typeface="游ゴシック Light"/>
+        <a:font script="Hang" typeface="맑은 고딕"/>
+        <a:font script="Hans" typeface="等线 Light"/>
+        <a:font script="Hant" typeface="新細明體"/>
+        <a:font script="Arab" typeface="Times New Roman"/>
+        <a:font script="Hebr" typeface="Times New Roman"/>
+        <a:font script="Thai" typeface="Angsana New"/>
+        <a:font script="Ethi" typeface="Nyala"/>
+        <a:font script="Beng" typeface="Vrinda"/>
+        <a:font script="Gujr" typeface="Shruti"/>
+        <a:font script="Khmr" typeface="MoolBoran"/>
+        <a:font script="Knda" typeface="Tunga"/>
+        <a:font script="Guru" typeface="Raavi"/>
+        <a:font script="Cans" typeface="Euphemia"/>
+        <a:font script="Cher" typeface="Plantagenet Cherokee"/>
+        <a:font script="Yiii" typeface="Microsoft Yi Baiti"/>
+        <a:font script="Tibt" typeface="Microsoft Himalaya"/>
+        <a:font script="Thaa" typeface="MV Boli"/>
+        <a:font script="Deva" typeface="Mangal"/>
+        <a:font script="Telu" typeface="Gautami"/>
+        <a:font script="Taml" typeface="Latha"/>
+        <a:font script="Syrc" typeface="Estrangelo Edessa"/>
+        <a:font script="Orya" typeface="Kalinga"/>
+        <a:font script="Mlym" typeface="Kartika"/>
+        <a:font script="Laoo" typeface="DokChampa"/>
+        <a:font script="Sinh" typeface="Iskoola Pota"/>
+        <a:font script="Mong" typeface="Mongolian Baiti"/>
+        <a:font script="Viet" typeface="Times New Roman"/>
+        <a:font script="Uigh" typeface="Microsoft Uighur"/>
+        <a:font script="Geor" typeface="Sylfaen"/>
+        <a:font script="Armn" typeface="Arial"/>
+        <a:font script="Bugi" typeface="Leelawadee UI"/>
+        <a:font script="Bopo" typeface="Microsoft JhengHei"/>
+        <a:font script="Java" typeface="Javanese Text"/>
+        <a:font script="Lisu" typeface="Segoe UI"/>
+        <a:font script="Mymr" typeface="Myanmar Text"/>
+        <a:font script="Nkoo" typeface="Ebrima"/>
+        <a:font script="Olck" typeface="Nirmala UI"/>
+        <a:font script="Osma" typeface="Ebrima"/>
+        <a:font script="Phag" typeface="Phagspa"/>
+        <a:font script="Syrn" typeface="Estrangelo Edessa"/>
+        <a:font script="Syrj" typeface="Estrangelo Edessa"/>
+        <a:font script="Syre" typeface="Estrangelo Edessa"/>
+        <a:font script="Sora" typeface="Nirmala UI"/>
+        <a:font script="Tale" typeface="Microsoft Tai Le"/>
+        <a:font script="Talu" typeface="Microsoft New Tai Lue"/>
+        <a:font script="Tfng" typeface="Ebrima"/>
+      </a:majorFont>
+      <a:minorFont>
+        <a:latin typeface="Aptos" panose="02110004020202020204"/>
+        <a:ea typeface=""/>
+        <a:cs typeface=""/>
+        <a:font script="Jpan" typeface="游ゴシック"/>
+        <a:font script="Hang" typeface="맑은 고딕"/>
+        <a:font script="Hans" typeface="等线"/>
+        <a:font script="Hant" typeface="新細明體"/>
+        <a:font script="Arab" typeface="Arial"/>
+        <a:font script="Hebr" typeface="Arial"/>
+        <a:font script="Thai" typeface="Cordia New"/>
+        <a:font script="Ethi" typeface="Nyala"/>
+        <a:font script="Beng" typeface="Vrinda"/>
+        <a:font script="Gujr" typeface="Shruti"/>
+        <a:font script="Khmr" typeface="DaunPenh"/>
+        <a:font script="Knda" typeface="Tunga"/>
+        <a:font script="Guru" typeface="Raavi"/>
+        <a:font script="Cans" typeface="Euphemia"/>
+        <a:font script="Cher" typeface="Plantagenet Cherokee"/>
+        <a:font script="Yiii" typeface="Microsoft Yi Baiti"/>
+        <a:font script="Tibt" typeface="Microsoft Himalaya"/>
+        <a:font script="Thaa" typeface="MV Boli"/>
+        <a:font script="Deva" typeface="Mangal"/>
+        <a:font script="Telu" typeface="Gautami"/>
+        <a:font script="Taml" typeface="Latha"/>
+        <a:font script="Syrc" typeface="Estrangelo Edessa"/>
+        <a:font script="Orya" typeface="Kalinga"/>
+        <a:font script="Mlym" typeface="Kartika"/>
+        <a:font script="Laoo" typeface="DokChampa"/>
+        <a:font script="Sinh" typeface="Iskoola Pota"/>
+        <a:font script="Mong" typeface="Mongolian Baiti"/>
+        <a:font script="Viet" typeface="Arial"/>
+        <a:font script="Uigh" typeface="Microsoft Uighur"/>
+        <a:font script="Geor" typeface="Sylfaen"/>
+        <a:font script="Armn" typeface="Arial"/>
+        <a:font script="Bugi" typeface="Leelawadee UI"/>
+        <a:font script="Bopo" typeface="Microsoft JhengHei"/>
+        <a:font script="Java" typeface="Javanese Text"/>
+        <a:font script="Lisu" typeface="Segoe UI"/>
+        <a:font script="Mymr" typeface="Myanmar Text"/>
+        <a:font script="Nkoo" typeface="Ebrima"/>
+        <a:font script="Olck" typeface="Nirmala UI"/>
+        <a:font script="Osma" typeface="Ebrima"/>
+        <a:font script="Phag" typeface="Phagspa"/>
+        <a:font script="Syrn" typeface="Estrangelo Edessa"/>
+        <a:font script="Syrj" typeface="Estrangelo Edessa"/>
+        <a:font script="Syre" typeface="Estrangelo Edessa"/>
+        <a:font script="Sora" typeface="Nirmala UI"/>
+        <a:font script="Tale" typeface="Microsoft Tai Le"/>
+        <a:font script="Talu" typeface="Microsoft New Tai Lue"/>
+        <a:font script="Tfng" typeface="Ebrima"/>
+      </a:minorFont>
+    </a:fontScheme>
+    <a:fmtScheme name="Office">
+      <a:fillStyleLst>
+        <a:solidFill>
+          <a:schemeClr val="phClr"/>
+        </a:solidFill>
+        <a:gradFill rotWithShape="1">
+          <a:gsLst>
+            <a:gs pos="0">
+              <a:schemeClr val="phClr">
+                <a:lumMod val="110000"/>
+                <a:satMod val="105000"/>
+                <a:tint val="67000"/>
+              </a:schemeClr>
+            </a:gs>
+            <a:gs pos="50000">
+              <a:schemeClr val="phClr">
+                <a:lumMod val="105000"/>
+                <a:satMod val="103000"/>
+                <a:tint val="73000"/>
+              </a:schemeClr>
+            </a:gs>
+            <a:gs pos="100000">
+              <a:schemeClr val="phClr">
+                <a:lumMod val="105000"/>
+                <a:satMod val="109000"/>
+                <a:tint val="81000"/>
+              </a:schemeClr>
+            </a:gs>
+          </a:gsLst>
+          <a:lin ang="5400000" scaled="0"/>
+        </a:gradFill>
+        <a:gradFill rotWithShape="1">
+          <a:gsLst>
+            <a:gs pos="0">
+              <a:schemeClr val="phClr">
+                <a:satMod val="103000"/>
+                <a:lumMod val="102000"/>
+                <a:tint val="94000"/>
+              </a:schemeClr>
+            </a:gs>
+            <a:gs pos="50000">
+              <a:schemeClr val="phClr">
+                <a:satMod val="110000"/>
+                <a:lumMod val="100000"/>
+                <a:shade val="100000"/>
+              </a:schemeClr>
+            </a:gs>
+            <a:gs pos="100000">
+              <a:schemeClr val="phClr">
+                <a:lumMod val="99000"/>
+                <a:satMod val="120000"/>
+                <a:shade val="78000"/>
+              </a:schemeClr>
+            </a:gs>
+          </a:gsLst>
+          <a:lin ang="5400000" scaled="0"/>
+        </a:gradFill>
+      </a:fillStyleLst>
+      <a:lnStyleLst>
+        <a:ln w="12700" cap="flat" cmpd="sng" algn="ctr">
+          <a:solidFill>
+            <a:schemeClr val="phClr"/>
+          </a:solidFill>
+          <a:prstDash val="solid"/>
+          <a:miter lim="800000"/>
+        </a:ln>
+        <a:ln w="19050" cap="flat" cmpd="sng" algn="ctr">
+          <a:solidFill>
+            <a:schemeClr val="phClr"/>
+          </a:solidFill>
+          <a:prstDash val="solid"/>
+          <a:miter lim="800000"/>
+        </a:ln>
+        <a:ln w="25400" cap="flat" cmpd="sng" algn="ctr">
+          <a:solidFill>
+            <a:schemeClr val="phClr"/>
+          </a:solidFill>
+          <a:prstDash val="solid"/>
+          <a:miter lim="800000"/>
+        </a:ln>
+      </a:lnStyleLst>
+      <a:effectStyleLst>
+        <a:effectStyle>
+          <a:effectLst/>
+        </a:effectStyle>
+        <a:effectStyle>
+          <a:effectLst/>
+        </a:effectStyle>
+        <a:effectStyle>
+          <a:effectLst>
+            <a:outerShdw blurRad="57150" dist="19050" dir="5400000" algn="ctr" rotWithShape="0">
+              <a:srgbClr val="000000">
+                <a:alpha val="63000"/>
+              </a:srgbClr>
+            </a:outerShdw>
+          </a:effectLst>
+        </a:effectStyle>
+      </a:effectStyleLst>
+      <a:bgFillStyleLst>
+        <a:solidFill>
+          <a:schemeClr val="phClr"/>
+        </a:solidFill>
+        <a:solidFill>
+          <a:schemeClr val="phClr">
+            <a:tint val="95000"/>
+            <a:satMod val="170000"/>
+          </a:schemeClr>
+        </a:solidFill>
+        <a:gradFill rotWithShape="1">
+          <a:gsLst>
+            <a:gs pos="0">
+              <a:schemeClr val="phClr">
+                <a:tint val="93000"/>
+                <a:satMod val="150000"/>
+                <a:shade val="98000"/>
+                <a:lumMod val="102000"/>
+              </a:schemeClr>
+            </a:gs>
+            <a:gs pos="50000">
+              <a:schemeClr val="phClr">
+                <a:tint val="98000"/>
+                <a:satMod val="130000"/>
+                <a:shade val="90000"/>
+                <a:lumMod val="103000"/>
+              </a:schemeClr>
+            </a:gs>
+            <a:gs pos="100000">
+              <a:schemeClr val="phClr">
+                <a:shade val="63000"/>
+                <a:satMod val="120000"/>
+              </a:schemeClr>
+            </a:gs>
+          </a:gsLst>
+          <a:lin ang="5400000" scaled="0"/>
+        </a:gradFill>
+      </a:bgFillStyleLst>
+    </a:fmtScheme>
+  </a:themeElements>
+  <a:objectDefaults>
+    <a:lnDef>
+      <a:spPr/>
+      <a:bodyPr/>
+      <a:lstStyle/>
+      <a:style>
+        <a:lnRef idx="2">
+          <a:schemeClr val="accent1"/>
+        </a:lnRef>
+        <a:fillRef idx="0">
+          <a:schemeClr val="accent1"/>
+        </a:fillRef>
+        <a:effectRef idx="1">
+          <a:schemeClr val="accent1"/>
+        </a:effectRef>
+        <a:fontRef idx="minor">
+          <a:schemeClr val="tx1"/>
+        </a:fontRef>
+      </a:style>
+    </a:lnDef>
+  </a:objectDefaults>
+  <a:extraClrSchemeLst/>
+  <a:extLst>
+    <a:ext uri="{05A4C25C-085E-4340-85A3-A5531E510DB2}">
+      <thm15:themeFamily xmlns:thm15="http://schemas.microsoft.com/office/thememl/2012/main" name="Office Theme" id="{2E142A2C-CD16-42D6-873A-C26D2A0506FA}" vid="{1BDDFF52-6CD6-40A5-AB3C-68EB2F1E4D0A}"/>
+    </a:ext>
+  </a:extLst>
+</a:theme>
 </file>
--- a/Evolutionary game theory.pptx
+++ b/Evolutionary game theory.pptx
@@ -5,7 +5,7 @@
     <p:sldMasterId id="2147484060" r:id="rId1"/>
   </p:sldMasterIdLst>
   <p:notesMasterIdLst>
-    <p:notesMasterId r:id="rId15"/>
+    <p:notesMasterId r:id="rId16"/>
   </p:notesMasterIdLst>
   <p:sldIdLst>
     <p:sldId id="256" r:id="rId2"/>
@@ -17,10 +17,11 @@
     <p:sldId id="263" r:id="rId8"/>
     <p:sldId id="265" r:id="rId9"/>
     <p:sldId id="262" r:id="rId10"/>
-    <p:sldId id="267" r:id="rId11"/>
-    <p:sldId id="268" r:id="rId12"/>
-    <p:sldId id="269" r:id="rId13"/>
-    <p:sldId id="271" r:id="rId14"/>
+    <p:sldId id="272" r:id="rId11"/>
+    <p:sldId id="267" r:id="rId12"/>
+    <p:sldId id="268" r:id="rId13"/>
+    <p:sldId id="269" r:id="rId14"/>
+    <p:sldId id="271" r:id="rId15"/>
   </p:sldIdLst>
   <p:sldSz cx="12192000" cy="6858000"/>
   <p:notesSz cx="6858000" cy="9144000"/>
@@ -209,7 +210,7 @@
           <a:p>
             <a:fld id="{E8A96423-E2BE-406A-8E00-50EA8C0F26E1}" type="datetimeFigureOut">
               <a:rPr lang="en-US" smtClean="0"/>
-              <a:t>5/21/2026</a:t>
+              <a:t>5/22/2026</a:t>
             </a:fld>
             <a:endParaRPr lang="en-US"/>
           </a:p>
@@ -521,7 +522,27 @@
           <a:bodyPr/>
           <a:lstStyle/>
           <a:p>
+            <a:r>
+              <a:rPr lang="en-US" dirty="0"/>
+              <a:t>Classical </a:t>
+            </a:r>
+            <a:r>
+              <a:rPr lang="en-US" dirty="0" err="1"/>
+              <a:t>ev</a:t>
+            </a:r>
+            <a:r>
+              <a:rPr lang="en-US" dirty="0"/>
+              <a:t>. Game theory</a:t>
+            </a:r>
+          </a:p>
+          <a:p>
             <a:endParaRPr lang="en-US" dirty="0"/>
+          </a:p>
+          <a:p>
+            <a:r>
+              <a:rPr lang="en-US" dirty="0"/>
+              <a:t>their relative frequency</a:t>
+            </a:r>
           </a:p>
         </p:txBody>
       </p:sp>
@@ -542,7 +563,7 @@
           <a:p>
             <a:fld id="{2C18E92B-89E1-424D-92B5-BDD68C18C3D6}" type="slidenum">
               <a:rPr lang="en-US" smtClean="0"/>
-              <a:t>5</a:t>
+              <a:t>3</a:t>
             </a:fld>
             <a:endParaRPr lang="en-US"/>
           </a:p>
@@ -551,7 +572,7 @@
     </p:spTree>
     <p:extLst>
       <p:ext uri="{BB962C8B-B14F-4D97-AF65-F5344CB8AC3E}">
-        <p14:creationId xmlns:p14="http://schemas.microsoft.com/office/powerpoint/2010/main" val="3152171551"/>
+        <p14:creationId xmlns:p14="http://schemas.microsoft.com/office/powerpoint/2010/main" val="809122399"/>
       </p:ext>
     </p:extLst>
   </p:cSld>
@@ -605,7 +626,16 @@
           <a:bodyPr/>
           <a:lstStyle/>
           <a:p>
-            <a:endParaRPr lang="en-US" dirty="0"/>
+            <a:r>
+              <a:rPr lang="en-US" dirty="0"/>
+              <a:t>G/D: per capita birth/death rates of type S</a:t>
+            </a:r>
+          </a:p>
+          <a:p>
+            <a:r>
+              <a:rPr lang="en-US" dirty="0"/>
+              <a:t>Multiplying by Ns gives the total rate for the subpopulation of type S</a:t>
+            </a:r>
           </a:p>
         </p:txBody>
       </p:sp>
@@ -626,7 +656,385 @@
           <a:p>
             <a:fld id="{2C18E92B-89E1-424D-92B5-BDD68C18C3D6}" type="slidenum">
               <a:rPr lang="en-US" smtClean="0"/>
-              <a:t>10</a:t>
+              <a:t>5</a:t>
+            </a:fld>
+            <a:endParaRPr lang="en-US"/>
+          </a:p>
+        </p:txBody>
+      </p:sp>
+    </p:spTree>
+    <p:extLst>
+      <p:ext uri="{BB962C8B-B14F-4D97-AF65-F5344CB8AC3E}">
+        <p14:creationId xmlns:p14="http://schemas.microsoft.com/office/powerpoint/2010/main" val="3152171551"/>
+      </p:ext>
+    </p:extLst>
+  </p:cSld>
+  <p:clrMapOvr>
+    <a:masterClrMapping/>
+  </p:clrMapOvr>
+</p:notes>
+</file>
+
+<file path=ppt/notesSlides/notesSlide3.xml><?xml version="1.0" encoding="utf-8"?>
+<p:notes xmlns:a="http://schemas.openxmlformats.org/drawingml/2006/main" xmlns:r="http://schemas.openxmlformats.org/officeDocument/2006/relationships" xmlns:p="http://schemas.openxmlformats.org/presentationml/2006/main">
+  <p:cSld>
+    <p:spTree>
+      <p:nvGrpSpPr>
+        <p:cNvPr id="1" name=""/>
+        <p:cNvGrpSpPr/>
+        <p:nvPr/>
+      </p:nvGrpSpPr>
+      <p:grpSpPr>
+        <a:xfrm>
+          <a:off x="0" y="0"/>
+          <a:ext cx="0" cy="0"/>
+          <a:chOff x="0" y="0"/>
+          <a:chExt cx="0" cy="0"/>
+        </a:xfrm>
+      </p:grpSpPr>
+      <p:sp>
+        <p:nvSpPr>
+          <p:cNvPr id="2" name="Marcador de imagen de diapositiva 1"/>
+          <p:cNvSpPr>
+            <a:spLocks noGrp="1" noRot="1" noChangeAspect="1"/>
+          </p:cNvSpPr>
+          <p:nvPr>
+            <p:ph type="sldImg"/>
+          </p:nvPr>
+        </p:nvSpPr>
+        <p:spPr/>
+      </p:sp>
+      <p:sp>
+        <p:nvSpPr>
+          <p:cNvPr id="3" name="Marcador de notas 2"/>
+          <p:cNvSpPr>
+            <a:spLocks noGrp="1"/>
+          </p:cNvSpPr>
+          <p:nvPr>
+            <p:ph type="body" idx="1"/>
+          </p:nvPr>
+        </p:nvSpPr>
+        <p:spPr/>
+        <p:txBody>
+          <a:bodyPr/>
+          <a:lstStyle/>
+          <a:p>
+            <a:r>
+              <a:rPr lang="en-US" dirty="0"/>
+              <a:t>The  deterministic description is obtained by replacing the discrete birth and death events by their average effect per unit time. Since a birth event of type S changes NS by +1, while a death event changes it by −1, the average rate of change of NS is:</a:t>
+            </a:r>
+          </a:p>
+        </p:txBody>
+      </p:sp>
+      <p:sp>
+        <p:nvSpPr>
+          <p:cNvPr id="4" name="Marcador de número de diapositiva 3"/>
+          <p:cNvSpPr>
+            <a:spLocks noGrp="1"/>
+          </p:cNvSpPr>
+          <p:nvPr>
+            <p:ph type="sldNum" sz="quarter" idx="5"/>
+          </p:nvPr>
+        </p:nvSpPr>
+        <p:spPr/>
+        <p:txBody>
+          <a:bodyPr/>
+          <a:lstStyle/>
+          <a:p>
+            <a:fld id="{2C18E92B-89E1-424D-92B5-BDD68C18C3D6}" type="slidenum">
+              <a:rPr lang="en-US" smtClean="0"/>
+              <a:t>6</a:t>
+            </a:fld>
+            <a:endParaRPr lang="en-US"/>
+          </a:p>
+        </p:txBody>
+      </p:sp>
+    </p:spTree>
+    <p:extLst>
+      <p:ext uri="{BB962C8B-B14F-4D97-AF65-F5344CB8AC3E}">
+        <p14:creationId xmlns:p14="http://schemas.microsoft.com/office/powerpoint/2010/main" val="1184227313"/>
+      </p:ext>
+    </p:extLst>
+  </p:cSld>
+  <p:clrMapOvr>
+    <a:masterClrMapping/>
+  </p:clrMapOvr>
+</p:notes>
+</file>
+
+<file path=ppt/notesSlides/notesSlide4.xml><?xml version="1.0" encoding="utf-8"?>
+<p:notes xmlns:a="http://schemas.openxmlformats.org/drawingml/2006/main" xmlns:r="http://schemas.openxmlformats.org/officeDocument/2006/relationships" xmlns:p="http://schemas.openxmlformats.org/presentationml/2006/main">
+  <p:cSld>
+    <p:spTree>
+      <p:nvGrpSpPr>
+        <p:cNvPr id="1" name=""/>
+        <p:cNvGrpSpPr/>
+        <p:nvPr/>
+      </p:nvGrpSpPr>
+      <p:grpSpPr>
+        <a:xfrm>
+          <a:off x="0" y="0"/>
+          <a:ext cx="0" cy="0"/>
+          <a:chOff x="0" y="0"/>
+          <a:chExt cx="0" cy="0"/>
+        </a:xfrm>
+      </p:grpSpPr>
+      <p:sp>
+        <p:nvSpPr>
+          <p:cNvPr id="2" name="Marcador de imagen de diapositiva 1"/>
+          <p:cNvSpPr>
+            <a:spLocks noGrp="1" noRot="1" noChangeAspect="1"/>
+          </p:cNvSpPr>
+          <p:nvPr>
+            <p:ph type="sldImg"/>
+          </p:nvPr>
+        </p:nvSpPr>
+        <p:spPr/>
+      </p:sp>
+      <p:sp>
+        <p:nvSpPr>
+          <p:cNvPr id="3" name="Marcador de notas 2"/>
+          <p:cNvSpPr>
+            <a:spLocks noGrp="1"/>
+          </p:cNvSpPr>
+          <p:nvPr>
+            <p:ph type="body" idx="1"/>
+          </p:nvPr>
+        </p:nvSpPr>
+        <p:spPr/>
+        <p:txBody>
+          <a:bodyPr/>
+          <a:lstStyle/>
+          <a:p>
+            <a:r>
+              <a:rPr lang="en-US" dirty="0"/>
+              <a:t>payoff matrix: where the rows indicate the strategy of the individual and the columns the strategy of the individual they interact with.</a:t>
+            </a:r>
+          </a:p>
+          <a:p>
+            <a:r>
+              <a:rPr lang="en-US" dirty="0"/>
+              <a:t>s: Controls how fast internal composition changes</a:t>
+            </a:r>
+          </a:p>
+          <a:p>
+            <a:endParaRPr lang="en-US" dirty="0"/>
+          </a:p>
+          <a:p>
+            <a:r>
+              <a:rPr lang="en-US" dirty="0"/>
+              <a:t>defectors always have a relative fitness advantage over cooperators</a:t>
+            </a:r>
+          </a:p>
+        </p:txBody>
+      </p:sp>
+      <p:sp>
+        <p:nvSpPr>
+          <p:cNvPr id="4" name="Marcador de número de diapositiva 3"/>
+          <p:cNvSpPr>
+            <a:spLocks noGrp="1"/>
+          </p:cNvSpPr>
+          <p:nvPr>
+            <p:ph type="sldNum" sz="quarter" idx="5"/>
+          </p:nvPr>
+        </p:nvSpPr>
+        <p:spPr/>
+        <p:txBody>
+          <a:bodyPr/>
+          <a:lstStyle/>
+          <a:p>
+            <a:fld id="{2C18E92B-89E1-424D-92B5-BDD68C18C3D6}" type="slidenum">
+              <a:rPr lang="en-US" smtClean="0"/>
+              <a:t>7</a:t>
+            </a:fld>
+            <a:endParaRPr lang="en-US"/>
+          </a:p>
+        </p:txBody>
+      </p:sp>
+    </p:spTree>
+    <p:extLst>
+      <p:ext uri="{BB962C8B-B14F-4D97-AF65-F5344CB8AC3E}">
+        <p14:creationId xmlns:p14="http://schemas.microsoft.com/office/powerpoint/2010/main" val="3579164748"/>
+      </p:ext>
+    </p:extLst>
+  </p:cSld>
+  <p:clrMapOvr>
+    <a:masterClrMapping/>
+  </p:clrMapOvr>
+</p:notes>
+</file>
+
+<file path=ppt/notesSlides/notesSlide5.xml><?xml version="1.0" encoding="utf-8"?>
+<p:notes xmlns:a="http://schemas.openxmlformats.org/drawingml/2006/main" xmlns:r="http://schemas.openxmlformats.org/officeDocument/2006/relationships" xmlns:p="http://schemas.openxmlformats.org/presentationml/2006/main">
+  <p:cSld>
+    <p:spTree>
+      <p:nvGrpSpPr>
+        <p:cNvPr id="1" name=""/>
+        <p:cNvGrpSpPr/>
+        <p:nvPr/>
+      </p:nvGrpSpPr>
+      <p:grpSpPr>
+        <a:xfrm>
+          <a:off x="0" y="0"/>
+          <a:ext cx="0" cy="0"/>
+          <a:chOff x="0" y="0"/>
+          <a:chExt cx="0" cy="0"/>
+        </a:xfrm>
+      </p:grpSpPr>
+      <p:sp>
+        <p:nvSpPr>
+          <p:cNvPr id="2" name="Marcador de imagen de diapositiva 1"/>
+          <p:cNvSpPr>
+            <a:spLocks noGrp="1" noRot="1" noChangeAspect="1"/>
+          </p:cNvSpPr>
+          <p:nvPr>
+            <p:ph type="sldImg"/>
+          </p:nvPr>
+        </p:nvSpPr>
+        <p:spPr/>
+      </p:sp>
+      <p:sp>
+        <p:nvSpPr>
+          <p:cNvPr id="3" name="Marcador de notas 2"/>
+          <p:cNvSpPr>
+            <a:spLocks noGrp="1"/>
+          </p:cNvSpPr>
+          <p:nvPr>
+            <p:ph type="body" idx="1"/>
+          </p:nvPr>
+        </p:nvSpPr>
+        <p:spPr/>
+        <p:txBody>
+          <a:bodyPr/>
+          <a:lstStyle/>
+          <a:p>
+            <a:r>
+              <a:rPr lang="en-US" dirty="0"/>
+              <a:t>Although defectors have a relative fitness advantage, cooperators still affect the population at the global level. To include this effect, the global fitness is chosen linear with x.</a:t>
+            </a:r>
+          </a:p>
+          <a:p>
+            <a:endParaRPr lang="en-US" dirty="0"/>
+          </a:p>
+          <a:p>
+            <a:r>
+              <a:rPr lang="en-US" dirty="0"/>
+              <a:t>K represents the carrying capacity associated with resource limitation.</a:t>
+            </a:r>
+          </a:p>
+          <a:p>
+            <a:endParaRPr lang="en-US" dirty="0"/>
+          </a:p>
+          <a:p>
+            <a:r>
+              <a:rPr lang="en-US" dirty="0"/>
+              <a:t>A large value of x</a:t>
+            </a:r>
+          </a:p>
+        </p:txBody>
+      </p:sp>
+      <p:sp>
+        <p:nvSpPr>
+          <p:cNvPr id="4" name="Marcador de número de diapositiva 3"/>
+          <p:cNvSpPr>
+            <a:spLocks noGrp="1"/>
+          </p:cNvSpPr>
+          <p:nvPr>
+            <p:ph type="sldNum" sz="quarter" idx="5"/>
+          </p:nvPr>
+        </p:nvSpPr>
+        <p:spPr/>
+        <p:txBody>
+          <a:bodyPr/>
+          <a:lstStyle/>
+          <a:p>
+            <a:fld id="{2C18E92B-89E1-424D-92B5-BDD68C18C3D6}" type="slidenum">
+              <a:rPr lang="en-US" smtClean="0"/>
+              <a:t>8</a:t>
+            </a:fld>
+            <a:endParaRPr lang="en-US"/>
+          </a:p>
+        </p:txBody>
+      </p:sp>
+    </p:spTree>
+    <p:extLst>
+      <p:ext uri="{BB962C8B-B14F-4D97-AF65-F5344CB8AC3E}">
+        <p14:creationId xmlns:p14="http://schemas.microsoft.com/office/powerpoint/2010/main" val="400888846"/>
+      </p:ext>
+    </p:extLst>
+  </p:cSld>
+  <p:clrMapOvr>
+    <a:masterClrMapping/>
+  </p:clrMapOvr>
+</p:notes>
+</file>
+
+<file path=ppt/notesSlides/notesSlide6.xml><?xml version="1.0" encoding="utf-8"?>
+<p:notes xmlns:a="http://schemas.openxmlformats.org/drawingml/2006/main" xmlns:r="http://schemas.openxmlformats.org/officeDocument/2006/relationships" xmlns:p="http://schemas.openxmlformats.org/presentationml/2006/main">
+  <p:cSld>
+    <p:spTree>
+      <p:nvGrpSpPr>
+        <p:cNvPr id="1" name=""/>
+        <p:cNvGrpSpPr/>
+        <p:nvPr/>
+      </p:nvGrpSpPr>
+      <p:grpSpPr>
+        <a:xfrm>
+          <a:off x="0" y="0"/>
+          <a:ext cx="0" cy="0"/>
+          <a:chOff x="0" y="0"/>
+          <a:chExt cx="0" cy="0"/>
+        </a:xfrm>
+      </p:grpSpPr>
+      <p:sp>
+        <p:nvSpPr>
+          <p:cNvPr id="2" name="Marcador de imagen de diapositiva 1"/>
+          <p:cNvSpPr>
+            <a:spLocks noGrp="1" noRot="1" noChangeAspect="1"/>
+          </p:cNvSpPr>
+          <p:nvPr>
+            <p:ph type="sldImg"/>
+          </p:nvPr>
+        </p:nvSpPr>
+        <p:spPr/>
+      </p:sp>
+      <p:sp>
+        <p:nvSpPr>
+          <p:cNvPr id="3" name="Marcador de notas 2"/>
+          <p:cNvSpPr>
+            <a:spLocks noGrp="1"/>
+          </p:cNvSpPr>
+          <p:nvPr>
+            <p:ph type="body" idx="1"/>
+          </p:nvPr>
+        </p:nvSpPr>
+        <p:spPr/>
+        <p:txBody>
+          <a:bodyPr/>
+          <a:lstStyle/>
+          <a:p>
+            <a:endParaRPr lang="en-US" dirty="0"/>
+          </a:p>
+        </p:txBody>
+      </p:sp>
+      <p:sp>
+        <p:nvSpPr>
+          <p:cNvPr id="4" name="Marcador de número de diapositiva 3"/>
+          <p:cNvSpPr>
+            <a:spLocks noGrp="1"/>
+          </p:cNvSpPr>
+          <p:nvPr>
+            <p:ph type="sldNum" sz="quarter" idx="5"/>
+          </p:nvPr>
+        </p:nvSpPr>
+        <p:spPr/>
+        <p:txBody>
+          <a:bodyPr/>
+          <a:lstStyle/>
+          <a:p>
+            <a:fld id="{2C18E92B-89E1-424D-92B5-BDD68C18C3D6}" type="slidenum">
+              <a:rPr lang="en-US" smtClean="0"/>
+              <a:t>11</a:t>
             </a:fld>
             <a:endParaRPr lang="en-US"/>
           </a:p>
@@ -887,7 +1295,7 @@
           <a:p>
             <a:fld id="{E31BA835-12AC-4E8F-955A-EA3F4DE2791F}" type="datetime1">
               <a:rPr lang="en-US" smtClean="0"/>
-              <a:t>5/21/2026</a:t>
+              <a:t>5/22/2026</a:t>
             </a:fld>
             <a:endParaRPr lang="en-US"/>
           </a:p>
@@ -1096,7 +1504,7 @@
           <a:p>
             <a:fld id="{E31BA835-12AC-4E8F-955A-EA3F4DE2791F}" type="datetime1">
               <a:rPr lang="en-US" smtClean="0"/>
-              <a:t>5/21/2026</a:t>
+              <a:t>5/22/2026</a:t>
             </a:fld>
             <a:endParaRPr lang="en-US"/>
           </a:p>
@@ -1355,7 +1763,7 @@
           <a:p>
             <a:fld id="{E31BA835-12AC-4E8F-955A-EA3F4DE2791F}" type="datetime1">
               <a:rPr lang="en-US" smtClean="0"/>
-              <a:t>5/21/2026</a:t>
+              <a:t>5/22/2026</a:t>
             </a:fld>
             <a:endParaRPr lang="en-US"/>
           </a:p>
@@ -1526,7 +1934,7 @@
           <a:p>
             <a:fld id="{E31BA835-12AC-4E8F-955A-EA3F4DE2791F}" type="datetime1">
               <a:rPr lang="en-US" smtClean="0"/>
-              <a:t>5/21/2026</a:t>
+              <a:t>5/22/2026</a:t>
             </a:fld>
             <a:endParaRPr lang="en-US"/>
           </a:p>
@@ -1864,7 +2272,7 @@
           <a:p>
             <a:fld id="{E31BA835-12AC-4E8F-955A-EA3F4DE2791F}" type="datetime1">
               <a:rPr lang="en-US" smtClean="0"/>
-              <a:t>5/21/2026</a:t>
+              <a:t>5/22/2026</a:t>
             </a:fld>
             <a:endParaRPr lang="en-US"/>
           </a:p>
@@ -2140,7 +2548,7 @@
           <a:p>
             <a:fld id="{E31BA835-12AC-4E8F-955A-EA3F4DE2791F}" type="datetime1">
               <a:rPr lang="en-US" smtClean="0"/>
-              <a:t>5/21/2026</a:t>
+              <a:t>5/22/2026</a:t>
             </a:fld>
             <a:endParaRPr lang="en-US"/>
           </a:p>
@@ -2520,7 +2928,7 @@
           <a:p>
             <a:fld id="{E31BA835-12AC-4E8F-955A-EA3F4DE2791F}" type="datetime1">
               <a:rPr lang="en-US" smtClean="0"/>
-              <a:t>5/21/2026</a:t>
+              <a:t>5/22/2026</a:t>
             </a:fld>
             <a:endParaRPr lang="en-US"/>
           </a:p>
@@ -2639,7 +3047,7 @@
           <a:p>
             <a:fld id="{E31BA835-12AC-4E8F-955A-EA3F4DE2791F}" type="datetime1">
               <a:rPr lang="en-US" smtClean="0"/>
-              <a:t>5/21/2026</a:t>
+              <a:t>5/22/2026</a:t>
             </a:fld>
             <a:endParaRPr lang="en-US"/>
           </a:p>
@@ -2813,7 +3221,7 @@
           <a:p>
             <a:fld id="{E31BA835-12AC-4E8F-955A-EA3F4DE2791F}" type="datetime1">
               <a:rPr lang="en-US" smtClean="0"/>
-              <a:t>5/21/2026</a:t>
+              <a:t>5/22/2026</a:t>
             </a:fld>
             <a:endParaRPr lang="en-US"/>
           </a:p>
@@ -3170,7 +3578,7 @@
           <a:p>
             <a:fld id="{E31BA835-12AC-4E8F-955A-EA3F4DE2791F}" type="datetime1">
               <a:rPr lang="en-US" smtClean="0"/>
-              <a:t>5/21/2026</a:t>
+              <a:t>5/22/2026</a:t>
             </a:fld>
             <a:endParaRPr lang="en-US"/>
           </a:p>
@@ -3550,7 +3958,7 @@
           <a:p>
             <a:fld id="{E31BA835-12AC-4E8F-955A-EA3F4DE2791F}" type="datetime1">
               <a:rPr lang="en-US" smtClean="0"/>
-              <a:t>5/21/2026</a:t>
+              <a:t>5/22/2026</a:t>
             </a:fld>
             <a:endParaRPr lang="en-US"/>
           </a:p>
@@ -3854,7 +4262,7 @@
           <a:p>
             <a:fld id="{E31BA835-12AC-4E8F-955A-EA3F4DE2791F}" type="datetime1">
               <a:rPr lang="en-US" smtClean="0"/>
-              <a:t>5/21/2026</a:t>
+              <a:t>5/22/2026</a:t>
             </a:fld>
             <a:endParaRPr lang="en-US"/>
           </a:p>
@@ -4537,6 +4945,422 @@
         <p:cNvPr id="1" name="">
           <a:extLst>
             <a:ext uri="{FF2B5EF4-FFF2-40B4-BE49-F238E27FC236}">
+              <a16:creationId xmlns:a16="http://schemas.microsoft.com/office/drawing/2014/main" id="{6CE64321-4B15-3850-F29A-B33B86300433}"/>
+            </a:ext>
+          </a:extLst>
+        </p:cNvPr>
+        <p:cNvGrpSpPr/>
+        <p:nvPr/>
+      </p:nvGrpSpPr>
+      <p:grpSpPr>
+        <a:xfrm>
+          <a:off x="0" y="0"/>
+          <a:ext cx="0" cy="0"/>
+          <a:chOff x="0" y="0"/>
+          <a:chExt cx="0" cy="0"/>
+        </a:xfrm>
+      </p:grpSpPr>
+      <p:pic>
+        <p:nvPicPr>
+          <p:cNvPr id="4" name="Picture 3">
+            <a:extLst>
+              <a:ext uri="{FF2B5EF4-FFF2-40B4-BE49-F238E27FC236}">
+                <a16:creationId xmlns:a16="http://schemas.microsoft.com/office/drawing/2014/main" id="{ABC02677-5F41-BEC5-2431-97EAC4FD5191}"/>
+              </a:ext>
+            </a:extLst>
+          </p:cNvPr>
+          <p:cNvPicPr>
+            <a:picLocks noGrp="1" noRot="1" noMove="1" noResize="1" noEditPoints="1" noAdjustHandles="1" noChangeArrowheads="1" noChangeShapeType="1" noCrop="1"/>
+          </p:cNvPicPr>
+          <p:nvPr/>
+        </p:nvPicPr>
+        <p:blipFill>
+          <a:blip r:embed="rId2"/>
+          <a:srcRect t="20213"/>
+          <a:stretch>
+            <a:fillRect/>
+          </a:stretch>
+        </p:blipFill>
+        <p:spPr>
+          <a:xfrm>
+            <a:off x="0" y="0"/>
+            <a:ext cx="12192000" cy="6857989"/>
+          </a:xfrm>
+          <a:prstGeom prst="rect">
+            <a:avLst/>
+          </a:prstGeom>
+        </p:spPr>
+      </p:pic>
+      <p:sp>
+        <p:nvSpPr>
+          <p:cNvPr id="5" name="Rectángulo 4">
+            <a:extLst>
+              <a:ext uri="{FF2B5EF4-FFF2-40B4-BE49-F238E27FC236}">
+                <a16:creationId xmlns:a16="http://schemas.microsoft.com/office/drawing/2014/main" id="{25142038-557E-9F0A-744B-82C18EE5F79F}"/>
+              </a:ext>
+            </a:extLst>
+          </p:cNvPr>
+          <p:cNvSpPr>
+            <a:spLocks noGrp="1" noRot="1" noMove="1" noResize="1" noEditPoints="1" noAdjustHandles="1" noChangeArrowheads="1" noChangeShapeType="1"/>
+          </p:cNvSpPr>
+          <p:nvPr/>
+        </p:nvSpPr>
+        <p:spPr>
+          <a:xfrm>
+            <a:off x="957072" y="697264"/>
+            <a:ext cx="10198608" cy="987552"/>
+          </a:xfrm>
+          <a:prstGeom prst="rect">
+            <a:avLst/>
+          </a:prstGeom>
+        </p:spPr>
+        <p:style>
+          <a:lnRef idx="2">
+            <a:schemeClr val="dk1"/>
+          </a:lnRef>
+          <a:fillRef idx="1">
+            <a:schemeClr val="lt1"/>
+          </a:fillRef>
+          <a:effectRef idx="0">
+            <a:schemeClr val="dk1"/>
+          </a:effectRef>
+          <a:fontRef idx="minor">
+            <a:schemeClr val="dk1"/>
+          </a:fontRef>
+        </p:style>
+        <p:txBody>
+          <a:bodyPr rtlCol="0" anchor="ctr"/>
+          <a:lstStyle/>
+          <a:p>
+            <a:pPr algn="ctr"/>
+            <a:endParaRPr lang="en-US"/>
+          </a:p>
+        </p:txBody>
+      </p:sp>
+      <p:sp>
+        <p:nvSpPr>
+          <p:cNvPr id="2" name="Título 1">
+            <a:extLst>
+              <a:ext uri="{FF2B5EF4-FFF2-40B4-BE49-F238E27FC236}">
+                <a16:creationId xmlns:a16="http://schemas.microsoft.com/office/drawing/2014/main" id="{AF4D7738-840D-8FD6-0E6D-09414AEEFA84}"/>
+              </a:ext>
+            </a:extLst>
+          </p:cNvPr>
+          <p:cNvSpPr>
+            <a:spLocks noGrp="1"/>
+          </p:cNvSpPr>
+          <p:nvPr>
+            <p:ph type="title"/>
+          </p:nvPr>
+        </p:nvSpPr>
+        <p:spPr>
+          <a:xfrm>
+            <a:off x="957071" y="765110"/>
+            <a:ext cx="10198608" cy="790872"/>
+          </a:xfrm>
+        </p:spPr>
+        <p:txBody>
+          <a:bodyPr>
+            <a:normAutofit/>
+          </a:bodyPr>
+          <a:lstStyle/>
+          <a:p>
+            <a:pPr algn="ctr"/>
+            <a:r>
+              <a:rPr lang="en-US" dirty="0">
+                <a:solidFill>
+                  <a:schemeClr val="tx1"/>
+                </a:solidFill>
+              </a:rPr>
+              <a:t>Average population dynamics</a:t>
+            </a:r>
+          </a:p>
+        </p:txBody>
+      </p:sp>
+      <p:sp>
+        <p:nvSpPr>
+          <p:cNvPr id="6" name="Rectángulo 5">
+            <a:extLst>
+              <a:ext uri="{FF2B5EF4-FFF2-40B4-BE49-F238E27FC236}">
+                <a16:creationId xmlns:a16="http://schemas.microsoft.com/office/drawing/2014/main" id="{6370BFE7-2814-06E2-C8D0-57F631E5C05B}"/>
+              </a:ext>
+            </a:extLst>
+          </p:cNvPr>
+          <p:cNvSpPr>
+            <a:spLocks noGrp="1" noRot="1" noMove="1" noResize="1" noEditPoints="1" noAdjustHandles="1" noChangeArrowheads="1" noChangeShapeType="1"/>
+          </p:cNvSpPr>
+          <p:nvPr/>
+        </p:nvSpPr>
+        <p:spPr>
+          <a:xfrm>
+            <a:off x="6736076" y="4558168"/>
+            <a:ext cx="4737231" cy="1717241"/>
+          </a:xfrm>
+          <a:prstGeom prst="rect">
+            <a:avLst/>
+          </a:prstGeom>
+          <a:solidFill>
+            <a:schemeClr val="bg1">
+              <a:lumMod val="95000"/>
+            </a:schemeClr>
+          </a:solidFill>
+          <a:ln>
+            <a:solidFill>
+              <a:schemeClr val="tx2"/>
+            </a:solidFill>
+          </a:ln>
+        </p:spPr>
+        <p:style>
+          <a:lnRef idx="2">
+            <a:schemeClr val="accent1">
+              <a:shade val="15000"/>
+            </a:schemeClr>
+          </a:lnRef>
+          <a:fillRef idx="1">
+            <a:schemeClr val="accent1"/>
+          </a:fillRef>
+          <a:effectRef idx="0">
+            <a:schemeClr val="accent1"/>
+          </a:effectRef>
+          <a:fontRef idx="minor">
+            <a:schemeClr val="lt1"/>
+          </a:fontRef>
+        </p:style>
+        <p:txBody>
+          <a:bodyPr rtlCol="0" anchor="ctr"/>
+          <a:lstStyle/>
+          <a:p>
+            <a:pPr algn="just">
+              <a:lnSpc>
+                <a:spcPct val="150000"/>
+              </a:lnSpc>
+            </a:pPr>
+            <a:endParaRPr lang="en-US" dirty="0">
+              <a:solidFill>
+                <a:schemeClr val="tx1"/>
+              </a:solidFill>
+            </a:endParaRPr>
+          </a:p>
+        </p:txBody>
+      </p:sp>
+      <p:pic>
+        <p:nvPicPr>
+          <p:cNvPr id="7" name="Marcador de contenido 6">
+            <a:extLst>
+              <a:ext uri="{FF2B5EF4-FFF2-40B4-BE49-F238E27FC236}">
+                <a16:creationId xmlns:a16="http://schemas.microsoft.com/office/drawing/2014/main" id="{FD938F26-FEF3-F41E-9D33-FFF7115520E1}"/>
+              </a:ext>
+            </a:extLst>
+          </p:cNvPr>
+          <p:cNvPicPr>
+            <a:picLocks noGrp="1" noChangeAspect="1"/>
+          </p:cNvPicPr>
+          <p:nvPr>
+            <p:ph idx="1"/>
+          </p:nvPr>
+        </p:nvPicPr>
+        <p:blipFill>
+          <a:blip r:embed="rId3">
+            <a:extLst>
+              <a:ext uri="{28A0092B-C50C-407E-A947-70E740481C1C}">
+                <a14:useLocalDpi xmlns:a14="http://schemas.microsoft.com/office/drawing/2010/main" val="0"/>
+              </a:ext>
+            </a:extLst>
+          </a:blip>
+          <a:srcRect t="9260"/>
+          <a:stretch>
+            <a:fillRect/>
+          </a:stretch>
+        </p:blipFill>
+        <p:spPr>
+          <a:xfrm>
+            <a:off x="495300" y="1913538"/>
+            <a:ext cx="6035933" cy="4361871"/>
+          </a:xfrm>
+          <a:prstGeom prst="rect">
+            <a:avLst/>
+          </a:prstGeom>
+        </p:spPr>
+      </p:pic>
+      <p:pic>
+        <p:nvPicPr>
+          <p:cNvPr id="10" name="Imagen 9">
+            <a:extLst>
+              <a:ext uri="{FF2B5EF4-FFF2-40B4-BE49-F238E27FC236}">
+                <a16:creationId xmlns:a16="http://schemas.microsoft.com/office/drawing/2014/main" id="{5B738891-961D-4174-DE36-F88025799E44}"/>
+              </a:ext>
+            </a:extLst>
+          </p:cNvPr>
+          <p:cNvPicPr>
+            <a:picLocks noChangeAspect="1"/>
+          </p:cNvPicPr>
+          <p:nvPr/>
+        </p:nvPicPr>
+        <p:blipFill>
+          <a:blip r:embed="rId4">
+            <a:extLst>
+              <a:ext uri="{28A0092B-C50C-407E-A947-70E740481C1C}">
+                <a14:useLocalDpi xmlns:a14="http://schemas.microsoft.com/office/drawing/2010/main" val="0"/>
+              </a:ext>
+            </a:extLst>
+          </a:blip>
+          <a:srcRect t="8678" r="1495"/>
+          <a:stretch>
+            <a:fillRect/>
+          </a:stretch>
+        </p:blipFill>
+        <p:spPr>
+          <a:xfrm>
+            <a:off x="6736076" y="1909559"/>
+            <a:ext cx="4737231" cy="2509591"/>
+          </a:xfrm>
+          <a:prstGeom prst="rect">
+            <a:avLst/>
+          </a:prstGeom>
+        </p:spPr>
+      </p:pic>
+      <p:sp>
+        <p:nvSpPr>
+          <p:cNvPr id="3" name="CuadroTexto 2">
+            <a:extLst>
+              <a:ext uri="{FF2B5EF4-FFF2-40B4-BE49-F238E27FC236}">
+                <a16:creationId xmlns:a16="http://schemas.microsoft.com/office/drawing/2014/main" id="{B768B8C1-04AC-22CD-246C-8CBAC3A0C2AE}"/>
+              </a:ext>
+            </a:extLst>
+          </p:cNvPr>
+          <p:cNvSpPr txBox="1"/>
+          <p:nvPr/>
+        </p:nvSpPr>
+        <p:spPr>
+          <a:xfrm>
+            <a:off x="6747174" y="4469718"/>
+            <a:ext cx="4726133" cy="1711366"/>
+          </a:xfrm>
+          <a:prstGeom prst="rect">
+            <a:avLst/>
+          </a:prstGeom>
+          <a:noFill/>
+        </p:spPr>
+        <p:txBody>
+          <a:bodyPr wrap="square">
+            <a:spAutoFit/>
+          </a:bodyPr>
+          <a:lstStyle/>
+          <a:p>
+            <a:pPr algn="just">
+              <a:lnSpc>
+                <a:spcPct val="150000"/>
+              </a:lnSpc>
+            </a:pPr>
+            <a:r>
+              <a:rPr lang="en-US" dirty="0"/>
+              <a:t>Overshoot is captured both stochastically and deterministically, indicating that this effect mainly follows from the coupling between population growth and internal composition.</a:t>
+            </a:r>
+          </a:p>
+        </p:txBody>
+      </p:sp>
+    </p:spTree>
+    <p:extLst>
+      <p:ext uri="{BB962C8B-B14F-4D97-AF65-F5344CB8AC3E}">
+        <p14:creationId xmlns:p14="http://schemas.microsoft.com/office/powerpoint/2010/main" val="3212293159"/>
+      </p:ext>
+    </p:extLst>
+  </p:cSld>
+  <p:clrMapOvr>
+    <a:masterClrMapping/>
+  </p:clrMapOvr>
+  <p:timing>
+    <p:tnLst>
+      <p:par>
+        <p:cTn id="1" dur="indefinite" restart="never" nodeType="tmRoot">
+          <p:childTnLst>
+            <p:seq concurrent="1" nextAc="seek">
+              <p:cTn id="2" dur="indefinite" nodeType="mainSeq">
+                <p:childTnLst>
+                  <p:par>
+                    <p:cTn id="3" fill="hold">
+                      <p:stCondLst>
+                        <p:cond delay="indefinite"/>
+                        <p:cond evt="onBegin" delay="0">
+                          <p:tn val="2"/>
+                        </p:cond>
+                      </p:stCondLst>
+                      <p:childTnLst>
+                        <p:par>
+                          <p:cTn id="4" fill="hold">
+                            <p:stCondLst>
+                              <p:cond delay="0"/>
+                            </p:stCondLst>
+                            <p:childTnLst>
+                              <p:par>
+                                <p:cTn id="5" presetID="1" presetClass="entr" presetSubtype="0" fill="hold" grpId="0" nodeType="withEffect">
+                                  <p:stCondLst>
+                                    <p:cond delay="0"/>
+                                  </p:stCondLst>
+                                  <p:childTnLst>
+                                    <p:set>
+                                      <p:cBhvr>
+                                        <p:cTn id="6" dur="1" fill="hold">
+                                          <p:stCondLst>
+                                            <p:cond delay="0"/>
+                                          </p:stCondLst>
+                                        </p:cTn>
+                                        <p:tgtEl>
+                                          <p:spTgt spid="3"/>
+                                        </p:tgtEl>
+                                        <p:attrNameLst>
+                                          <p:attrName>style.visibility</p:attrName>
+                                        </p:attrNameLst>
+                                      </p:cBhvr>
+                                      <p:to>
+                                        <p:strVal val="visible"/>
+                                      </p:to>
+                                    </p:set>
+                                  </p:childTnLst>
+                                </p:cTn>
+                              </p:par>
+                            </p:childTnLst>
+                          </p:cTn>
+                        </p:par>
+                      </p:childTnLst>
+                    </p:cTn>
+                  </p:par>
+                </p:childTnLst>
+              </p:cTn>
+              <p:prevCondLst>
+                <p:cond evt="onPrev" delay="0">
+                  <p:tgtEl>
+                    <p:sldTgt/>
+                  </p:tgtEl>
+                </p:cond>
+              </p:prevCondLst>
+              <p:nextCondLst>
+                <p:cond evt="onNext" delay="0">
+                  <p:tgtEl>
+                    <p:sldTgt/>
+                  </p:tgtEl>
+                </p:cond>
+              </p:nextCondLst>
+            </p:seq>
+          </p:childTnLst>
+        </p:cTn>
+      </p:par>
+    </p:tnLst>
+    <p:bldLst>
+      <p:bldP spid="3" grpId="0"/>
+    </p:bldLst>
+  </p:timing>
+</p:sld>
+</file>
+
+<file path=ppt/slides/slide11.xml><?xml version="1.0" encoding="utf-8"?>
+<p:sld xmlns:a="http://schemas.openxmlformats.org/drawingml/2006/main" xmlns:r="http://schemas.openxmlformats.org/officeDocument/2006/relationships" xmlns:p="http://schemas.openxmlformats.org/presentationml/2006/main">
+  <p:cSld>
+    <p:spTree>
+      <p:nvGrpSpPr>
+        <p:cNvPr id="1" name="">
+          <a:extLst>
+            <a:ext uri="{FF2B5EF4-FFF2-40B4-BE49-F238E27FC236}">
               <a16:creationId xmlns:a16="http://schemas.microsoft.com/office/drawing/2014/main" id="{F8322314-F5AC-F900-700C-362CBDA18946}"/>
             </a:ext>
           </a:extLst>
@@ -4679,7 +5503,7 @@
             </a:extLst>
           </p:cNvPr>
           <p:cNvSpPr>
-            <a:spLocks/>
+            <a:spLocks noGrp="1" noRot="1" noMove="1" noResize="1" noEditPoints="1" noAdjustHandles="1" noChangeArrowheads="1" noChangeShapeType="1"/>
           </p:cNvSpPr>
           <p:nvPr/>
         </p:nvSpPr>
@@ -4766,6 +5590,947 @@
           </a:prstGeom>
         </p:spPr>
       </p:pic>
+      <p:pic>
+        <p:nvPicPr>
+          <p:cNvPr id="3" name="Imagen 2">
+            <a:extLst>
+              <a:ext uri="{FF2B5EF4-FFF2-40B4-BE49-F238E27FC236}">
+                <a16:creationId xmlns:a16="http://schemas.microsoft.com/office/drawing/2014/main" id="{331CF9D1-874A-43E4-C355-5579F5BF63BC}"/>
+              </a:ext>
+            </a:extLst>
+          </p:cNvPr>
+          <p:cNvPicPr>
+            <a:picLocks noChangeAspect="1"/>
+          </p:cNvPicPr>
+          <p:nvPr/>
+        </p:nvPicPr>
+        <p:blipFill>
+          <a:blip r:embed="rId5"/>
+          <a:srcRect l="5345" t="211" r="4135" b="67250"/>
+          <a:stretch>
+            <a:fillRect/>
+          </a:stretch>
+        </p:blipFill>
+        <p:spPr>
+          <a:xfrm>
+            <a:off x="9685867" y="2559637"/>
+            <a:ext cx="1787440" cy="263033"/>
+          </a:xfrm>
+          <a:prstGeom prst="rect">
+            <a:avLst/>
+          </a:prstGeom>
+        </p:spPr>
+      </p:pic>
+      <mc:AlternateContent xmlns:mc="http://schemas.openxmlformats.org/markup-compatibility/2006">
+        <mc:Choice xmlns:a14="http://schemas.microsoft.com/office/drawing/2010/main" Requires="a14">
+          <p:sp>
+            <p:nvSpPr>
+              <p:cNvPr id="8" name="CuadroTexto 7">
+                <a:extLst>
+                  <a:ext uri="{FF2B5EF4-FFF2-40B4-BE49-F238E27FC236}">
+                    <a16:creationId xmlns:a16="http://schemas.microsoft.com/office/drawing/2014/main" id="{CDEBAA40-ECAA-528D-8375-39C33353AEAE}"/>
+                  </a:ext>
+                </a:extLst>
+              </p:cNvPr>
+              <p:cNvSpPr txBox="1"/>
+              <p:nvPr/>
+            </p:nvSpPr>
+            <p:spPr>
+              <a:xfrm>
+                <a:off x="7193087" y="3394061"/>
+                <a:ext cx="4300983" cy="2126864"/>
+              </a:xfrm>
+              <a:prstGeom prst="rect">
+                <a:avLst/>
+              </a:prstGeom>
+              <a:noFill/>
+            </p:spPr>
+            <p:txBody>
+              <a:bodyPr wrap="square">
+                <a:spAutoFit/>
+              </a:bodyPr>
+              <a:lstStyle/>
+              <a:p>
+                <a:pPr algn="just">
+                  <a:lnSpc>
+                    <a:spcPct val="150000"/>
+                  </a:lnSpc>
+                </a:pPr>
+                <a:r>
+                  <a:rPr lang="en-US" dirty="0"/>
+                  <a:t>Transient increase in </a:t>
+                </a:r>
+                <a14:m>
+                  <m:oMath xmlns:m="http://schemas.openxmlformats.org/officeDocument/2006/math">
+                    <m:r>
+                      <a:rPr lang="es-ES" b="0" i="1" smtClean="0">
+                        <a:latin typeface="Cambria Math" panose="02040503050406030204" pitchFamily="18" charset="0"/>
+                      </a:rPr>
+                      <m:t>𝑥</m:t>
+                    </m:r>
+                  </m:oMath>
+                </a14:m>
+                <a:r>
+                  <a:rPr lang="en-US" dirty="0"/>
+                  <a:t>, especially for small </a:t>
+                </a:r>
+                <a14:m>
+                  <m:oMath xmlns:m="http://schemas.openxmlformats.org/officeDocument/2006/math">
+                    <m:sSub>
+                      <m:sSubPr>
+                        <m:ctrlPr>
+                          <a:rPr lang="es-ES" b="0" i="1" smtClean="0">
+                            <a:latin typeface="Cambria Math" panose="02040503050406030204" pitchFamily="18" charset="0"/>
+                          </a:rPr>
+                        </m:ctrlPr>
+                      </m:sSubPr>
+                      <m:e>
+                        <m:r>
+                          <a:rPr lang="es-ES" b="0" i="1" smtClean="0">
+                            <a:latin typeface="Cambria Math" panose="02040503050406030204" pitchFamily="18" charset="0"/>
+                          </a:rPr>
+                          <m:t>𝑁</m:t>
+                        </m:r>
+                      </m:e>
+                      <m:sub>
+                        <m:r>
+                          <a:rPr lang="es-ES" b="0" i="1" smtClean="0">
+                            <a:latin typeface="Cambria Math" panose="02040503050406030204" pitchFamily="18" charset="0"/>
+                          </a:rPr>
+                          <m:t>0</m:t>
+                        </m:r>
+                      </m:sub>
+                    </m:sSub>
+                  </m:oMath>
+                </a14:m>
+                <a:r>
+                  <a:rPr lang="en-US" dirty="0"/>
+                  <a:t>. Some realizations contain, by chance, a larger fraction of cooperators, and these populations grow faster because cooperation enhances global growth.</a:t>
+                </a:r>
+              </a:p>
+            </p:txBody>
+          </p:sp>
+        </mc:Choice>
+        <mc:Fallback>
+          <p:sp>
+            <p:nvSpPr>
+              <p:cNvPr id="8" name="CuadroTexto 7">
+                <a:extLst>
+                  <a:ext uri="{FF2B5EF4-FFF2-40B4-BE49-F238E27FC236}">
+                    <a16:creationId xmlns:a16="http://schemas.microsoft.com/office/drawing/2014/main" id="{CDEBAA40-ECAA-528D-8375-39C33353AEAE}"/>
+                  </a:ext>
+                </a:extLst>
+              </p:cNvPr>
+              <p:cNvSpPr txBox="1">
+                <a:spLocks noRot="1" noChangeAspect="1" noMove="1" noResize="1" noEditPoints="1" noAdjustHandles="1" noChangeArrowheads="1" noChangeShapeType="1" noTextEdit="1"/>
+              </p:cNvSpPr>
+              <p:nvPr/>
+            </p:nvSpPr>
+            <p:spPr>
+              <a:xfrm>
+                <a:off x="7193087" y="3394061"/>
+                <a:ext cx="4300983" cy="2126864"/>
+              </a:xfrm>
+              <a:prstGeom prst="rect">
+                <a:avLst/>
+              </a:prstGeom>
+              <a:blipFill>
+                <a:blip r:embed="rId6"/>
+                <a:stretch>
+                  <a:fillRect l="-1275" r="-1133" b="-3725"/>
+                </a:stretch>
+              </a:blipFill>
+            </p:spPr>
+            <p:txBody>
+              <a:bodyPr/>
+              <a:lstStyle/>
+              <a:p>
+                <a:r>
+                  <a:rPr lang="en-US">
+                    <a:noFill/>
+                  </a:rPr>
+                  <a:t> </a:t>
+                </a:r>
+              </a:p>
+            </p:txBody>
+          </p:sp>
+        </mc:Fallback>
+      </mc:AlternateContent>
+      <mc:AlternateContent xmlns:mc="http://schemas.openxmlformats.org/markup-compatibility/2006">
+        <mc:Choice xmlns:a14="http://schemas.microsoft.com/office/drawing/2010/main" Requires="a14">
+          <p:sp>
+            <p:nvSpPr>
+              <p:cNvPr id="9" name="CuadroTexto 8">
+                <a:extLst>
+                  <a:ext uri="{FF2B5EF4-FFF2-40B4-BE49-F238E27FC236}">
+                    <a16:creationId xmlns:a16="http://schemas.microsoft.com/office/drawing/2014/main" id="{B283F3AC-4052-42A9-73F8-C1FAA4828496}"/>
+                  </a:ext>
+                </a:extLst>
+              </p:cNvPr>
+              <p:cNvSpPr txBox="1"/>
+              <p:nvPr/>
+            </p:nvSpPr>
+            <p:spPr>
+              <a:xfrm>
+                <a:off x="7276661" y="5599581"/>
+                <a:ext cx="4300983" cy="464871"/>
+              </a:xfrm>
+              <a:prstGeom prst="rect">
+                <a:avLst/>
+              </a:prstGeom>
+              <a:noFill/>
+            </p:spPr>
+            <p:txBody>
+              <a:bodyPr wrap="square">
+                <a:spAutoFit/>
+              </a:bodyPr>
+              <a:lstStyle/>
+              <a:p>
+                <a:pPr algn="ctr">
+                  <a:lnSpc>
+                    <a:spcPct val="150000"/>
+                  </a:lnSpc>
+                </a:pPr>
+                <a:r>
+                  <a:rPr lang="en-US" dirty="0"/>
+                  <a:t>Cooperation time </a:t>
+                </a:r>
+                <a14:m>
+                  <m:oMath xmlns:m="http://schemas.openxmlformats.org/officeDocument/2006/math">
+                    <m:sSub>
+                      <m:sSubPr>
+                        <m:ctrlPr>
+                          <a:rPr lang="es-ES" b="0" i="1" smtClean="0">
+                            <a:latin typeface="Cambria Math" panose="02040503050406030204" pitchFamily="18" charset="0"/>
+                          </a:rPr>
+                        </m:ctrlPr>
+                      </m:sSubPr>
+                      <m:e>
+                        <m:r>
+                          <a:rPr lang="es-ES" b="0" i="1" smtClean="0">
+                            <a:latin typeface="Cambria Math" panose="02040503050406030204" pitchFamily="18" charset="0"/>
+                          </a:rPr>
+                          <m:t>𝑡</m:t>
+                        </m:r>
+                      </m:e>
+                      <m:sub>
+                        <m:r>
+                          <a:rPr lang="es-ES" b="0" i="1" smtClean="0">
+                            <a:latin typeface="Cambria Math" panose="02040503050406030204" pitchFamily="18" charset="0"/>
+                          </a:rPr>
+                          <m:t>𝑐</m:t>
+                        </m:r>
+                      </m:sub>
+                    </m:sSub>
+                    <m:r>
+                      <a:rPr lang="es-ES" b="0" i="1" smtClean="0">
+                        <a:latin typeface="Cambria Math" panose="02040503050406030204" pitchFamily="18" charset="0"/>
+                      </a:rPr>
+                      <m:t>:</m:t>
+                    </m:r>
+                    <m:r>
+                      <a:rPr lang="es-ES" b="0" i="1" smtClean="0">
+                        <a:latin typeface="Cambria Math" panose="02040503050406030204" pitchFamily="18" charset="0"/>
+                      </a:rPr>
+                      <m:t>𝑥</m:t>
+                    </m:r>
+                    <m:r>
+                      <a:rPr lang="es-ES" b="0" i="1" smtClean="0">
+                        <a:latin typeface="Cambria Math" panose="02040503050406030204" pitchFamily="18" charset="0"/>
+                      </a:rPr>
+                      <m:t>&gt;</m:t>
+                    </m:r>
+                    <m:sSub>
+                      <m:sSubPr>
+                        <m:ctrlPr>
+                          <a:rPr lang="es-ES" b="0" i="1" smtClean="0">
+                            <a:latin typeface="Cambria Math" panose="02040503050406030204" pitchFamily="18" charset="0"/>
+                          </a:rPr>
+                        </m:ctrlPr>
+                      </m:sSubPr>
+                      <m:e>
+                        <m:r>
+                          <a:rPr lang="es-ES" b="0" i="1" smtClean="0">
+                            <a:latin typeface="Cambria Math" panose="02040503050406030204" pitchFamily="18" charset="0"/>
+                          </a:rPr>
+                          <m:t>𝑥</m:t>
+                        </m:r>
+                      </m:e>
+                      <m:sub>
+                        <m:r>
+                          <a:rPr lang="es-ES" b="0" i="1" smtClean="0">
+                            <a:latin typeface="Cambria Math" panose="02040503050406030204" pitchFamily="18" charset="0"/>
+                          </a:rPr>
+                          <m:t>0</m:t>
+                        </m:r>
+                      </m:sub>
+                    </m:sSub>
+                  </m:oMath>
+                </a14:m>
+                <a:endParaRPr lang="en-US" dirty="0"/>
+              </a:p>
+            </p:txBody>
+          </p:sp>
+        </mc:Choice>
+        <mc:Fallback>
+          <p:sp>
+            <p:nvSpPr>
+              <p:cNvPr id="9" name="CuadroTexto 8">
+                <a:extLst>
+                  <a:ext uri="{FF2B5EF4-FFF2-40B4-BE49-F238E27FC236}">
+                    <a16:creationId xmlns:a16="http://schemas.microsoft.com/office/drawing/2014/main" id="{B283F3AC-4052-42A9-73F8-C1FAA4828496}"/>
+                  </a:ext>
+                </a:extLst>
+              </p:cNvPr>
+              <p:cNvSpPr txBox="1">
+                <a:spLocks noRot="1" noChangeAspect="1" noMove="1" noResize="1" noEditPoints="1" noAdjustHandles="1" noChangeArrowheads="1" noChangeShapeType="1" noTextEdit="1"/>
+              </p:cNvSpPr>
+              <p:nvPr/>
+            </p:nvSpPr>
+            <p:spPr>
+              <a:xfrm>
+                <a:off x="7276661" y="5599581"/>
+                <a:ext cx="4300983" cy="464871"/>
+              </a:xfrm>
+              <a:prstGeom prst="rect">
+                <a:avLst/>
+              </a:prstGeom>
+              <a:blipFill>
+                <a:blip r:embed="rId7"/>
+                <a:stretch>
+                  <a:fillRect b="-21053"/>
+                </a:stretch>
+              </a:blipFill>
+            </p:spPr>
+            <p:txBody>
+              <a:bodyPr/>
+              <a:lstStyle/>
+              <a:p>
+                <a:r>
+                  <a:rPr lang="en-US">
+                    <a:noFill/>
+                  </a:rPr>
+                  <a:t> </a:t>
+                </a:r>
+              </a:p>
+            </p:txBody>
+          </p:sp>
+        </mc:Fallback>
+      </mc:AlternateContent>
+      <p:sp>
+        <p:nvSpPr>
+          <p:cNvPr id="10" name="Marcador de contenido 7">
+            <a:extLst>
+              <a:ext uri="{FF2B5EF4-FFF2-40B4-BE49-F238E27FC236}">
+                <a16:creationId xmlns:a16="http://schemas.microsoft.com/office/drawing/2014/main" id="{3CAD34A1-0ACB-8B9C-E7EF-BB93C550ECC9}"/>
+              </a:ext>
+            </a:extLst>
+          </p:cNvPr>
+          <p:cNvSpPr txBox="1">
+            <a:spLocks/>
+          </p:cNvSpPr>
+          <p:nvPr/>
+        </p:nvSpPr>
+        <p:spPr>
+          <a:xfrm>
+            <a:off x="7158482" y="2024443"/>
+            <a:ext cx="4314825" cy="425964"/>
+          </a:xfrm>
+          <a:prstGeom prst="rect">
+            <a:avLst/>
+          </a:prstGeom>
+        </p:spPr>
+        <p:txBody>
+          <a:bodyPr vert="horz" lIns="0" tIns="45720" rIns="0" bIns="45720" rtlCol="0">
+            <a:normAutofit/>
+          </a:bodyPr>
+          <a:lstStyle>
+            <a:lvl1pPr marL="91440" indent="-91440" algn="l" defTabSz="914400" rtl="0" eaLnBrk="1" latinLnBrk="0" hangingPunct="1">
+              <a:lnSpc>
+                <a:spcPct val="90000"/>
+              </a:lnSpc>
+              <a:spcBef>
+                <a:spcPts val="1200"/>
+              </a:spcBef>
+              <a:spcAft>
+                <a:spcPts val="200"/>
+              </a:spcAft>
+              <a:buClr>
+                <a:schemeClr val="accent1"/>
+              </a:buClr>
+              <a:buSzPct val="100000"/>
+              <a:buFont typeface="Calibri" panose="020F0502020204030204" pitchFamily="34" charset="0"/>
+              <a:buChar char=" "/>
+              <a:defRPr sz="2000" kern="1200">
+                <a:solidFill>
+                  <a:schemeClr val="tx1">
+                    <a:lumMod val="75000"/>
+                    <a:lumOff val="25000"/>
+                  </a:schemeClr>
+                </a:solidFill>
+                <a:latin typeface="+mn-lt"/>
+                <a:ea typeface="+mn-ea"/>
+                <a:cs typeface="+mn-cs"/>
+              </a:defRPr>
+            </a:lvl1pPr>
+            <a:lvl2pPr marL="384048" indent="-182880" algn="l" defTabSz="914400" rtl="0" eaLnBrk="1" latinLnBrk="0" hangingPunct="1">
+              <a:lnSpc>
+                <a:spcPct val="90000"/>
+              </a:lnSpc>
+              <a:spcBef>
+                <a:spcPts val="200"/>
+              </a:spcBef>
+              <a:spcAft>
+                <a:spcPts val="400"/>
+              </a:spcAft>
+              <a:buClr>
+                <a:schemeClr val="accent1"/>
+              </a:buClr>
+              <a:buFont typeface="Calibri" pitchFamily="34" charset="0"/>
+              <a:buChar char="◦"/>
+              <a:defRPr sz="1800" kern="1200">
+                <a:solidFill>
+                  <a:schemeClr val="tx1">
+                    <a:lumMod val="75000"/>
+                    <a:lumOff val="25000"/>
+                  </a:schemeClr>
+                </a:solidFill>
+                <a:latin typeface="+mn-lt"/>
+                <a:ea typeface="+mn-ea"/>
+                <a:cs typeface="+mn-cs"/>
+              </a:defRPr>
+            </a:lvl2pPr>
+            <a:lvl3pPr marL="566928" indent="-182880" algn="l" defTabSz="914400" rtl="0" eaLnBrk="1" latinLnBrk="0" hangingPunct="1">
+              <a:lnSpc>
+                <a:spcPct val="90000"/>
+              </a:lnSpc>
+              <a:spcBef>
+                <a:spcPts val="200"/>
+              </a:spcBef>
+              <a:spcAft>
+                <a:spcPts val="400"/>
+              </a:spcAft>
+              <a:buClr>
+                <a:schemeClr val="accent1"/>
+              </a:buClr>
+              <a:buFont typeface="Calibri" pitchFamily="34" charset="0"/>
+              <a:buChar char="◦"/>
+              <a:defRPr sz="1400" kern="1200">
+                <a:solidFill>
+                  <a:schemeClr val="tx1">
+                    <a:lumMod val="75000"/>
+                    <a:lumOff val="25000"/>
+                  </a:schemeClr>
+                </a:solidFill>
+                <a:latin typeface="+mn-lt"/>
+                <a:ea typeface="+mn-ea"/>
+                <a:cs typeface="+mn-cs"/>
+              </a:defRPr>
+            </a:lvl3pPr>
+            <a:lvl4pPr marL="749808" indent="-182880" algn="l" defTabSz="914400" rtl="0" eaLnBrk="1" latinLnBrk="0" hangingPunct="1">
+              <a:lnSpc>
+                <a:spcPct val="90000"/>
+              </a:lnSpc>
+              <a:spcBef>
+                <a:spcPts val="200"/>
+              </a:spcBef>
+              <a:spcAft>
+                <a:spcPts val="400"/>
+              </a:spcAft>
+              <a:buClr>
+                <a:schemeClr val="accent1"/>
+              </a:buClr>
+              <a:buFont typeface="Calibri" pitchFamily="34" charset="0"/>
+              <a:buChar char="◦"/>
+              <a:defRPr sz="1400" kern="1200">
+                <a:solidFill>
+                  <a:schemeClr val="tx1">
+                    <a:lumMod val="75000"/>
+                    <a:lumOff val="25000"/>
+                  </a:schemeClr>
+                </a:solidFill>
+                <a:latin typeface="+mn-lt"/>
+                <a:ea typeface="+mn-ea"/>
+                <a:cs typeface="+mn-cs"/>
+              </a:defRPr>
+            </a:lvl4pPr>
+            <a:lvl5pPr marL="932688" indent="-182880" algn="l" defTabSz="914400" rtl="0" eaLnBrk="1" latinLnBrk="0" hangingPunct="1">
+              <a:lnSpc>
+                <a:spcPct val="90000"/>
+              </a:lnSpc>
+              <a:spcBef>
+                <a:spcPts val="200"/>
+              </a:spcBef>
+              <a:spcAft>
+                <a:spcPts val="400"/>
+              </a:spcAft>
+              <a:buClr>
+                <a:schemeClr val="accent1"/>
+              </a:buClr>
+              <a:buFont typeface="Calibri" pitchFamily="34" charset="0"/>
+              <a:buChar char="◦"/>
+              <a:defRPr sz="1400" kern="1200">
+                <a:solidFill>
+                  <a:schemeClr val="tx1">
+                    <a:lumMod val="75000"/>
+                    <a:lumOff val="25000"/>
+                  </a:schemeClr>
+                </a:solidFill>
+                <a:latin typeface="+mn-lt"/>
+                <a:ea typeface="+mn-ea"/>
+                <a:cs typeface="+mn-cs"/>
+              </a:defRPr>
+            </a:lvl5pPr>
+            <a:lvl6pPr marL="1100000" indent="-228600" algn="l" defTabSz="914400" rtl="0" eaLnBrk="1" latinLnBrk="0" hangingPunct="1">
+              <a:lnSpc>
+                <a:spcPct val="90000"/>
+              </a:lnSpc>
+              <a:spcBef>
+                <a:spcPts val="200"/>
+              </a:spcBef>
+              <a:spcAft>
+                <a:spcPts val="400"/>
+              </a:spcAft>
+              <a:buClr>
+                <a:schemeClr val="accent1"/>
+              </a:buClr>
+              <a:buFont typeface="Calibri" pitchFamily="34" charset="0"/>
+              <a:buChar char="◦"/>
+              <a:defRPr sz="1400" kern="1200">
+                <a:solidFill>
+                  <a:schemeClr val="tx1">
+                    <a:lumMod val="75000"/>
+                    <a:lumOff val="25000"/>
+                  </a:schemeClr>
+                </a:solidFill>
+                <a:latin typeface="+mn-lt"/>
+                <a:ea typeface="+mn-ea"/>
+                <a:cs typeface="+mn-cs"/>
+              </a:defRPr>
+            </a:lvl6pPr>
+            <a:lvl7pPr marL="1300000" indent="-228600" algn="l" defTabSz="914400" rtl="0" eaLnBrk="1" latinLnBrk="0" hangingPunct="1">
+              <a:lnSpc>
+                <a:spcPct val="90000"/>
+              </a:lnSpc>
+              <a:spcBef>
+                <a:spcPts val="200"/>
+              </a:spcBef>
+              <a:spcAft>
+                <a:spcPts val="400"/>
+              </a:spcAft>
+              <a:buClr>
+                <a:schemeClr val="accent1"/>
+              </a:buClr>
+              <a:buFont typeface="Calibri" pitchFamily="34" charset="0"/>
+              <a:buChar char="◦"/>
+              <a:defRPr sz="1400" kern="1200">
+                <a:solidFill>
+                  <a:schemeClr val="tx1">
+                    <a:lumMod val="75000"/>
+                    <a:lumOff val="25000"/>
+                  </a:schemeClr>
+                </a:solidFill>
+                <a:latin typeface="+mn-lt"/>
+                <a:ea typeface="+mn-ea"/>
+                <a:cs typeface="+mn-cs"/>
+              </a:defRPr>
+            </a:lvl7pPr>
+            <a:lvl8pPr marL="1500000" indent="-228600" algn="l" defTabSz="914400" rtl="0" eaLnBrk="1" latinLnBrk="0" hangingPunct="1">
+              <a:lnSpc>
+                <a:spcPct val="90000"/>
+              </a:lnSpc>
+              <a:spcBef>
+                <a:spcPts val="200"/>
+              </a:spcBef>
+              <a:spcAft>
+                <a:spcPts val="400"/>
+              </a:spcAft>
+              <a:buClr>
+                <a:schemeClr val="accent1"/>
+              </a:buClr>
+              <a:buFont typeface="Calibri" pitchFamily="34" charset="0"/>
+              <a:buChar char="◦"/>
+              <a:defRPr sz="1400" kern="1200">
+                <a:solidFill>
+                  <a:schemeClr val="tx1">
+                    <a:lumMod val="75000"/>
+                    <a:lumOff val="25000"/>
+                  </a:schemeClr>
+                </a:solidFill>
+                <a:latin typeface="+mn-lt"/>
+                <a:ea typeface="+mn-ea"/>
+                <a:cs typeface="+mn-cs"/>
+              </a:defRPr>
+            </a:lvl8pPr>
+            <a:lvl9pPr marL="1700000" indent="-228600" algn="l" defTabSz="914400" rtl="0" eaLnBrk="1" latinLnBrk="0" hangingPunct="1">
+              <a:lnSpc>
+                <a:spcPct val="90000"/>
+              </a:lnSpc>
+              <a:spcBef>
+                <a:spcPts val="200"/>
+              </a:spcBef>
+              <a:spcAft>
+                <a:spcPts val="400"/>
+              </a:spcAft>
+              <a:buClr>
+                <a:schemeClr val="accent1"/>
+              </a:buClr>
+              <a:buFont typeface="Calibri" pitchFamily="34" charset="0"/>
+              <a:buChar char="◦"/>
+              <a:defRPr sz="1400" kern="1200">
+                <a:solidFill>
+                  <a:schemeClr val="tx1">
+                    <a:lumMod val="75000"/>
+                    <a:lumOff val="25000"/>
+                  </a:schemeClr>
+                </a:solidFill>
+                <a:latin typeface="+mn-lt"/>
+                <a:ea typeface="+mn-ea"/>
+                <a:cs typeface="+mn-cs"/>
+              </a:defRPr>
+            </a:lvl9pPr>
+          </a:lstStyle>
+          <a:p>
+            <a:pPr algn="ctr"/>
+            <a:r>
+              <a:rPr lang="en-US" dirty="0">
+                <a:solidFill>
+                  <a:schemeClr val="tx1"/>
+                </a:solidFill>
+                <a:latin typeface="+mj-lt"/>
+              </a:rPr>
+              <a:t>Deterministic trajectory</a:t>
+            </a:r>
+          </a:p>
+        </p:txBody>
+      </p:sp>
+      <p:sp>
+        <p:nvSpPr>
+          <p:cNvPr id="11" name="CuadroTexto 10">
+            <a:extLst>
+              <a:ext uri="{FF2B5EF4-FFF2-40B4-BE49-F238E27FC236}">
+                <a16:creationId xmlns:a16="http://schemas.microsoft.com/office/drawing/2014/main" id="{8FB3E477-45A4-47F0-956C-403F714AF1BD}"/>
+              </a:ext>
+            </a:extLst>
+          </p:cNvPr>
+          <p:cNvSpPr txBox="1"/>
+          <p:nvPr/>
+        </p:nvSpPr>
+        <p:spPr>
+          <a:xfrm>
+            <a:off x="7200008" y="2396225"/>
+            <a:ext cx="4300983" cy="464871"/>
+          </a:xfrm>
+          <a:prstGeom prst="rect">
+            <a:avLst/>
+          </a:prstGeom>
+          <a:noFill/>
+        </p:spPr>
+        <p:txBody>
+          <a:bodyPr wrap="square">
+            <a:spAutoFit/>
+          </a:bodyPr>
+          <a:lstStyle/>
+          <a:p>
+            <a:pPr algn="just">
+              <a:lnSpc>
+                <a:spcPct val="150000"/>
+              </a:lnSpc>
+            </a:pPr>
+            <a:r>
+              <a:rPr lang="en-US" dirty="0"/>
+              <a:t>Decreases monotonically</a:t>
+            </a:r>
+          </a:p>
+        </p:txBody>
+      </p:sp>
+      <p:sp>
+        <p:nvSpPr>
+          <p:cNvPr id="12" name="Marcador de contenido 7">
+            <a:extLst>
+              <a:ext uri="{FF2B5EF4-FFF2-40B4-BE49-F238E27FC236}">
+                <a16:creationId xmlns:a16="http://schemas.microsoft.com/office/drawing/2014/main" id="{30B184A3-7E9F-858D-194B-A6D239F827B7}"/>
+              </a:ext>
+            </a:extLst>
+          </p:cNvPr>
+          <p:cNvSpPr txBox="1">
+            <a:spLocks/>
+          </p:cNvSpPr>
+          <p:nvPr/>
+        </p:nvSpPr>
+        <p:spPr>
+          <a:xfrm>
+            <a:off x="7217571" y="3028260"/>
+            <a:ext cx="4314825" cy="425964"/>
+          </a:xfrm>
+          <a:prstGeom prst="rect">
+            <a:avLst/>
+          </a:prstGeom>
+        </p:spPr>
+        <p:txBody>
+          <a:bodyPr vert="horz" lIns="0" tIns="45720" rIns="0" bIns="45720" rtlCol="0">
+            <a:normAutofit/>
+          </a:bodyPr>
+          <a:lstStyle>
+            <a:lvl1pPr marL="91440" indent="-91440" algn="l" defTabSz="914400" rtl="0" eaLnBrk="1" latinLnBrk="0" hangingPunct="1">
+              <a:lnSpc>
+                <a:spcPct val="90000"/>
+              </a:lnSpc>
+              <a:spcBef>
+                <a:spcPts val="1200"/>
+              </a:spcBef>
+              <a:spcAft>
+                <a:spcPts val="200"/>
+              </a:spcAft>
+              <a:buClr>
+                <a:schemeClr val="accent1"/>
+              </a:buClr>
+              <a:buSzPct val="100000"/>
+              <a:buFont typeface="Calibri" panose="020F0502020204030204" pitchFamily="34" charset="0"/>
+              <a:buChar char=" "/>
+              <a:defRPr sz="2000" kern="1200">
+                <a:solidFill>
+                  <a:schemeClr val="tx1">
+                    <a:lumMod val="75000"/>
+                    <a:lumOff val="25000"/>
+                  </a:schemeClr>
+                </a:solidFill>
+                <a:latin typeface="+mn-lt"/>
+                <a:ea typeface="+mn-ea"/>
+                <a:cs typeface="+mn-cs"/>
+              </a:defRPr>
+            </a:lvl1pPr>
+            <a:lvl2pPr marL="384048" indent="-182880" algn="l" defTabSz="914400" rtl="0" eaLnBrk="1" latinLnBrk="0" hangingPunct="1">
+              <a:lnSpc>
+                <a:spcPct val="90000"/>
+              </a:lnSpc>
+              <a:spcBef>
+                <a:spcPts val="200"/>
+              </a:spcBef>
+              <a:spcAft>
+                <a:spcPts val="400"/>
+              </a:spcAft>
+              <a:buClr>
+                <a:schemeClr val="accent1"/>
+              </a:buClr>
+              <a:buFont typeface="Calibri" pitchFamily="34" charset="0"/>
+              <a:buChar char="◦"/>
+              <a:defRPr sz="1800" kern="1200">
+                <a:solidFill>
+                  <a:schemeClr val="tx1">
+                    <a:lumMod val="75000"/>
+                    <a:lumOff val="25000"/>
+                  </a:schemeClr>
+                </a:solidFill>
+                <a:latin typeface="+mn-lt"/>
+                <a:ea typeface="+mn-ea"/>
+                <a:cs typeface="+mn-cs"/>
+              </a:defRPr>
+            </a:lvl2pPr>
+            <a:lvl3pPr marL="566928" indent="-182880" algn="l" defTabSz="914400" rtl="0" eaLnBrk="1" latinLnBrk="0" hangingPunct="1">
+              <a:lnSpc>
+                <a:spcPct val="90000"/>
+              </a:lnSpc>
+              <a:spcBef>
+                <a:spcPts val="200"/>
+              </a:spcBef>
+              <a:spcAft>
+                <a:spcPts val="400"/>
+              </a:spcAft>
+              <a:buClr>
+                <a:schemeClr val="accent1"/>
+              </a:buClr>
+              <a:buFont typeface="Calibri" pitchFamily="34" charset="0"/>
+              <a:buChar char="◦"/>
+              <a:defRPr sz="1400" kern="1200">
+                <a:solidFill>
+                  <a:schemeClr val="tx1">
+                    <a:lumMod val="75000"/>
+                    <a:lumOff val="25000"/>
+                  </a:schemeClr>
+                </a:solidFill>
+                <a:latin typeface="+mn-lt"/>
+                <a:ea typeface="+mn-ea"/>
+                <a:cs typeface="+mn-cs"/>
+              </a:defRPr>
+            </a:lvl3pPr>
+            <a:lvl4pPr marL="749808" indent="-182880" algn="l" defTabSz="914400" rtl="0" eaLnBrk="1" latinLnBrk="0" hangingPunct="1">
+              <a:lnSpc>
+                <a:spcPct val="90000"/>
+              </a:lnSpc>
+              <a:spcBef>
+                <a:spcPts val="200"/>
+              </a:spcBef>
+              <a:spcAft>
+                <a:spcPts val="400"/>
+              </a:spcAft>
+              <a:buClr>
+                <a:schemeClr val="accent1"/>
+              </a:buClr>
+              <a:buFont typeface="Calibri" pitchFamily="34" charset="0"/>
+              <a:buChar char="◦"/>
+              <a:defRPr sz="1400" kern="1200">
+                <a:solidFill>
+                  <a:schemeClr val="tx1">
+                    <a:lumMod val="75000"/>
+                    <a:lumOff val="25000"/>
+                  </a:schemeClr>
+                </a:solidFill>
+                <a:latin typeface="+mn-lt"/>
+                <a:ea typeface="+mn-ea"/>
+                <a:cs typeface="+mn-cs"/>
+              </a:defRPr>
+            </a:lvl4pPr>
+            <a:lvl5pPr marL="932688" indent="-182880" algn="l" defTabSz="914400" rtl="0" eaLnBrk="1" latinLnBrk="0" hangingPunct="1">
+              <a:lnSpc>
+                <a:spcPct val="90000"/>
+              </a:lnSpc>
+              <a:spcBef>
+                <a:spcPts val="200"/>
+              </a:spcBef>
+              <a:spcAft>
+                <a:spcPts val="400"/>
+              </a:spcAft>
+              <a:buClr>
+                <a:schemeClr val="accent1"/>
+              </a:buClr>
+              <a:buFont typeface="Calibri" pitchFamily="34" charset="0"/>
+              <a:buChar char="◦"/>
+              <a:defRPr sz="1400" kern="1200">
+                <a:solidFill>
+                  <a:schemeClr val="tx1">
+                    <a:lumMod val="75000"/>
+                    <a:lumOff val="25000"/>
+                  </a:schemeClr>
+                </a:solidFill>
+                <a:latin typeface="+mn-lt"/>
+                <a:ea typeface="+mn-ea"/>
+                <a:cs typeface="+mn-cs"/>
+              </a:defRPr>
+            </a:lvl5pPr>
+            <a:lvl6pPr marL="1100000" indent="-228600" algn="l" defTabSz="914400" rtl="0" eaLnBrk="1" latinLnBrk="0" hangingPunct="1">
+              <a:lnSpc>
+                <a:spcPct val="90000"/>
+              </a:lnSpc>
+              <a:spcBef>
+                <a:spcPts val="200"/>
+              </a:spcBef>
+              <a:spcAft>
+                <a:spcPts val="400"/>
+              </a:spcAft>
+              <a:buClr>
+                <a:schemeClr val="accent1"/>
+              </a:buClr>
+              <a:buFont typeface="Calibri" pitchFamily="34" charset="0"/>
+              <a:buChar char="◦"/>
+              <a:defRPr sz="1400" kern="1200">
+                <a:solidFill>
+                  <a:schemeClr val="tx1">
+                    <a:lumMod val="75000"/>
+                    <a:lumOff val="25000"/>
+                  </a:schemeClr>
+                </a:solidFill>
+                <a:latin typeface="+mn-lt"/>
+                <a:ea typeface="+mn-ea"/>
+                <a:cs typeface="+mn-cs"/>
+              </a:defRPr>
+            </a:lvl6pPr>
+            <a:lvl7pPr marL="1300000" indent="-228600" algn="l" defTabSz="914400" rtl="0" eaLnBrk="1" latinLnBrk="0" hangingPunct="1">
+              <a:lnSpc>
+                <a:spcPct val="90000"/>
+              </a:lnSpc>
+              <a:spcBef>
+                <a:spcPts val="200"/>
+              </a:spcBef>
+              <a:spcAft>
+                <a:spcPts val="400"/>
+              </a:spcAft>
+              <a:buClr>
+                <a:schemeClr val="accent1"/>
+              </a:buClr>
+              <a:buFont typeface="Calibri" pitchFamily="34" charset="0"/>
+              <a:buChar char="◦"/>
+              <a:defRPr sz="1400" kern="1200">
+                <a:solidFill>
+                  <a:schemeClr val="tx1">
+                    <a:lumMod val="75000"/>
+                    <a:lumOff val="25000"/>
+                  </a:schemeClr>
+                </a:solidFill>
+                <a:latin typeface="+mn-lt"/>
+                <a:ea typeface="+mn-ea"/>
+                <a:cs typeface="+mn-cs"/>
+              </a:defRPr>
+            </a:lvl7pPr>
+            <a:lvl8pPr marL="1500000" indent="-228600" algn="l" defTabSz="914400" rtl="0" eaLnBrk="1" latinLnBrk="0" hangingPunct="1">
+              <a:lnSpc>
+                <a:spcPct val="90000"/>
+              </a:lnSpc>
+              <a:spcBef>
+                <a:spcPts val="200"/>
+              </a:spcBef>
+              <a:spcAft>
+                <a:spcPts val="400"/>
+              </a:spcAft>
+              <a:buClr>
+                <a:schemeClr val="accent1"/>
+              </a:buClr>
+              <a:buFont typeface="Calibri" pitchFamily="34" charset="0"/>
+              <a:buChar char="◦"/>
+              <a:defRPr sz="1400" kern="1200">
+                <a:solidFill>
+                  <a:schemeClr val="tx1">
+                    <a:lumMod val="75000"/>
+                    <a:lumOff val="25000"/>
+                  </a:schemeClr>
+                </a:solidFill>
+                <a:latin typeface="+mn-lt"/>
+                <a:ea typeface="+mn-ea"/>
+                <a:cs typeface="+mn-cs"/>
+              </a:defRPr>
+            </a:lvl8pPr>
+            <a:lvl9pPr marL="1700000" indent="-228600" algn="l" defTabSz="914400" rtl="0" eaLnBrk="1" latinLnBrk="0" hangingPunct="1">
+              <a:lnSpc>
+                <a:spcPct val="90000"/>
+              </a:lnSpc>
+              <a:spcBef>
+                <a:spcPts val="200"/>
+              </a:spcBef>
+              <a:spcAft>
+                <a:spcPts val="400"/>
+              </a:spcAft>
+              <a:buClr>
+                <a:schemeClr val="accent1"/>
+              </a:buClr>
+              <a:buFont typeface="Calibri" pitchFamily="34" charset="0"/>
+              <a:buChar char="◦"/>
+              <a:defRPr sz="1400" kern="1200">
+                <a:solidFill>
+                  <a:schemeClr val="tx1">
+                    <a:lumMod val="75000"/>
+                    <a:lumOff val="25000"/>
+                  </a:schemeClr>
+                </a:solidFill>
+                <a:latin typeface="+mn-lt"/>
+                <a:ea typeface="+mn-ea"/>
+                <a:cs typeface="+mn-cs"/>
+              </a:defRPr>
+            </a:lvl9pPr>
+          </a:lstStyle>
+          <a:p>
+            <a:pPr algn="ctr"/>
+            <a:r>
+              <a:rPr lang="en-US" dirty="0">
+                <a:solidFill>
+                  <a:schemeClr val="tx1"/>
+                </a:solidFill>
+                <a:latin typeface="+mj-lt"/>
+              </a:rPr>
+              <a:t>Stochastic trajectory</a:t>
+            </a:r>
+          </a:p>
+        </p:txBody>
+      </p:sp>
     </p:spTree>
     <p:extLst>
       <p:ext uri="{BB962C8B-B14F-4D97-AF65-F5344CB8AC3E}">
@@ -4776,10 +6541,174 @@
   <p:clrMapOvr>
     <a:masterClrMapping/>
   </p:clrMapOvr>
+  <p:timing>
+    <p:tnLst>
+      <p:par>
+        <p:cTn id="1" dur="indefinite" restart="never" nodeType="tmRoot">
+          <p:childTnLst>
+            <p:seq concurrent="1" nextAc="seek">
+              <p:cTn id="2" dur="indefinite" nodeType="mainSeq">
+                <p:childTnLst>
+                  <p:par>
+                    <p:cTn id="3" fill="hold">
+                      <p:stCondLst>
+                        <p:cond delay="indefinite"/>
+                        <p:cond evt="onBegin" delay="0">
+                          <p:tn val="2"/>
+                        </p:cond>
+                      </p:stCondLst>
+                      <p:childTnLst>
+                        <p:par>
+                          <p:cTn id="4" fill="hold">
+                            <p:stCondLst>
+                              <p:cond delay="0"/>
+                            </p:stCondLst>
+                            <p:childTnLst>
+                              <p:par>
+                                <p:cTn id="5" presetID="1" presetClass="entr" presetSubtype="0" fill="hold" nodeType="withEffect">
+                                  <p:stCondLst>
+                                    <p:cond delay="0"/>
+                                  </p:stCondLst>
+                                  <p:childTnLst>
+                                    <p:set>
+                                      <p:cBhvr>
+                                        <p:cTn id="6" dur="1" fill="hold">
+                                          <p:stCondLst>
+                                            <p:cond delay="0"/>
+                                          </p:stCondLst>
+                                        </p:cTn>
+                                        <p:tgtEl>
+                                          <p:spTgt spid="3"/>
+                                        </p:tgtEl>
+                                        <p:attrNameLst>
+                                          <p:attrName>style.visibility</p:attrName>
+                                        </p:attrNameLst>
+                                      </p:cBhvr>
+                                      <p:to>
+                                        <p:strVal val="visible"/>
+                                      </p:to>
+                                    </p:set>
+                                  </p:childTnLst>
+                                </p:cTn>
+                              </p:par>
+                              <p:par>
+                                <p:cTn id="7" presetID="1" presetClass="entr" presetSubtype="0" fill="hold" grpId="0" nodeType="withEffect">
+                                  <p:stCondLst>
+                                    <p:cond delay="0"/>
+                                  </p:stCondLst>
+                                  <p:childTnLst>
+                                    <p:set>
+                                      <p:cBhvr>
+                                        <p:cTn id="8" dur="1" fill="hold">
+                                          <p:stCondLst>
+                                            <p:cond delay="0"/>
+                                          </p:stCondLst>
+                                        </p:cTn>
+                                        <p:tgtEl>
+                                          <p:spTgt spid="8"/>
+                                        </p:tgtEl>
+                                        <p:attrNameLst>
+                                          <p:attrName>style.visibility</p:attrName>
+                                        </p:attrNameLst>
+                                      </p:cBhvr>
+                                      <p:to>
+                                        <p:strVal val="visible"/>
+                                      </p:to>
+                                    </p:set>
+                                  </p:childTnLst>
+                                </p:cTn>
+                              </p:par>
+                              <p:par>
+                                <p:cTn id="9" presetID="1" presetClass="entr" presetSubtype="0" fill="hold" grpId="0" nodeType="withEffect">
+                                  <p:stCondLst>
+                                    <p:cond delay="0"/>
+                                  </p:stCondLst>
+                                  <p:childTnLst>
+                                    <p:set>
+                                      <p:cBhvr>
+                                        <p:cTn id="10" dur="1" fill="hold">
+                                          <p:stCondLst>
+                                            <p:cond delay="0"/>
+                                          </p:stCondLst>
+                                        </p:cTn>
+                                        <p:tgtEl>
+                                          <p:spTgt spid="9"/>
+                                        </p:tgtEl>
+                                        <p:attrNameLst>
+                                          <p:attrName>style.visibility</p:attrName>
+                                        </p:attrNameLst>
+                                      </p:cBhvr>
+                                      <p:to>
+                                        <p:strVal val="visible"/>
+                                      </p:to>
+                                    </p:set>
+                                  </p:childTnLst>
+                                </p:cTn>
+                              </p:par>
+                              <p:par>
+                                <p:cTn id="11" presetID="1" presetClass="entr" presetSubtype="0" fill="hold" grpId="0" nodeType="withEffect">
+                                  <p:stCondLst>
+                                    <p:cond delay="0"/>
+                                  </p:stCondLst>
+                                  <p:childTnLst>
+                                    <p:set>
+                                      <p:cBhvr>
+                                        <p:cTn id="12" dur="1" fill="hold">
+                                          <p:stCondLst>
+                                            <p:cond delay="0"/>
+                                          </p:stCondLst>
+                                        </p:cTn>
+                                        <p:tgtEl>
+                                          <p:spTgt spid="11"/>
+                                        </p:tgtEl>
+                                        <p:attrNameLst>
+                                          <p:attrName>style.visibility</p:attrName>
+                                        </p:attrNameLst>
+                                      </p:cBhvr>
+                                      <p:to>
+                                        <p:strVal val="visible"/>
+                                      </p:to>
+                                    </p:set>
+                                  </p:childTnLst>
+                                </p:cTn>
+                              </p:par>
+                            </p:childTnLst>
+                          </p:cTn>
+                        </p:par>
+                      </p:childTnLst>
+                    </p:cTn>
+                  </p:par>
+                </p:childTnLst>
+              </p:cTn>
+              <p:prevCondLst>
+                <p:cond evt="onPrev" delay="0">
+                  <p:tgtEl>
+                    <p:sldTgt/>
+                  </p:tgtEl>
+                </p:cond>
+              </p:prevCondLst>
+              <p:nextCondLst>
+                <p:cond evt="onNext" delay="0">
+                  <p:tgtEl>
+                    <p:sldTgt/>
+                  </p:tgtEl>
+                </p:cond>
+              </p:nextCondLst>
+            </p:seq>
+          </p:childTnLst>
+        </p:cTn>
+      </p:par>
+    </p:tnLst>
+    <p:bldLst>
+      <p:bldP spid="8" grpId="0"/>
+      <p:bldP spid="9" grpId="0"/>
+      <p:bldP spid="11" grpId="0"/>
+    </p:bldLst>
+  </p:timing>
 </p:sld>
 </file>
 
-<file path=ppt/slides/slide11.xml><?xml version="1.0" encoding="utf-8"?>
+<file path=ppt/slides/slide12.xml><?xml version="1.0" encoding="utf-8"?>
 <p:sld xmlns:a="http://schemas.openxmlformats.org/drawingml/2006/main" xmlns:r="http://schemas.openxmlformats.org/officeDocument/2006/relationships" xmlns:p="http://schemas.openxmlformats.org/presentationml/2006/main">
   <p:cSld>
     <p:spTree>
@@ -4929,7 +6858,7 @@
             </a:extLst>
           </p:cNvPr>
           <p:cNvSpPr>
-            <a:spLocks/>
+            <a:spLocks noGrp="1" noRot="1" noMove="1" noResize="1" noEditPoints="1" noAdjustHandles="1" noChangeArrowheads="1" noChangeShapeType="1"/>
           </p:cNvSpPr>
           <p:nvPr/>
         </p:nvSpPr>
@@ -4973,7 +6902,10 @@
           <a:lstStyle/>
           <a:p>
             <a:pPr algn="ctr"/>
-            <a:endParaRPr lang="en-US"/>
+            <a:r>
+              <a:rPr lang="en-US" dirty="0"/>
+              <a:t>v</a:t>
+            </a:r>
           </a:p>
         </p:txBody>
       </p:sp>
@@ -5015,6 +6947,549 @@
           </a:prstGeom>
         </p:spPr>
       </p:pic>
+      <p:pic>
+        <p:nvPicPr>
+          <p:cNvPr id="8" name="Imagen 7">
+            <a:extLst>
+              <a:ext uri="{FF2B5EF4-FFF2-40B4-BE49-F238E27FC236}">
+                <a16:creationId xmlns:a16="http://schemas.microsoft.com/office/drawing/2014/main" id="{2D7E4470-4EF4-30BE-904E-0D18FA3C336F}"/>
+              </a:ext>
+            </a:extLst>
+          </p:cNvPr>
+          <p:cNvPicPr>
+            <a:picLocks noChangeAspect="1"/>
+          </p:cNvPicPr>
+          <p:nvPr/>
+        </p:nvPicPr>
+        <p:blipFill>
+          <a:blip r:embed="rId4"/>
+          <a:stretch>
+            <a:fillRect/>
+          </a:stretch>
+        </p:blipFill>
+        <p:spPr>
+          <a:xfrm>
+            <a:off x="8273735" y="5028691"/>
+            <a:ext cx="1619476" cy="609685"/>
+          </a:xfrm>
+          <a:prstGeom prst="rect">
+            <a:avLst/>
+          </a:prstGeom>
+        </p:spPr>
+      </p:pic>
+      <mc:AlternateContent xmlns:mc="http://schemas.openxmlformats.org/markup-compatibility/2006">
+        <mc:Choice xmlns:a14="http://schemas.microsoft.com/office/drawing/2010/main" Requires="a14">
+          <p:sp>
+            <p:nvSpPr>
+              <p:cNvPr id="9" name="CuadroTexto 8">
+                <a:extLst>
+                  <a:ext uri="{FF2B5EF4-FFF2-40B4-BE49-F238E27FC236}">
+                    <a16:creationId xmlns:a16="http://schemas.microsoft.com/office/drawing/2014/main" id="{46FAFCBC-BF34-281D-0DC5-2364F59D7C53}"/>
+                  </a:ext>
+                </a:extLst>
+              </p:cNvPr>
+              <p:cNvSpPr txBox="1"/>
+              <p:nvPr/>
+            </p:nvSpPr>
+            <p:spPr>
+              <a:xfrm>
+                <a:off x="6575021" y="2121158"/>
+                <a:ext cx="5016904" cy="879664"/>
+              </a:xfrm>
+              <a:prstGeom prst="rect">
+                <a:avLst/>
+              </a:prstGeom>
+              <a:noFill/>
+            </p:spPr>
+            <p:txBody>
+              <a:bodyPr wrap="square">
+                <a:spAutoFit/>
+              </a:bodyPr>
+              <a:lstStyle/>
+              <a:p>
+                <a:pPr algn="just">
+                  <a:lnSpc>
+                    <a:spcPct val="150000"/>
+                  </a:lnSpc>
+                </a:pPr>
+                <a14:m>
+                  <m:oMath xmlns:m="http://schemas.openxmlformats.org/officeDocument/2006/math">
+                    <m:r>
+                      <a:rPr lang="es-ES" b="0" i="1" smtClean="0">
+                        <a:latin typeface="Cambria Math" panose="02040503050406030204" pitchFamily="18" charset="0"/>
+                      </a:rPr>
+                      <m:t>𝑠</m:t>
+                    </m:r>
+                  </m:oMath>
+                </a14:m>
+                <a:r>
+                  <a:rPr lang="en-US" dirty="0"/>
+                  <a:t>: Controls how fast internal composition changes.</a:t>
+                </a:r>
+              </a:p>
+              <a:p>
+                <a:pPr algn="just">
+                  <a:lnSpc>
+                    <a:spcPct val="150000"/>
+                  </a:lnSpc>
+                </a:pPr>
+                <a14:m>
+                  <m:oMath xmlns:m="http://schemas.openxmlformats.org/officeDocument/2006/math">
+                    <m:sSub>
+                      <m:sSubPr>
+                        <m:ctrlPr>
+                          <a:rPr lang="es-ES" b="0" i="1" smtClean="0">
+                            <a:latin typeface="Cambria Math" panose="02040503050406030204" pitchFamily="18" charset="0"/>
+                          </a:rPr>
+                        </m:ctrlPr>
+                      </m:sSubPr>
+                      <m:e>
+                        <m:r>
+                          <a:rPr lang="es-ES" b="0" i="1" smtClean="0">
+                            <a:latin typeface="Cambria Math" panose="02040503050406030204" pitchFamily="18" charset="0"/>
+                          </a:rPr>
+                          <m:t>𝑁</m:t>
+                        </m:r>
+                      </m:e>
+                      <m:sub>
+                        <m:r>
+                          <a:rPr lang="es-ES" b="0" i="1" smtClean="0">
+                            <a:latin typeface="Cambria Math" panose="02040503050406030204" pitchFamily="18" charset="0"/>
+                          </a:rPr>
+                          <m:t>0</m:t>
+                        </m:r>
+                      </m:sub>
+                    </m:sSub>
+                  </m:oMath>
+                </a14:m>
+                <a:r>
+                  <a:rPr lang="en-US" dirty="0"/>
+                  <a:t>: Controls demographic fluctuations.</a:t>
+                </a:r>
+              </a:p>
+            </p:txBody>
+          </p:sp>
+        </mc:Choice>
+        <mc:Fallback>
+          <p:sp>
+            <p:nvSpPr>
+              <p:cNvPr id="9" name="CuadroTexto 8">
+                <a:extLst>
+                  <a:ext uri="{FF2B5EF4-FFF2-40B4-BE49-F238E27FC236}">
+                    <a16:creationId xmlns:a16="http://schemas.microsoft.com/office/drawing/2014/main" id="{46FAFCBC-BF34-281D-0DC5-2364F59D7C53}"/>
+                  </a:ext>
+                </a:extLst>
+              </p:cNvPr>
+              <p:cNvSpPr txBox="1">
+                <a:spLocks noRot="1" noChangeAspect="1" noMove="1" noResize="1" noEditPoints="1" noAdjustHandles="1" noChangeArrowheads="1" noChangeShapeType="1" noTextEdit="1"/>
+              </p:cNvSpPr>
+              <p:nvPr/>
+            </p:nvSpPr>
+            <p:spPr>
+              <a:xfrm>
+                <a:off x="6575021" y="2121158"/>
+                <a:ext cx="5016904" cy="879664"/>
+              </a:xfrm>
+              <a:prstGeom prst="rect">
+                <a:avLst/>
+              </a:prstGeom>
+              <a:blipFill>
+                <a:blip r:embed="rId5"/>
+                <a:stretch>
+                  <a:fillRect b="-10417"/>
+                </a:stretch>
+              </a:blipFill>
+            </p:spPr>
+            <p:txBody>
+              <a:bodyPr/>
+              <a:lstStyle/>
+              <a:p>
+                <a:r>
+                  <a:rPr lang="en-US">
+                    <a:noFill/>
+                  </a:rPr>
+                  <a:t> </a:t>
+                </a:r>
+              </a:p>
+            </p:txBody>
+          </p:sp>
+        </mc:Fallback>
+      </mc:AlternateContent>
+      <mc:AlternateContent xmlns:mc="http://schemas.openxmlformats.org/markup-compatibility/2006">
+        <mc:Choice xmlns:a14="http://schemas.microsoft.com/office/drawing/2010/main" Requires="a14">
+          <p:sp>
+            <p:nvSpPr>
+              <p:cNvPr id="10" name="CuadroTexto 9">
+                <a:extLst>
+                  <a:ext uri="{FF2B5EF4-FFF2-40B4-BE49-F238E27FC236}">
+                    <a16:creationId xmlns:a16="http://schemas.microsoft.com/office/drawing/2014/main" id="{92890746-29AE-4BFE-0B33-B6840EB6C0E2}"/>
+                  </a:ext>
+                </a:extLst>
+              </p:cNvPr>
+              <p:cNvSpPr txBox="1"/>
+              <p:nvPr/>
+            </p:nvSpPr>
+            <p:spPr>
+              <a:xfrm>
+                <a:off x="6575021" y="3031830"/>
+                <a:ext cx="5016904" cy="507831"/>
+              </a:xfrm>
+              <a:prstGeom prst="rect">
+                <a:avLst/>
+              </a:prstGeom>
+              <a:noFill/>
+            </p:spPr>
+            <p:txBody>
+              <a:bodyPr wrap="square">
+                <a:spAutoFit/>
+              </a:bodyPr>
+              <a:lstStyle/>
+              <a:p>
+                <a:pPr algn="just">
+                  <a:lnSpc>
+                    <a:spcPct val="150000"/>
+                  </a:lnSpc>
+                </a:pPr>
+                <a14:m>
+                  <m:oMathPara xmlns:m="http://schemas.openxmlformats.org/officeDocument/2006/math">
+                    <m:oMathParaPr>
+                      <m:jc m:val="centerGroup"/>
+                    </m:oMathParaPr>
+                    <m:oMath xmlns:m="http://schemas.openxmlformats.org/officeDocument/2006/math">
+                      <m:sSub>
+                        <m:sSubPr>
+                          <m:ctrlPr>
+                            <a:rPr lang="es-ES" b="0" i="1" smtClean="0">
+                              <a:latin typeface="Cambria Math" panose="02040503050406030204" pitchFamily="18" charset="0"/>
+                            </a:rPr>
+                          </m:ctrlPr>
+                        </m:sSubPr>
+                        <m:e>
+                          <m:r>
+                            <a:rPr lang="es-ES" b="0" i="1" smtClean="0">
+                              <a:latin typeface="Cambria Math" panose="02040503050406030204" pitchFamily="18" charset="0"/>
+                            </a:rPr>
+                            <m:t>𝑡</m:t>
+                          </m:r>
+                        </m:e>
+                        <m:sub>
+                          <m:r>
+                            <a:rPr lang="es-ES" b="0" i="1" smtClean="0">
+                              <a:latin typeface="Cambria Math" panose="02040503050406030204" pitchFamily="18" charset="0"/>
+                            </a:rPr>
+                            <m:t>𝑐</m:t>
+                          </m:r>
+                        </m:sub>
+                      </m:sSub>
+                      <m:d>
+                        <m:dPr>
+                          <m:ctrlPr>
+                            <a:rPr lang="es-ES" b="0" i="1" smtClean="0">
+                              <a:latin typeface="Cambria Math" panose="02040503050406030204" pitchFamily="18" charset="0"/>
+                            </a:rPr>
+                          </m:ctrlPr>
+                        </m:dPr>
+                        <m:e>
+                          <m:r>
+                            <a:rPr lang="es-ES" b="0" i="1" smtClean="0">
+                              <a:latin typeface="Cambria Math" panose="02040503050406030204" pitchFamily="18" charset="0"/>
+                            </a:rPr>
+                            <m:t>𝑠</m:t>
+                          </m:r>
+                          <m:r>
+                            <a:rPr lang="es-ES" b="0" i="1" smtClean="0">
+                              <a:latin typeface="Cambria Math" panose="02040503050406030204" pitchFamily="18" charset="0"/>
+                            </a:rPr>
+                            <m:t>,</m:t>
+                          </m:r>
+                          <m:sSub>
+                            <m:sSubPr>
+                              <m:ctrlPr>
+                                <a:rPr lang="es-ES" b="0" i="1" smtClean="0">
+                                  <a:latin typeface="Cambria Math" panose="02040503050406030204" pitchFamily="18" charset="0"/>
+                                </a:rPr>
+                              </m:ctrlPr>
+                            </m:sSubPr>
+                            <m:e>
+                              <m:r>
+                                <a:rPr lang="es-ES" b="0" i="1" smtClean="0">
+                                  <a:latin typeface="Cambria Math" panose="02040503050406030204" pitchFamily="18" charset="0"/>
+                                </a:rPr>
+                                <m:t>𝑁</m:t>
+                              </m:r>
+                            </m:e>
+                            <m:sub>
+                              <m:r>
+                                <a:rPr lang="es-ES" b="0" i="1" smtClean="0">
+                                  <a:latin typeface="Cambria Math" panose="02040503050406030204" pitchFamily="18" charset="0"/>
+                                </a:rPr>
+                                <m:t>0</m:t>
+                              </m:r>
+                            </m:sub>
+                          </m:sSub>
+                        </m:e>
+                      </m:d>
+                    </m:oMath>
+                  </m:oMathPara>
+                </a14:m>
+                <a:endParaRPr lang="en-US" dirty="0"/>
+              </a:p>
+            </p:txBody>
+          </p:sp>
+        </mc:Choice>
+        <mc:Fallback>
+          <p:sp>
+            <p:nvSpPr>
+              <p:cNvPr id="10" name="CuadroTexto 9">
+                <a:extLst>
+                  <a:ext uri="{FF2B5EF4-FFF2-40B4-BE49-F238E27FC236}">
+                    <a16:creationId xmlns:a16="http://schemas.microsoft.com/office/drawing/2014/main" id="{92890746-29AE-4BFE-0B33-B6840EB6C0E2}"/>
+                  </a:ext>
+                </a:extLst>
+              </p:cNvPr>
+              <p:cNvSpPr txBox="1">
+                <a:spLocks noRot="1" noChangeAspect="1" noMove="1" noResize="1" noEditPoints="1" noAdjustHandles="1" noChangeArrowheads="1" noChangeShapeType="1" noTextEdit="1"/>
+              </p:cNvSpPr>
+              <p:nvPr/>
+            </p:nvSpPr>
+            <p:spPr>
+              <a:xfrm>
+                <a:off x="6575021" y="3031830"/>
+                <a:ext cx="5016904" cy="507831"/>
+              </a:xfrm>
+              <a:prstGeom prst="rect">
+                <a:avLst/>
+              </a:prstGeom>
+              <a:blipFill>
+                <a:blip r:embed="rId6"/>
+                <a:stretch>
+                  <a:fillRect/>
+                </a:stretch>
+              </a:blipFill>
+            </p:spPr>
+            <p:txBody>
+              <a:bodyPr/>
+              <a:lstStyle/>
+              <a:p>
+                <a:r>
+                  <a:rPr lang="en-US">
+                    <a:noFill/>
+                  </a:rPr>
+                  <a:t> </a:t>
+                </a:r>
+              </a:p>
+            </p:txBody>
+          </p:sp>
+        </mc:Fallback>
+      </mc:AlternateContent>
+      <mc:AlternateContent xmlns:mc="http://schemas.openxmlformats.org/markup-compatibility/2006">
+        <mc:Choice xmlns:a14="http://schemas.microsoft.com/office/drawing/2010/main" Requires="a14">
+          <p:sp>
+            <p:nvSpPr>
+              <p:cNvPr id="11" name="CuadroTexto 10">
+                <a:extLst>
+                  <a:ext uri="{FF2B5EF4-FFF2-40B4-BE49-F238E27FC236}">
+                    <a16:creationId xmlns:a16="http://schemas.microsoft.com/office/drawing/2014/main" id="{FD329952-B464-0D0F-5CB0-1F60B1166289}"/>
+                  </a:ext>
+                </a:extLst>
+              </p:cNvPr>
+              <p:cNvSpPr txBox="1"/>
+              <p:nvPr/>
+            </p:nvSpPr>
+            <p:spPr>
+              <a:xfrm>
+                <a:off x="6575021" y="3759864"/>
+                <a:ext cx="5016904" cy="464166"/>
+              </a:xfrm>
+              <a:prstGeom prst="rect">
+                <a:avLst/>
+              </a:prstGeom>
+              <a:noFill/>
+            </p:spPr>
+            <p:txBody>
+              <a:bodyPr wrap="square">
+                <a:spAutoFit/>
+              </a:bodyPr>
+              <a:lstStyle/>
+              <a:p>
+                <a:pPr algn="just">
+                  <a:lnSpc>
+                    <a:spcPct val="150000"/>
+                  </a:lnSpc>
+                </a:pPr>
+                <a:r>
+                  <a:rPr lang="es-ES" b="0" dirty="0"/>
+                  <a:t>(Fig 4) </a:t>
+                </a:r>
+                <a14:m>
+                  <m:oMath xmlns:m="http://schemas.openxmlformats.org/officeDocument/2006/math">
+                    <m:sSub>
+                      <m:sSubPr>
+                        <m:ctrlPr>
+                          <a:rPr lang="es-ES" b="0" i="1" smtClean="0">
+                            <a:latin typeface="Cambria Math" panose="02040503050406030204" pitchFamily="18" charset="0"/>
+                          </a:rPr>
+                        </m:ctrlPr>
+                      </m:sSubPr>
+                      <m:e>
+                        <m:r>
+                          <a:rPr lang="es-ES" b="0" i="1" smtClean="0">
+                            <a:latin typeface="Cambria Math" panose="02040503050406030204" pitchFamily="18" charset="0"/>
+                          </a:rPr>
+                          <m:t>𝑡</m:t>
+                        </m:r>
+                      </m:e>
+                      <m:sub>
+                        <m:r>
+                          <a:rPr lang="es-ES" b="0" i="1" smtClean="0">
+                            <a:latin typeface="Cambria Math" panose="02040503050406030204" pitchFamily="18" charset="0"/>
+                          </a:rPr>
+                          <m:t>𝑐</m:t>
+                        </m:r>
+                      </m:sub>
+                    </m:sSub>
+                  </m:oMath>
+                </a14:m>
+                <a:r>
+                  <a:rPr lang="en-US" dirty="0"/>
+                  <a:t> vanishes as </a:t>
+                </a:r>
+                <a14:m>
+                  <m:oMath xmlns:m="http://schemas.openxmlformats.org/officeDocument/2006/math">
+                    <m:r>
+                      <a:rPr lang="es-ES" b="0" i="1" smtClean="0">
+                        <a:latin typeface="Cambria Math" panose="02040503050406030204" pitchFamily="18" charset="0"/>
+                      </a:rPr>
+                      <m:t>𝑠</m:t>
+                    </m:r>
+                  </m:oMath>
+                </a14:m>
+                <a:r>
+                  <a:rPr lang="en-US" dirty="0"/>
+                  <a:t> and </a:t>
+                </a:r>
+                <a14:m>
+                  <m:oMath xmlns:m="http://schemas.openxmlformats.org/officeDocument/2006/math">
+                    <m:sSub>
+                      <m:sSubPr>
+                        <m:ctrlPr>
+                          <a:rPr lang="es-ES" b="0" i="1" smtClean="0">
+                            <a:latin typeface="Cambria Math" panose="02040503050406030204" pitchFamily="18" charset="0"/>
+                          </a:rPr>
+                        </m:ctrlPr>
+                      </m:sSubPr>
+                      <m:e>
+                        <m:r>
+                          <a:rPr lang="es-ES" b="0" i="1" smtClean="0">
+                            <a:latin typeface="Cambria Math" panose="02040503050406030204" pitchFamily="18" charset="0"/>
+                          </a:rPr>
+                          <m:t>𝑁</m:t>
+                        </m:r>
+                      </m:e>
+                      <m:sub>
+                        <m:r>
+                          <a:rPr lang="es-ES" b="0" i="1" smtClean="0">
+                            <a:latin typeface="Cambria Math" panose="02040503050406030204" pitchFamily="18" charset="0"/>
+                          </a:rPr>
+                          <m:t>0</m:t>
+                        </m:r>
+                      </m:sub>
+                    </m:sSub>
+                  </m:oMath>
+                </a14:m>
+                <a:r>
+                  <a:rPr lang="en-US" dirty="0"/>
+                  <a:t> increases. </a:t>
+                </a:r>
+              </a:p>
+            </p:txBody>
+          </p:sp>
+        </mc:Choice>
+        <mc:Fallback>
+          <p:sp>
+            <p:nvSpPr>
+              <p:cNvPr id="11" name="CuadroTexto 10">
+                <a:extLst>
+                  <a:ext uri="{FF2B5EF4-FFF2-40B4-BE49-F238E27FC236}">
+                    <a16:creationId xmlns:a16="http://schemas.microsoft.com/office/drawing/2014/main" id="{FD329952-B464-0D0F-5CB0-1F60B1166289}"/>
+                  </a:ext>
+                </a:extLst>
+              </p:cNvPr>
+              <p:cNvSpPr txBox="1">
+                <a:spLocks noRot="1" noChangeAspect="1" noMove="1" noResize="1" noEditPoints="1" noAdjustHandles="1" noChangeArrowheads="1" noChangeShapeType="1" noTextEdit="1"/>
+              </p:cNvSpPr>
+              <p:nvPr/>
+            </p:nvSpPr>
+            <p:spPr>
+              <a:xfrm>
+                <a:off x="6575021" y="3759864"/>
+                <a:ext cx="5016904" cy="464166"/>
+              </a:xfrm>
+              <a:prstGeom prst="rect">
+                <a:avLst/>
+              </a:prstGeom>
+              <a:blipFill>
+                <a:blip r:embed="rId7"/>
+                <a:stretch>
+                  <a:fillRect l="-1094" b="-21053"/>
+                </a:stretch>
+              </a:blipFill>
+            </p:spPr>
+            <p:txBody>
+              <a:bodyPr/>
+              <a:lstStyle/>
+              <a:p>
+                <a:r>
+                  <a:rPr lang="en-US">
+                    <a:noFill/>
+                  </a:rPr>
+                  <a:t> </a:t>
+                </a:r>
+              </a:p>
+            </p:txBody>
+          </p:sp>
+        </mc:Fallback>
+      </mc:AlternateContent>
+      <p:sp>
+        <p:nvSpPr>
+          <p:cNvPr id="13" name="CuadroTexto 12">
+            <a:extLst>
+              <a:ext uri="{FF2B5EF4-FFF2-40B4-BE49-F238E27FC236}">
+                <a16:creationId xmlns:a16="http://schemas.microsoft.com/office/drawing/2014/main" id="{6B194CC5-C59E-70E8-4C85-B301D8F1186F}"/>
+              </a:ext>
+            </a:extLst>
+          </p:cNvPr>
+          <p:cNvSpPr txBox="1"/>
+          <p:nvPr/>
+        </p:nvSpPr>
+        <p:spPr>
+          <a:xfrm>
+            <a:off x="6575021" y="4497212"/>
+            <a:ext cx="5016904" cy="464871"/>
+          </a:xfrm>
+          <a:prstGeom prst="rect">
+            <a:avLst/>
+          </a:prstGeom>
+          <a:noFill/>
+        </p:spPr>
+        <p:txBody>
+          <a:bodyPr wrap="square">
+            <a:spAutoFit/>
+          </a:bodyPr>
+          <a:lstStyle/>
+          <a:p>
+            <a:pPr algn="just">
+              <a:lnSpc>
+                <a:spcPct val="150000"/>
+              </a:lnSpc>
+            </a:pPr>
+            <a:r>
+              <a:rPr lang="en-US" dirty="0"/>
+              <a:t>Analytical boundary (Appendix)</a:t>
+            </a:r>
+          </a:p>
+        </p:txBody>
+      </p:sp>
     </p:spTree>
     <p:extLst>
       <p:ext uri="{BB962C8B-B14F-4D97-AF65-F5344CB8AC3E}">
@@ -5025,10 +7500,238 @@
   <p:clrMapOvr>
     <a:masterClrMapping/>
   </p:clrMapOvr>
+  <p:timing>
+    <p:tnLst>
+      <p:par>
+        <p:cTn id="1" dur="indefinite" restart="never" nodeType="tmRoot">
+          <p:childTnLst>
+            <p:seq concurrent="1" nextAc="seek">
+              <p:cTn id="2" dur="indefinite" nodeType="mainSeq">
+                <p:childTnLst>
+                  <p:par>
+                    <p:cTn id="3" fill="hold">
+                      <p:stCondLst>
+                        <p:cond delay="indefinite"/>
+                        <p:cond evt="onBegin" delay="0">
+                          <p:tn val="2"/>
+                        </p:cond>
+                      </p:stCondLst>
+                      <p:childTnLst>
+                        <p:par>
+                          <p:cTn id="4" fill="hold">
+                            <p:stCondLst>
+                              <p:cond delay="0"/>
+                            </p:stCondLst>
+                            <p:childTnLst>
+                              <p:par>
+                                <p:cTn id="5" presetID="1" presetClass="entr" presetSubtype="0" fill="hold" grpId="0" nodeType="withEffect">
+                                  <p:stCondLst>
+                                    <p:cond delay="0"/>
+                                  </p:stCondLst>
+                                  <p:childTnLst>
+                                    <p:set>
+                                      <p:cBhvr>
+                                        <p:cTn id="6" dur="1" fill="hold">
+                                          <p:stCondLst>
+                                            <p:cond delay="0"/>
+                                          </p:stCondLst>
+                                        </p:cTn>
+                                        <p:tgtEl>
+                                          <p:spTgt spid="9"/>
+                                        </p:tgtEl>
+                                        <p:attrNameLst>
+                                          <p:attrName>style.visibility</p:attrName>
+                                        </p:attrNameLst>
+                                      </p:cBhvr>
+                                      <p:to>
+                                        <p:strVal val="visible"/>
+                                      </p:to>
+                                    </p:set>
+                                  </p:childTnLst>
+                                </p:cTn>
+                              </p:par>
+                              <p:par>
+                                <p:cTn id="7" presetID="1" presetClass="entr" presetSubtype="0" fill="hold" grpId="0" nodeType="withEffect">
+                                  <p:stCondLst>
+                                    <p:cond delay="0"/>
+                                  </p:stCondLst>
+                                  <p:childTnLst>
+                                    <p:set>
+                                      <p:cBhvr>
+                                        <p:cTn id="8" dur="1" fill="hold">
+                                          <p:stCondLst>
+                                            <p:cond delay="0"/>
+                                          </p:stCondLst>
+                                        </p:cTn>
+                                        <p:tgtEl>
+                                          <p:spTgt spid="10"/>
+                                        </p:tgtEl>
+                                        <p:attrNameLst>
+                                          <p:attrName>style.visibility</p:attrName>
+                                        </p:attrNameLst>
+                                      </p:cBhvr>
+                                      <p:to>
+                                        <p:strVal val="visible"/>
+                                      </p:to>
+                                    </p:set>
+                                  </p:childTnLst>
+                                </p:cTn>
+                              </p:par>
+                            </p:childTnLst>
+                          </p:cTn>
+                        </p:par>
+                      </p:childTnLst>
+                    </p:cTn>
+                  </p:par>
+                  <p:par>
+                    <p:cTn id="9" fill="hold">
+                      <p:stCondLst>
+                        <p:cond delay="indefinite"/>
+                      </p:stCondLst>
+                      <p:childTnLst>
+                        <p:par>
+                          <p:cTn id="10" fill="hold">
+                            <p:stCondLst>
+                              <p:cond delay="0"/>
+                            </p:stCondLst>
+                            <p:childTnLst>
+                              <p:par>
+                                <p:cTn id="11" presetID="1" presetClass="entr" presetSubtype="0" fill="hold" grpId="0" nodeType="clickEffect">
+                                  <p:stCondLst>
+                                    <p:cond delay="0"/>
+                                  </p:stCondLst>
+                                  <p:childTnLst>
+                                    <p:set>
+                                      <p:cBhvr>
+                                        <p:cTn id="12" dur="1" fill="hold">
+                                          <p:stCondLst>
+                                            <p:cond delay="0"/>
+                                          </p:stCondLst>
+                                        </p:cTn>
+                                        <p:tgtEl>
+                                          <p:spTgt spid="11"/>
+                                        </p:tgtEl>
+                                        <p:attrNameLst>
+                                          <p:attrName>style.visibility</p:attrName>
+                                        </p:attrNameLst>
+                                      </p:cBhvr>
+                                      <p:to>
+                                        <p:strVal val="visible"/>
+                                      </p:to>
+                                    </p:set>
+                                  </p:childTnLst>
+                                </p:cTn>
+                              </p:par>
+                            </p:childTnLst>
+                          </p:cTn>
+                        </p:par>
+                      </p:childTnLst>
+                    </p:cTn>
+                  </p:par>
+                  <p:par>
+                    <p:cTn id="13" fill="hold">
+                      <p:stCondLst>
+                        <p:cond delay="indefinite"/>
+                      </p:stCondLst>
+                      <p:childTnLst>
+                        <p:par>
+                          <p:cTn id="14" fill="hold">
+                            <p:stCondLst>
+                              <p:cond delay="0"/>
+                            </p:stCondLst>
+                            <p:childTnLst>
+                              <p:par>
+                                <p:cTn id="15" presetID="1" presetClass="entr" presetSubtype="0" fill="hold" grpId="0" nodeType="clickEffect">
+                                  <p:stCondLst>
+                                    <p:cond delay="0"/>
+                                  </p:stCondLst>
+                                  <p:childTnLst>
+                                    <p:set>
+                                      <p:cBhvr>
+                                        <p:cTn id="16" dur="1" fill="hold">
+                                          <p:stCondLst>
+                                            <p:cond delay="0"/>
+                                          </p:stCondLst>
+                                        </p:cTn>
+                                        <p:tgtEl>
+                                          <p:spTgt spid="13"/>
+                                        </p:tgtEl>
+                                        <p:attrNameLst>
+                                          <p:attrName>style.visibility</p:attrName>
+                                        </p:attrNameLst>
+                                      </p:cBhvr>
+                                      <p:to>
+                                        <p:strVal val="visible"/>
+                                      </p:to>
+                                    </p:set>
+                                  </p:childTnLst>
+                                </p:cTn>
+                              </p:par>
+                              <p:par>
+                                <p:cTn id="17" presetID="1" presetClass="entr" presetSubtype="0" fill="hold" nodeType="withEffect">
+                                  <p:stCondLst>
+                                    <p:cond delay="0"/>
+                                  </p:stCondLst>
+                                  <p:childTnLst>
+                                    <p:set>
+                                      <p:cBhvr>
+                                        <p:cTn id="18" dur="1" fill="hold">
+                                          <p:stCondLst>
+                                            <p:cond delay="0"/>
+                                          </p:stCondLst>
+                                        </p:cTn>
+                                        <p:tgtEl>
+                                          <p:spTgt spid="8"/>
+                                        </p:tgtEl>
+                                        <p:attrNameLst>
+                                          <p:attrName>style.visibility</p:attrName>
+                                        </p:attrNameLst>
+                                      </p:cBhvr>
+                                      <p:to>
+                                        <p:strVal val="visible"/>
+                                      </p:to>
+                                    </p:set>
+                                  </p:childTnLst>
+                                </p:cTn>
+                              </p:par>
+                            </p:childTnLst>
+                          </p:cTn>
+                        </p:par>
+                      </p:childTnLst>
+                    </p:cTn>
+                  </p:par>
+                </p:childTnLst>
+              </p:cTn>
+              <p:prevCondLst>
+                <p:cond evt="onPrev" delay="0">
+                  <p:tgtEl>
+                    <p:sldTgt/>
+                  </p:tgtEl>
+                </p:cond>
+              </p:prevCondLst>
+              <p:nextCondLst>
+                <p:cond evt="onNext" delay="0">
+                  <p:tgtEl>
+                    <p:sldTgt/>
+                  </p:tgtEl>
+                </p:cond>
+              </p:nextCondLst>
+            </p:seq>
+          </p:childTnLst>
+        </p:cTn>
+      </p:par>
+    </p:tnLst>
+    <p:bldLst>
+      <p:bldP spid="9" grpId="0"/>
+      <p:bldP spid="10" grpId="0"/>
+      <p:bldP spid="11" grpId="0"/>
+      <p:bldP spid="13" grpId="0"/>
+    </p:bldLst>
+  </p:timing>
 </p:sld>
 </file>
 
-<file path=ppt/slides/slide12.xml><?xml version="1.0" encoding="utf-8"?>
+<file path=ppt/slides/slide13.xml><?xml version="1.0" encoding="utf-8"?>
 <p:sld xmlns:a="http://schemas.openxmlformats.org/drawingml/2006/main" xmlns:r="http://schemas.openxmlformats.org/officeDocument/2006/relationships" xmlns:p="http://schemas.openxmlformats.org/presentationml/2006/main">
   <p:cSld>
     <p:spTree>
@@ -5244,18 +7947,543 @@
         </p:nvSpPr>
         <p:spPr>
           <a:xfrm>
-            <a:off x="1097280" y="2069530"/>
-            <a:ext cx="10058400" cy="4023360"/>
-          </a:xfrm>
-        </p:spPr>
-        <p:txBody>
-          <a:bodyPr/>
+            <a:off x="1036320" y="2069530"/>
+            <a:ext cx="10119360" cy="2996292"/>
+          </a:xfrm>
+        </p:spPr>
+        <p:txBody>
+          <a:bodyPr>
+            <a:normAutofit fontScale="92500"/>
+          </a:bodyPr>
           <a:lstStyle/>
           <a:p>
-            <a:endParaRPr lang="en-US" dirty="0"/>
-          </a:p>
-        </p:txBody>
-      </p:sp>
+            <a:pPr>
+              <a:lnSpc>
+                <a:spcPct val="150000"/>
+              </a:lnSpc>
+            </a:pPr>
+            <a:r>
+              <a:rPr lang="en-US" sz="1900" dirty="0">
+                <a:solidFill>
+                  <a:schemeClr val="tx1"/>
+                </a:solidFill>
+              </a:rPr>
+              <a:t>Coupling evolutionary dynamics with population growth changes the behavior expected from the deterministic replicator equation:</a:t>
+            </a:r>
+          </a:p>
+          <a:p>
+            <a:pPr>
+              <a:lnSpc>
+                <a:spcPct val="150000"/>
+              </a:lnSpc>
+              <a:buFont typeface="Wingdings" panose="05000000000000000000" pitchFamily="2" charset="2"/>
+              <a:buChar char="q"/>
+            </a:pPr>
+            <a:r>
+              <a:rPr lang="en-US" sz="1900" dirty="0">
+                <a:solidFill>
+                  <a:schemeClr val="tx1"/>
+                </a:solidFill>
+              </a:rPr>
+              <a:t>Deterministic model: cooperators always decrease because defectors have a relative fitness advantage.</a:t>
+            </a:r>
+          </a:p>
+          <a:p>
+            <a:pPr>
+              <a:lnSpc>
+                <a:spcPct val="150000"/>
+              </a:lnSpc>
+              <a:buFont typeface="Wingdings" panose="05000000000000000000" pitchFamily="2" charset="2"/>
+              <a:buChar char="q"/>
+            </a:pPr>
+            <a:r>
+              <a:rPr lang="en-US" sz="1900" dirty="0">
+                <a:solidFill>
+                  <a:schemeClr val="tx1"/>
+                </a:solidFill>
+              </a:rPr>
+              <a:t>Stochastic model: small populations can display a transient increase in cooperation when selection is weak and the initial population small. This increase is not caused by selection favoring cooperators, but by the amplification of early demographic fluctuations during the growth phase. </a:t>
+            </a:r>
+          </a:p>
+          <a:p>
+            <a:pPr marL="0" indent="0">
+              <a:buNone/>
+            </a:pPr>
+            <a:endParaRPr lang="en-US" dirty="0">
+              <a:solidFill>
+                <a:schemeClr val="tx1"/>
+              </a:solidFill>
+            </a:endParaRPr>
+          </a:p>
+        </p:txBody>
+      </p:sp>
+      <p:sp>
+        <p:nvSpPr>
+          <p:cNvPr id="3" name="Marcador de contenido 7">
+            <a:extLst>
+              <a:ext uri="{FF2B5EF4-FFF2-40B4-BE49-F238E27FC236}">
+                <a16:creationId xmlns:a16="http://schemas.microsoft.com/office/drawing/2014/main" id="{07B6AD0D-9492-5A62-F8EE-58425F51E191}"/>
+              </a:ext>
+            </a:extLst>
+          </p:cNvPr>
+          <p:cNvSpPr txBox="1">
+            <a:spLocks/>
+          </p:cNvSpPr>
+          <p:nvPr/>
+        </p:nvSpPr>
+        <p:spPr>
+          <a:xfrm>
+            <a:off x="1446485" y="5094672"/>
+            <a:ext cx="5516880" cy="987551"/>
+          </a:xfrm>
+          <a:prstGeom prst="rect">
+            <a:avLst/>
+          </a:prstGeom>
+        </p:spPr>
+        <p:txBody>
+          <a:bodyPr vert="horz" lIns="0" tIns="45720" rIns="0" bIns="45720" rtlCol="0">
+            <a:normAutofit fontScale="85000" lnSpcReduction="10000"/>
+          </a:bodyPr>
+          <a:lstStyle>
+            <a:lvl1pPr marL="91440" indent="-91440" algn="l" defTabSz="914400" rtl="0" eaLnBrk="1" latinLnBrk="0" hangingPunct="1">
+              <a:lnSpc>
+                <a:spcPct val="90000"/>
+              </a:lnSpc>
+              <a:spcBef>
+                <a:spcPts val="1200"/>
+              </a:spcBef>
+              <a:spcAft>
+                <a:spcPts val="200"/>
+              </a:spcAft>
+              <a:buClr>
+                <a:schemeClr val="accent1"/>
+              </a:buClr>
+              <a:buSzPct val="100000"/>
+              <a:buFont typeface="Calibri" panose="020F0502020204030204" pitchFamily="34" charset="0"/>
+              <a:buChar char=" "/>
+              <a:defRPr sz="2000" kern="1200">
+                <a:solidFill>
+                  <a:schemeClr val="tx1">
+                    <a:lumMod val="75000"/>
+                    <a:lumOff val="25000"/>
+                  </a:schemeClr>
+                </a:solidFill>
+                <a:latin typeface="+mn-lt"/>
+                <a:ea typeface="+mn-ea"/>
+                <a:cs typeface="+mn-cs"/>
+              </a:defRPr>
+            </a:lvl1pPr>
+            <a:lvl2pPr marL="384048" indent="-182880" algn="l" defTabSz="914400" rtl="0" eaLnBrk="1" latinLnBrk="0" hangingPunct="1">
+              <a:lnSpc>
+                <a:spcPct val="90000"/>
+              </a:lnSpc>
+              <a:spcBef>
+                <a:spcPts val="200"/>
+              </a:spcBef>
+              <a:spcAft>
+                <a:spcPts val="400"/>
+              </a:spcAft>
+              <a:buClr>
+                <a:schemeClr val="accent1"/>
+              </a:buClr>
+              <a:buFont typeface="Calibri" pitchFamily="34" charset="0"/>
+              <a:buChar char="◦"/>
+              <a:defRPr sz="1800" kern="1200">
+                <a:solidFill>
+                  <a:schemeClr val="tx1">
+                    <a:lumMod val="75000"/>
+                    <a:lumOff val="25000"/>
+                  </a:schemeClr>
+                </a:solidFill>
+                <a:latin typeface="+mn-lt"/>
+                <a:ea typeface="+mn-ea"/>
+                <a:cs typeface="+mn-cs"/>
+              </a:defRPr>
+            </a:lvl2pPr>
+            <a:lvl3pPr marL="566928" indent="-182880" algn="l" defTabSz="914400" rtl="0" eaLnBrk="1" latinLnBrk="0" hangingPunct="1">
+              <a:lnSpc>
+                <a:spcPct val="90000"/>
+              </a:lnSpc>
+              <a:spcBef>
+                <a:spcPts val="200"/>
+              </a:spcBef>
+              <a:spcAft>
+                <a:spcPts val="400"/>
+              </a:spcAft>
+              <a:buClr>
+                <a:schemeClr val="accent1"/>
+              </a:buClr>
+              <a:buFont typeface="Calibri" pitchFamily="34" charset="0"/>
+              <a:buChar char="◦"/>
+              <a:defRPr sz="1400" kern="1200">
+                <a:solidFill>
+                  <a:schemeClr val="tx1">
+                    <a:lumMod val="75000"/>
+                    <a:lumOff val="25000"/>
+                  </a:schemeClr>
+                </a:solidFill>
+                <a:latin typeface="+mn-lt"/>
+                <a:ea typeface="+mn-ea"/>
+                <a:cs typeface="+mn-cs"/>
+              </a:defRPr>
+            </a:lvl3pPr>
+            <a:lvl4pPr marL="749808" indent="-182880" algn="l" defTabSz="914400" rtl="0" eaLnBrk="1" latinLnBrk="0" hangingPunct="1">
+              <a:lnSpc>
+                <a:spcPct val="90000"/>
+              </a:lnSpc>
+              <a:spcBef>
+                <a:spcPts val="200"/>
+              </a:spcBef>
+              <a:spcAft>
+                <a:spcPts val="400"/>
+              </a:spcAft>
+              <a:buClr>
+                <a:schemeClr val="accent1"/>
+              </a:buClr>
+              <a:buFont typeface="Calibri" pitchFamily="34" charset="0"/>
+              <a:buChar char="◦"/>
+              <a:defRPr sz="1400" kern="1200">
+                <a:solidFill>
+                  <a:schemeClr val="tx1">
+                    <a:lumMod val="75000"/>
+                    <a:lumOff val="25000"/>
+                  </a:schemeClr>
+                </a:solidFill>
+                <a:latin typeface="+mn-lt"/>
+                <a:ea typeface="+mn-ea"/>
+                <a:cs typeface="+mn-cs"/>
+              </a:defRPr>
+            </a:lvl4pPr>
+            <a:lvl5pPr marL="932688" indent="-182880" algn="l" defTabSz="914400" rtl="0" eaLnBrk="1" latinLnBrk="0" hangingPunct="1">
+              <a:lnSpc>
+                <a:spcPct val="90000"/>
+              </a:lnSpc>
+              <a:spcBef>
+                <a:spcPts val="200"/>
+              </a:spcBef>
+              <a:spcAft>
+                <a:spcPts val="400"/>
+              </a:spcAft>
+              <a:buClr>
+                <a:schemeClr val="accent1"/>
+              </a:buClr>
+              <a:buFont typeface="Calibri" pitchFamily="34" charset="0"/>
+              <a:buChar char="◦"/>
+              <a:defRPr sz="1400" kern="1200">
+                <a:solidFill>
+                  <a:schemeClr val="tx1">
+                    <a:lumMod val="75000"/>
+                    <a:lumOff val="25000"/>
+                  </a:schemeClr>
+                </a:solidFill>
+                <a:latin typeface="+mn-lt"/>
+                <a:ea typeface="+mn-ea"/>
+                <a:cs typeface="+mn-cs"/>
+              </a:defRPr>
+            </a:lvl5pPr>
+            <a:lvl6pPr marL="1100000" indent="-228600" algn="l" defTabSz="914400" rtl="0" eaLnBrk="1" latinLnBrk="0" hangingPunct="1">
+              <a:lnSpc>
+                <a:spcPct val="90000"/>
+              </a:lnSpc>
+              <a:spcBef>
+                <a:spcPts val="200"/>
+              </a:spcBef>
+              <a:spcAft>
+                <a:spcPts val="400"/>
+              </a:spcAft>
+              <a:buClr>
+                <a:schemeClr val="accent1"/>
+              </a:buClr>
+              <a:buFont typeface="Calibri" pitchFamily="34" charset="0"/>
+              <a:buChar char="◦"/>
+              <a:defRPr sz="1400" kern="1200">
+                <a:solidFill>
+                  <a:schemeClr val="tx1">
+                    <a:lumMod val="75000"/>
+                    <a:lumOff val="25000"/>
+                  </a:schemeClr>
+                </a:solidFill>
+                <a:latin typeface="+mn-lt"/>
+                <a:ea typeface="+mn-ea"/>
+                <a:cs typeface="+mn-cs"/>
+              </a:defRPr>
+            </a:lvl6pPr>
+            <a:lvl7pPr marL="1300000" indent="-228600" algn="l" defTabSz="914400" rtl="0" eaLnBrk="1" latinLnBrk="0" hangingPunct="1">
+              <a:lnSpc>
+                <a:spcPct val="90000"/>
+              </a:lnSpc>
+              <a:spcBef>
+                <a:spcPts val="200"/>
+              </a:spcBef>
+              <a:spcAft>
+                <a:spcPts val="400"/>
+              </a:spcAft>
+              <a:buClr>
+                <a:schemeClr val="accent1"/>
+              </a:buClr>
+              <a:buFont typeface="Calibri" pitchFamily="34" charset="0"/>
+              <a:buChar char="◦"/>
+              <a:defRPr sz="1400" kern="1200">
+                <a:solidFill>
+                  <a:schemeClr val="tx1">
+                    <a:lumMod val="75000"/>
+                    <a:lumOff val="25000"/>
+                  </a:schemeClr>
+                </a:solidFill>
+                <a:latin typeface="+mn-lt"/>
+                <a:ea typeface="+mn-ea"/>
+                <a:cs typeface="+mn-cs"/>
+              </a:defRPr>
+            </a:lvl7pPr>
+            <a:lvl8pPr marL="1500000" indent="-228600" algn="l" defTabSz="914400" rtl="0" eaLnBrk="1" latinLnBrk="0" hangingPunct="1">
+              <a:lnSpc>
+                <a:spcPct val="90000"/>
+              </a:lnSpc>
+              <a:spcBef>
+                <a:spcPts val="200"/>
+              </a:spcBef>
+              <a:spcAft>
+                <a:spcPts val="400"/>
+              </a:spcAft>
+              <a:buClr>
+                <a:schemeClr val="accent1"/>
+              </a:buClr>
+              <a:buFont typeface="Calibri" pitchFamily="34" charset="0"/>
+              <a:buChar char="◦"/>
+              <a:defRPr sz="1400" kern="1200">
+                <a:solidFill>
+                  <a:schemeClr val="tx1">
+                    <a:lumMod val="75000"/>
+                    <a:lumOff val="25000"/>
+                  </a:schemeClr>
+                </a:solidFill>
+                <a:latin typeface="+mn-lt"/>
+                <a:ea typeface="+mn-ea"/>
+                <a:cs typeface="+mn-cs"/>
+              </a:defRPr>
+            </a:lvl8pPr>
+            <a:lvl9pPr marL="1700000" indent="-228600" algn="l" defTabSz="914400" rtl="0" eaLnBrk="1" latinLnBrk="0" hangingPunct="1">
+              <a:lnSpc>
+                <a:spcPct val="90000"/>
+              </a:lnSpc>
+              <a:spcBef>
+                <a:spcPts val="200"/>
+              </a:spcBef>
+              <a:spcAft>
+                <a:spcPts val="400"/>
+              </a:spcAft>
+              <a:buClr>
+                <a:schemeClr val="accent1"/>
+              </a:buClr>
+              <a:buFont typeface="Calibri" pitchFamily="34" charset="0"/>
+              <a:buChar char="◦"/>
+              <a:defRPr sz="1400" kern="1200">
+                <a:solidFill>
+                  <a:schemeClr val="tx1">
+                    <a:lumMod val="75000"/>
+                    <a:lumOff val="25000"/>
+                  </a:schemeClr>
+                </a:solidFill>
+                <a:latin typeface="+mn-lt"/>
+                <a:ea typeface="+mn-ea"/>
+                <a:cs typeface="+mn-cs"/>
+              </a:defRPr>
+            </a:lvl9pPr>
+          </a:lstStyle>
+          <a:p>
+            <a:pPr>
+              <a:lnSpc>
+                <a:spcPct val="150000"/>
+              </a:lnSpc>
+            </a:pPr>
+            <a:r>
+              <a:rPr lang="en-US" sz="2100" dirty="0">
+                <a:solidFill>
+                  <a:schemeClr val="tx1"/>
+                </a:solidFill>
+              </a:rPr>
+              <a:t>Therefore, the population size cannot always be treated as a constant variable in evolutionary game theory.</a:t>
+            </a:r>
+          </a:p>
+          <a:p>
+            <a:endParaRPr lang="en-US" dirty="0">
+              <a:solidFill>
+                <a:schemeClr val="tx1"/>
+              </a:solidFill>
+            </a:endParaRPr>
+          </a:p>
+        </p:txBody>
+      </p:sp>
+      <p:pic>
+        <p:nvPicPr>
+          <p:cNvPr id="7" name="Imagen 6">
+            <a:extLst>
+              <a:ext uri="{FF2B5EF4-FFF2-40B4-BE49-F238E27FC236}">
+                <a16:creationId xmlns:a16="http://schemas.microsoft.com/office/drawing/2014/main" id="{90538463-5BBA-9292-886F-29AC7FBCDEBE}"/>
+              </a:ext>
+            </a:extLst>
+          </p:cNvPr>
+          <p:cNvPicPr>
+            <a:picLocks noChangeAspect="1"/>
+          </p:cNvPicPr>
+          <p:nvPr/>
+        </p:nvPicPr>
+        <p:blipFill>
+          <a:blip r:embed="rId3"/>
+          <a:srcRect b="47840"/>
+          <a:stretch>
+            <a:fillRect/>
+          </a:stretch>
+        </p:blipFill>
+        <p:spPr>
+          <a:xfrm>
+            <a:off x="7952191" y="5111390"/>
+            <a:ext cx="1595330" cy="428518"/>
+          </a:xfrm>
+          <a:prstGeom prst="rect">
+            <a:avLst/>
+          </a:prstGeom>
+        </p:spPr>
+      </p:pic>
+      <p:pic>
+        <p:nvPicPr>
+          <p:cNvPr id="9" name="Imagen 8">
+            <a:extLst>
+              <a:ext uri="{FF2B5EF4-FFF2-40B4-BE49-F238E27FC236}">
+                <a16:creationId xmlns:a16="http://schemas.microsoft.com/office/drawing/2014/main" id="{4676C12F-66AE-23FF-7225-95471FF895D4}"/>
+              </a:ext>
+            </a:extLst>
+          </p:cNvPr>
+          <p:cNvPicPr>
+            <a:picLocks noChangeAspect="1"/>
+          </p:cNvPicPr>
+          <p:nvPr/>
+        </p:nvPicPr>
+        <p:blipFill>
+          <a:blip r:embed="rId3"/>
+          <a:srcRect t="54026"/>
+          <a:stretch>
+            <a:fillRect/>
+          </a:stretch>
+        </p:blipFill>
+        <p:spPr>
+          <a:xfrm>
+            <a:off x="7135917" y="5593598"/>
+            <a:ext cx="1595330" cy="377694"/>
+          </a:xfrm>
+          <a:prstGeom prst="rect">
+            <a:avLst/>
+          </a:prstGeom>
+        </p:spPr>
+      </p:pic>
+      <p:pic>
+        <p:nvPicPr>
+          <p:cNvPr id="10" name="Imagen 9">
+            <a:extLst>
+              <a:ext uri="{FF2B5EF4-FFF2-40B4-BE49-F238E27FC236}">
+                <a16:creationId xmlns:a16="http://schemas.microsoft.com/office/drawing/2014/main" id="{50491381-24FF-D948-F0E3-3D9B603BD742}"/>
+              </a:ext>
+            </a:extLst>
+          </p:cNvPr>
+          <p:cNvPicPr>
+            <a:picLocks noChangeAspect="1"/>
+          </p:cNvPicPr>
+          <p:nvPr/>
+        </p:nvPicPr>
+        <p:blipFill>
+          <a:blip r:embed="rId4"/>
+          <a:srcRect b="49654"/>
+          <a:stretch>
+            <a:fillRect/>
+          </a:stretch>
+        </p:blipFill>
+        <p:spPr>
+          <a:xfrm>
+            <a:off x="8995816" y="5593599"/>
+            <a:ext cx="1171038" cy="377693"/>
+          </a:xfrm>
+          <a:prstGeom prst="rect">
+            <a:avLst/>
+          </a:prstGeom>
+        </p:spPr>
+      </p:pic>
+      <p:cxnSp>
+        <p:nvCxnSpPr>
+          <p:cNvPr id="14" name="Conector recto de flecha 13">
+            <a:extLst>
+              <a:ext uri="{FF2B5EF4-FFF2-40B4-BE49-F238E27FC236}">
+                <a16:creationId xmlns:a16="http://schemas.microsoft.com/office/drawing/2014/main" id="{D373F582-F186-913F-DCA0-1546B3780784}"/>
+              </a:ext>
+            </a:extLst>
+          </p:cNvPr>
+          <p:cNvCxnSpPr/>
+          <p:nvPr/>
+        </p:nvCxnSpPr>
+        <p:spPr>
+          <a:xfrm>
+            <a:off x="8731247" y="5782445"/>
+            <a:ext cx="241303" cy="0"/>
+          </a:xfrm>
+          <a:prstGeom prst="straightConnector1">
+            <a:avLst/>
+          </a:prstGeom>
+          <a:ln>
+            <a:tailEnd type="triangle"/>
+          </a:ln>
+        </p:spPr>
+        <p:style>
+          <a:lnRef idx="1">
+            <a:schemeClr val="accent1"/>
+          </a:lnRef>
+          <a:fillRef idx="0">
+            <a:schemeClr val="accent1"/>
+          </a:fillRef>
+          <a:effectRef idx="0">
+            <a:schemeClr val="accent1"/>
+          </a:effectRef>
+          <a:fontRef idx="minor">
+            <a:schemeClr val="tx1"/>
+          </a:fontRef>
+        </p:style>
+      </p:cxnSp>
+      <p:cxnSp>
+        <p:nvCxnSpPr>
+          <p:cNvPr id="16" name="Conector recto 15">
+            <a:extLst>
+              <a:ext uri="{FF2B5EF4-FFF2-40B4-BE49-F238E27FC236}">
+                <a16:creationId xmlns:a16="http://schemas.microsoft.com/office/drawing/2014/main" id="{717F7E19-C91C-F936-ED6D-4947FF7B41DB}"/>
+              </a:ext>
+            </a:extLst>
+          </p:cNvPr>
+          <p:cNvCxnSpPr>
+            <a:cxnSpLocks/>
+          </p:cNvCxnSpPr>
+          <p:nvPr/>
+        </p:nvCxnSpPr>
+        <p:spPr>
+          <a:xfrm>
+            <a:off x="7135917" y="5622720"/>
+            <a:ext cx="1595330" cy="348572"/>
+          </a:xfrm>
+          <a:prstGeom prst="line">
+            <a:avLst/>
+          </a:prstGeom>
+        </p:spPr>
+        <p:style>
+          <a:lnRef idx="1">
+            <a:schemeClr val="accent1"/>
+          </a:lnRef>
+          <a:fillRef idx="0">
+            <a:schemeClr val="accent1"/>
+          </a:fillRef>
+          <a:effectRef idx="0">
+            <a:schemeClr val="accent1"/>
+          </a:effectRef>
+          <a:fontRef idx="minor">
+            <a:schemeClr val="tx1"/>
+          </a:fontRef>
+        </p:style>
+      </p:cxnSp>
     </p:spTree>
     <p:extLst>
       <p:ext uri="{BB962C8B-B14F-4D97-AF65-F5344CB8AC3E}">
@@ -5266,10 +8494,322 @@
   <p:clrMapOvr>
     <a:masterClrMapping/>
   </p:clrMapOvr>
+  <p:timing>
+    <p:tnLst>
+      <p:par>
+        <p:cTn id="1" dur="indefinite" restart="never" nodeType="tmRoot">
+          <p:childTnLst>
+            <p:seq concurrent="1" nextAc="seek">
+              <p:cTn id="2" dur="indefinite" nodeType="mainSeq">
+                <p:childTnLst>
+                  <p:par>
+                    <p:cTn id="3" fill="hold">
+                      <p:stCondLst>
+                        <p:cond delay="indefinite"/>
+                      </p:stCondLst>
+                      <p:childTnLst>
+                        <p:par>
+                          <p:cTn id="4" fill="hold">
+                            <p:stCondLst>
+                              <p:cond delay="0"/>
+                            </p:stCondLst>
+                            <p:childTnLst>
+                              <p:par>
+                                <p:cTn id="5" presetID="1" presetClass="entr" presetSubtype="0" fill="hold" grpId="0" nodeType="clickEffect">
+                                  <p:stCondLst>
+                                    <p:cond delay="0"/>
+                                  </p:stCondLst>
+                                  <p:childTnLst>
+                                    <p:set>
+                                      <p:cBhvr>
+                                        <p:cTn id="6" dur="1" fill="hold">
+                                          <p:stCondLst>
+                                            <p:cond delay="0"/>
+                                          </p:stCondLst>
+                                        </p:cTn>
+                                        <p:tgtEl>
+                                          <p:spTgt spid="8">
+                                            <p:txEl>
+                                              <p:pRg st="1" end="1"/>
+                                            </p:txEl>
+                                          </p:spTgt>
+                                        </p:tgtEl>
+                                        <p:attrNameLst>
+                                          <p:attrName>style.visibility</p:attrName>
+                                        </p:attrNameLst>
+                                      </p:cBhvr>
+                                      <p:to>
+                                        <p:strVal val="visible"/>
+                                      </p:to>
+                                    </p:set>
+                                  </p:childTnLst>
+                                </p:cTn>
+                              </p:par>
+                            </p:childTnLst>
+                          </p:cTn>
+                        </p:par>
+                      </p:childTnLst>
+                    </p:cTn>
+                  </p:par>
+                  <p:par>
+                    <p:cTn id="7" fill="hold">
+                      <p:stCondLst>
+                        <p:cond delay="indefinite"/>
+                      </p:stCondLst>
+                      <p:childTnLst>
+                        <p:par>
+                          <p:cTn id="8" fill="hold">
+                            <p:stCondLst>
+                              <p:cond delay="0"/>
+                            </p:stCondLst>
+                            <p:childTnLst>
+                              <p:par>
+                                <p:cTn id="9" presetID="1" presetClass="entr" presetSubtype="0" fill="hold" grpId="0" nodeType="clickEffect">
+                                  <p:stCondLst>
+                                    <p:cond delay="0"/>
+                                  </p:stCondLst>
+                                  <p:childTnLst>
+                                    <p:set>
+                                      <p:cBhvr>
+                                        <p:cTn id="10" dur="1" fill="hold">
+                                          <p:stCondLst>
+                                            <p:cond delay="0"/>
+                                          </p:stCondLst>
+                                        </p:cTn>
+                                        <p:tgtEl>
+                                          <p:spTgt spid="8">
+                                            <p:txEl>
+                                              <p:pRg st="2" end="2"/>
+                                            </p:txEl>
+                                          </p:spTgt>
+                                        </p:tgtEl>
+                                        <p:attrNameLst>
+                                          <p:attrName>style.visibility</p:attrName>
+                                        </p:attrNameLst>
+                                      </p:cBhvr>
+                                      <p:to>
+                                        <p:strVal val="visible"/>
+                                      </p:to>
+                                    </p:set>
+                                  </p:childTnLst>
+                                </p:cTn>
+                              </p:par>
+                            </p:childTnLst>
+                          </p:cTn>
+                        </p:par>
+                      </p:childTnLst>
+                    </p:cTn>
+                  </p:par>
+                  <p:par>
+                    <p:cTn id="11" fill="hold">
+                      <p:stCondLst>
+                        <p:cond delay="indefinite"/>
+                      </p:stCondLst>
+                      <p:childTnLst>
+                        <p:par>
+                          <p:cTn id="12" fill="hold">
+                            <p:stCondLst>
+                              <p:cond delay="0"/>
+                            </p:stCondLst>
+                            <p:childTnLst>
+                              <p:par>
+                                <p:cTn id="13" presetID="1" presetClass="entr" presetSubtype="0" fill="hold" grpId="0" nodeType="clickEffect">
+                                  <p:stCondLst>
+                                    <p:cond delay="0"/>
+                                  </p:stCondLst>
+                                  <p:childTnLst>
+                                    <p:set>
+                                      <p:cBhvr>
+                                        <p:cTn id="14" dur="1" fill="hold">
+                                          <p:stCondLst>
+                                            <p:cond delay="0"/>
+                                          </p:stCondLst>
+                                        </p:cTn>
+                                        <p:tgtEl>
+                                          <p:spTgt spid="3"/>
+                                        </p:tgtEl>
+                                        <p:attrNameLst>
+                                          <p:attrName>style.visibility</p:attrName>
+                                        </p:attrNameLst>
+                                      </p:cBhvr>
+                                      <p:to>
+                                        <p:strVal val="visible"/>
+                                      </p:to>
+                                    </p:set>
+                                  </p:childTnLst>
+                                </p:cTn>
+                              </p:par>
+                              <p:par>
+                                <p:cTn id="15" presetID="1" presetClass="entr" presetSubtype="0" fill="hold" nodeType="withEffect">
+                                  <p:stCondLst>
+                                    <p:cond delay="0"/>
+                                  </p:stCondLst>
+                                  <p:childTnLst>
+                                    <p:set>
+                                      <p:cBhvr>
+                                        <p:cTn id="16" dur="1" fill="hold">
+                                          <p:stCondLst>
+                                            <p:cond delay="0"/>
+                                          </p:stCondLst>
+                                        </p:cTn>
+                                        <p:tgtEl>
+                                          <p:spTgt spid="7"/>
+                                        </p:tgtEl>
+                                        <p:attrNameLst>
+                                          <p:attrName>style.visibility</p:attrName>
+                                        </p:attrNameLst>
+                                      </p:cBhvr>
+                                      <p:to>
+                                        <p:strVal val="visible"/>
+                                      </p:to>
+                                    </p:set>
+                                  </p:childTnLst>
+                                </p:cTn>
+                              </p:par>
+                              <p:par>
+                                <p:cTn id="17" presetID="1" presetClass="entr" presetSubtype="0" fill="hold" nodeType="withEffect">
+                                  <p:stCondLst>
+                                    <p:cond delay="0"/>
+                                  </p:stCondLst>
+                                  <p:childTnLst>
+                                    <p:set>
+                                      <p:cBhvr>
+                                        <p:cTn id="18" dur="1" fill="hold">
+                                          <p:stCondLst>
+                                            <p:cond delay="0"/>
+                                          </p:stCondLst>
+                                        </p:cTn>
+                                        <p:tgtEl>
+                                          <p:spTgt spid="16"/>
+                                        </p:tgtEl>
+                                        <p:attrNameLst>
+                                          <p:attrName>style.visibility</p:attrName>
+                                        </p:attrNameLst>
+                                      </p:cBhvr>
+                                      <p:to>
+                                        <p:strVal val="visible"/>
+                                      </p:to>
+                                    </p:set>
+                                  </p:childTnLst>
+                                </p:cTn>
+                              </p:par>
+                              <p:par>
+                                <p:cTn id="19" presetID="1" presetClass="entr" presetSubtype="0" fill="hold" nodeType="withEffect">
+                                  <p:stCondLst>
+                                    <p:cond delay="0"/>
+                                  </p:stCondLst>
+                                  <p:childTnLst>
+                                    <p:set>
+                                      <p:cBhvr>
+                                        <p:cTn id="20" dur="1" fill="hold">
+                                          <p:stCondLst>
+                                            <p:cond delay="0"/>
+                                          </p:stCondLst>
+                                        </p:cTn>
+                                        <p:tgtEl>
+                                          <p:spTgt spid="10"/>
+                                        </p:tgtEl>
+                                        <p:attrNameLst>
+                                          <p:attrName>style.visibility</p:attrName>
+                                        </p:attrNameLst>
+                                      </p:cBhvr>
+                                      <p:to>
+                                        <p:strVal val="visible"/>
+                                      </p:to>
+                                    </p:set>
+                                  </p:childTnLst>
+                                </p:cTn>
+                              </p:par>
+                              <p:par>
+                                <p:cTn id="21" presetID="1" presetClass="entr" presetSubtype="0" fill="hold" nodeType="withEffect">
+                                  <p:stCondLst>
+                                    <p:cond delay="0"/>
+                                  </p:stCondLst>
+                                  <p:childTnLst>
+                                    <p:set>
+                                      <p:cBhvr>
+                                        <p:cTn id="22" dur="1" fill="hold">
+                                          <p:stCondLst>
+                                            <p:cond delay="0"/>
+                                          </p:stCondLst>
+                                        </p:cTn>
+                                        <p:tgtEl>
+                                          <p:spTgt spid="9"/>
+                                        </p:tgtEl>
+                                        <p:attrNameLst>
+                                          <p:attrName>style.visibility</p:attrName>
+                                        </p:attrNameLst>
+                                      </p:cBhvr>
+                                      <p:to>
+                                        <p:strVal val="visible"/>
+                                      </p:to>
+                                    </p:set>
+                                  </p:childTnLst>
+                                </p:cTn>
+                              </p:par>
+                              <p:par>
+                                <p:cTn id="23" presetID="1" presetClass="entr" presetSubtype="0" fill="hold" nodeType="withEffect">
+                                  <p:stCondLst>
+                                    <p:cond delay="0"/>
+                                  </p:stCondLst>
+                                  <p:childTnLst>
+                                    <p:set>
+                                      <p:cBhvr>
+                                        <p:cTn id="24" dur="1" fill="hold">
+                                          <p:stCondLst>
+                                            <p:cond delay="0"/>
+                                          </p:stCondLst>
+                                        </p:cTn>
+                                        <p:tgtEl>
+                                          <p:spTgt spid="14"/>
+                                        </p:tgtEl>
+                                        <p:attrNameLst>
+                                          <p:attrName>style.visibility</p:attrName>
+                                        </p:attrNameLst>
+                                      </p:cBhvr>
+                                      <p:to>
+                                        <p:strVal val="visible"/>
+                                      </p:to>
+                                    </p:set>
+                                  </p:childTnLst>
+                                </p:cTn>
+                              </p:par>
+                            </p:childTnLst>
+                          </p:cTn>
+                        </p:par>
+                      </p:childTnLst>
+                    </p:cTn>
+                  </p:par>
+                </p:childTnLst>
+              </p:cTn>
+              <p:prevCondLst>
+                <p:cond evt="onPrev" delay="0">
+                  <p:tgtEl>
+                    <p:sldTgt/>
+                  </p:tgtEl>
+                </p:cond>
+              </p:prevCondLst>
+              <p:nextCondLst>
+                <p:cond evt="onNext" delay="0">
+                  <p:tgtEl>
+                    <p:sldTgt/>
+                  </p:tgtEl>
+                </p:cond>
+              </p:nextCondLst>
+            </p:seq>
+          </p:childTnLst>
+        </p:cTn>
+      </p:par>
+    </p:tnLst>
+    <p:bldLst>
+      <p:bldP spid="8" grpId="0" uiExpand="1" build="p"/>
+      <p:bldP spid="3" grpId="0"/>
+    </p:bldLst>
+  </p:timing>
 </p:sld>
 </file>
 
-<file path=ppt/slides/slide13.xml><?xml version="1.0" encoding="utf-8"?>
+<file path=ppt/slides/slide14.xml><?xml version="1.0" encoding="utf-8"?>
 <p:sld xmlns:a="http://schemas.openxmlformats.org/drawingml/2006/main" xmlns:r="http://schemas.openxmlformats.org/officeDocument/2006/relationships" xmlns:p="http://schemas.openxmlformats.org/presentationml/2006/main">
   <p:cSld>
     <p:bg>
@@ -5596,8 +9136,8 @@
         </p:nvSpPr>
         <p:spPr>
           <a:xfrm>
-            <a:off x="1097280" y="2023963"/>
-            <a:ext cx="10058400" cy="3951562"/>
+            <a:off x="1744134" y="2141328"/>
+            <a:ext cx="9411546" cy="3951562"/>
           </a:xfrm>
         </p:spPr>
         <p:txBody>
@@ -5636,7 +9176,7 @@
                   <a:schemeClr val="tx1"/>
                 </a:solidFill>
               </a:rPr>
-              <a:t>General model</a:t>
+              <a:t>Background: Birth-death model &amp; Prisoner’s dilemma game </a:t>
             </a:r>
           </a:p>
           <a:p>
@@ -5653,7 +9193,7 @@
                   <a:schemeClr val="tx1"/>
                 </a:solidFill>
               </a:rPr>
-              <a:t>Prisoner’s dilemma game</a:t>
+              <a:t>Model modification</a:t>
             </a:r>
           </a:p>
           <a:p>
@@ -5670,7 +9210,7 @@
                   <a:schemeClr val="tx1"/>
                 </a:solidFill>
               </a:rPr>
-              <a:t>Result: Overshoot and transient increase of cooperation</a:t>
+              <a:t>Result: Dynamics</a:t>
             </a:r>
           </a:p>
           <a:p>
@@ -5760,7 +9300,7 @@
           <p:nvPr/>
         </p:nvPicPr>
         <p:blipFill>
-          <a:blip r:embed="rId2"/>
+          <a:blip r:embed="rId3"/>
           <a:srcRect t="20213"/>
           <a:stretch>
             <a:fillRect/>
@@ -6147,7 +9687,7 @@
           <p:nvPr/>
         </p:nvPicPr>
         <p:blipFill>
-          <a:blip r:embed="rId3"/>
+          <a:blip r:embed="rId4"/>
           <a:srcRect t="47840"/>
           <a:stretch>
             <a:fillRect/>
@@ -6178,7 +9718,7 @@
           <p:nvPr/>
         </p:nvPicPr>
         <p:blipFill>
-          <a:blip r:embed="rId4"/>
+          <a:blip r:embed="rId5"/>
           <a:srcRect t="49654"/>
           <a:stretch>
             <a:fillRect/>
@@ -6254,7 +9794,7 @@
           <p:nvPr/>
         </p:nvPicPr>
         <p:blipFill>
-          <a:blip r:embed="rId3"/>
+          <a:blip r:embed="rId4"/>
           <a:srcRect b="47840"/>
           <a:stretch>
             <a:fillRect/>
@@ -6285,7 +9825,7 @@
           <p:nvPr/>
         </p:nvPicPr>
         <p:blipFill>
-          <a:blip r:embed="rId4"/>
+          <a:blip r:embed="rId5"/>
           <a:srcRect b="49654"/>
           <a:stretch>
             <a:fillRect/>
@@ -7342,7 +10882,7 @@
         </p:blipFill>
         <p:spPr>
           <a:xfrm>
-            <a:off x="2666533" y="4415432"/>
+            <a:off x="2666532" y="4404178"/>
             <a:ext cx="7486997" cy="693240"/>
           </a:xfrm>
           <a:prstGeom prst="rect">
@@ -7503,7 +11043,7 @@
           <p:nvPr/>
         </p:nvPicPr>
         <p:blipFill>
-          <a:blip r:embed="rId2"/>
+          <a:blip r:embed="rId3"/>
           <a:srcRect t="20213"/>
           <a:stretch>
             <a:fillRect/>
@@ -7719,7 +11259,7 @@
           <p:nvPr/>
         </p:nvPicPr>
         <p:blipFill>
-          <a:blip r:embed="rId3"/>
+          <a:blip r:embed="rId4"/>
           <a:stretch>
             <a:fillRect/>
           </a:stretch>
@@ -7749,7 +11289,7 @@
           <p:nvPr/>
         </p:nvPicPr>
         <p:blipFill>
-          <a:blip r:embed="rId4"/>
+          <a:blip r:embed="rId5"/>
           <a:stretch>
             <a:fillRect/>
           </a:stretch>
@@ -7779,7 +11319,7 @@
           <p:nvPr/>
         </p:nvPicPr>
         <p:blipFill>
-          <a:blip r:embed="rId5"/>
+          <a:blip r:embed="rId6"/>
           <a:stretch>
             <a:fillRect/>
           </a:stretch>
@@ -7809,7 +11349,7 @@
           <p:nvPr/>
         </p:nvPicPr>
         <p:blipFill>
-          <a:blip r:embed="rId6"/>
+          <a:blip r:embed="rId7"/>
           <a:stretch>
             <a:fillRect/>
           </a:stretch>
@@ -8022,7 +11562,7 @@
           <p:nvPr/>
         </p:nvPicPr>
         <p:blipFill>
-          <a:blip r:embed="rId2"/>
+          <a:blip r:embed="rId3"/>
           <a:srcRect t="20213"/>
           <a:stretch>
             <a:fillRect/>
@@ -8197,14 +11737,14 @@
           <p:nvPr/>
         </p:nvPicPr>
         <p:blipFill>
-          <a:blip r:embed="rId3"/>
+          <a:blip r:embed="rId4"/>
           <a:stretch>
             <a:fillRect/>
           </a:stretch>
         </p:blipFill>
         <p:spPr>
           <a:xfrm>
-            <a:off x="1036320" y="2095306"/>
+            <a:off x="2723687" y="3016408"/>
             <a:ext cx="1871955" cy="1247970"/>
           </a:xfrm>
           <a:prstGeom prst="rect">
@@ -8227,14 +11767,14 @@
           <p:nvPr/>
         </p:nvPicPr>
         <p:blipFill>
-          <a:blip r:embed="rId4"/>
+          <a:blip r:embed="rId5"/>
           <a:stretch>
             <a:fillRect/>
           </a:stretch>
         </p:blipFill>
         <p:spPr>
           <a:xfrm>
-            <a:off x="4338500" y="2783071"/>
+            <a:off x="6679364" y="2987729"/>
             <a:ext cx="3514999" cy="1305327"/>
           </a:xfrm>
           <a:prstGeom prst="rect">
@@ -8257,14 +11797,14 @@
           <p:nvPr/>
         </p:nvPicPr>
         <p:blipFill>
-          <a:blip r:embed="rId5"/>
+          <a:blip r:embed="rId6"/>
           <a:stretch>
             <a:fillRect/>
           </a:stretch>
         </p:blipFill>
         <p:spPr>
           <a:xfrm>
-            <a:off x="4138201" y="4427544"/>
+            <a:off x="7068315" y="4632202"/>
             <a:ext cx="2819794" cy="362001"/>
           </a:xfrm>
           <a:prstGeom prst="rect">
@@ -8287,14 +11827,14 @@
           <p:nvPr/>
         </p:nvPicPr>
         <p:blipFill>
-          <a:blip r:embed="rId6"/>
+          <a:blip r:embed="rId7"/>
           <a:stretch>
             <a:fillRect/>
           </a:stretch>
         </p:blipFill>
         <p:spPr>
           <a:xfrm>
-            <a:off x="1036319" y="3660978"/>
+            <a:off x="2654622" y="4454484"/>
             <a:ext cx="2469065" cy="1002794"/>
           </a:xfrm>
           <a:prstGeom prst="rect">
@@ -8302,6 +11842,151 @@
           </a:prstGeom>
         </p:spPr>
       </p:pic>
+      <p:pic>
+        <p:nvPicPr>
+          <p:cNvPr id="8" name="Imagen 7">
+            <a:extLst>
+              <a:ext uri="{FF2B5EF4-FFF2-40B4-BE49-F238E27FC236}">
+                <a16:creationId xmlns:a16="http://schemas.microsoft.com/office/drawing/2014/main" id="{553BE334-4F7C-F20F-9822-EC30A15C21FD}"/>
+              </a:ext>
+            </a:extLst>
+          </p:cNvPr>
+          <p:cNvPicPr>
+            <a:picLocks noChangeAspect="1"/>
+          </p:cNvPicPr>
+          <p:nvPr/>
+        </p:nvPicPr>
+        <p:blipFill>
+          <a:blip r:embed="rId8"/>
+          <a:stretch>
+            <a:fillRect/>
+          </a:stretch>
+        </p:blipFill>
+        <p:spPr>
+          <a:xfrm>
+            <a:off x="1128127" y="2168797"/>
+            <a:ext cx="1453528" cy="575022"/>
+          </a:xfrm>
+          <a:prstGeom prst="rect">
+            <a:avLst/>
+          </a:prstGeom>
+        </p:spPr>
+      </p:pic>
+      <p:pic>
+        <p:nvPicPr>
+          <p:cNvPr id="11" name="Imagen 10">
+            <a:extLst>
+              <a:ext uri="{FF2B5EF4-FFF2-40B4-BE49-F238E27FC236}">
+                <a16:creationId xmlns:a16="http://schemas.microsoft.com/office/drawing/2014/main" id="{27F69892-3D55-6B57-45F8-9D5A130025AD}"/>
+              </a:ext>
+            </a:extLst>
+          </p:cNvPr>
+          <p:cNvPicPr>
+            <a:picLocks noChangeAspect="1"/>
+          </p:cNvPicPr>
+          <p:nvPr/>
+        </p:nvPicPr>
+        <p:blipFill>
+          <a:blip r:embed="rId9"/>
+          <a:srcRect l="13376" t="-7402"/>
+          <a:stretch>
+            <a:fillRect/>
+          </a:stretch>
+        </p:blipFill>
+        <p:spPr>
+          <a:xfrm>
+            <a:off x="3118104" y="2118567"/>
+            <a:ext cx="7813921" cy="284950"/>
+          </a:xfrm>
+          <a:prstGeom prst="rect">
+            <a:avLst/>
+          </a:prstGeom>
+        </p:spPr>
+      </p:pic>
+      <p:cxnSp>
+        <p:nvCxnSpPr>
+          <p:cNvPr id="15" name="Conector recto de flecha 14">
+            <a:extLst>
+              <a:ext uri="{FF2B5EF4-FFF2-40B4-BE49-F238E27FC236}">
+                <a16:creationId xmlns:a16="http://schemas.microsoft.com/office/drawing/2014/main" id="{1B91AE1C-6E10-1C9D-F16F-BF6665164B0B}"/>
+              </a:ext>
+            </a:extLst>
+          </p:cNvPr>
+          <p:cNvCxnSpPr/>
+          <p:nvPr/>
+        </p:nvCxnSpPr>
+        <p:spPr>
+          <a:xfrm>
+            <a:off x="2581655" y="2276856"/>
+            <a:ext cx="445009" cy="0"/>
+          </a:xfrm>
+          <a:prstGeom prst="straightConnector1">
+            <a:avLst/>
+          </a:prstGeom>
+          <a:ln>
+            <a:tailEnd type="triangle"/>
+          </a:ln>
+        </p:spPr>
+        <p:style>
+          <a:lnRef idx="1">
+            <a:schemeClr val="accent1"/>
+          </a:lnRef>
+          <a:fillRef idx="0">
+            <a:schemeClr val="accent1"/>
+          </a:fillRef>
+          <a:effectRef idx="0">
+            <a:schemeClr val="accent1"/>
+          </a:effectRef>
+          <a:fontRef idx="minor">
+            <a:schemeClr val="tx1"/>
+          </a:fontRef>
+        </p:style>
+      </p:cxnSp>
+      <p:sp>
+        <p:nvSpPr>
+          <p:cNvPr id="3" name="CuadroTexto 2">
+            <a:extLst>
+              <a:ext uri="{FF2B5EF4-FFF2-40B4-BE49-F238E27FC236}">
+                <a16:creationId xmlns:a16="http://schemas.microsoft.com/office/drawing/2014/main" id="{8F2DCF7D-DA33-322D-012E-3A0AC8A75CA3}"/>
+              </a:ext>
+            </a:extLst>
+          </p:cNvPr>
+          <p:cNvSpPr txBox="1"/>
+          <p:nvPr/>
+        </p:nvSpPr>
+        <p:spPr>
+          <a:xfrm>
+            <a:off x="7068315" y="4955881"/>
+            <a:ext cx="3004873" cy="506292"/>
+          </a:xfrm>
+          <a:prstGeom prst="rect">
+            <a:avLst/>
+          </a:prstGeom>
+          <a:noFill/>
+        </p:spPr>
+        <p:txBody>
+          <a:bodyPr wrap="square">
+            <a:spAutoFit/>
+          </a:bodyPr>
+          <a:lstStyle/>
+          <a:p>
+            <a:pPr algn="just">
+              <a:lnSpc>
+                <a:spcPct val="150000"/>
+              </a:lnSpc>
+            </a:pPr>
+            <a:r>
+              <a:rPr lang="en-US" sz="2000" dirty="0">
+                <a:solidFill>
+                  <a:schemeClr val="tx1"/>
+                </a:solidFill>
+              </a:rPr>
+              <a:t>Defectors have advantage</a:t>
+            </a:r>
+            <a:endParaRPr lang="en-US" sz="2000" dirty="0"/>
+          </a:p>
+        </p:txBody>
+      </p:sp>
     </p:spTree>
     <p:extLst>
       <p:ext uri="{BB962C8B-B14F-4D97-AF65-F5344CB8AC3E}">
@@ -8312,6 +11997,228 @@
   <p:clrMapOvr>
     <a:masterClrMapping/>
   </p:clrMapOvr>
+  <p:timing>
+    <p:tnLst>
+      <p:par>
+        <p:cTn id="1" dur="indefinite" restart="never" nodeType="tmRoot">
+          <p:childTnLst>
+            <p:seq concurrent="1" nextAc="seek">
+              <p:cTn id="2" dur="indefinite" nodeType="mainSeq">
+                <p:childTnLst>
+                  <p:par>
+                    <p:cTn id="3" fill="hold">
+                      <p:stCondLst>
+                        <p:cond delay="indefinite"/>
+                      </p:stCondLst>
+                      <p:childTnLst>
+                        <p:par>
+                          <p:cTn id="4" fill="hold">
+                            <p:stCondLst>
+                              <p:cond delay="0"/>
+                            </p:stCondLst>
+                            <p:childTnLst>
+                              <p:par>
+                                <p:cTn id="5" presetID="1" presetClass="entr" presetSubtype="0" fill="hold" nodeType="clickEffect">
+                                  <p:stCondLst>
+                                    <p:cond delay="0"/>
+                                  </p:stCondLst>
+                                  <p:childTnLst>
+                                    <p:set>
+                                      <p:cBhvr>
+                                        <p:cTn id="6" dur="1" fill="hold">
+                                          <p:stCondLst>
+                                            <p:cond delay="0"/>
+                                          </p:stCondLst>
+                                        </p:cTn>
+                                        <p:tgtEl>
+                                          <p:spTgt spid="7"/>
+                                        </p:tgtEl>
+                                        <p:attrNameLst>
+                                          <p:attrName>style.visibility</p:attrName>
+                                        </p:attrNameLst>
+                                      </p:cBhvr>
+                                      <p:to>
+                                        <p:strVal val="visible"/>
+                                      </p:to>
+                                    </p:set>
+                                  </p:childTnLst>
+                                </p:cTn>
+                              </p:par>
+                            </p:childTnLst>
+                          </p:cTn>
+                        </p:par>
+                      </p:childTnLst>
+                    </p:cTn>
+                  </p:par>
+                  <p:par>
+                    <p:cTn id="7" fill="hold">
+                      <p:stCondLst>
+                        <p:cond delay="indefinite"/>
+                      </p:stCondLst>
+                      <p:childTnLst>
+                        <p:par>
+                          <p:cTn id="8" fill="hold">
+                            <p:stCondLst>
+                              <p:cond delay="0"/>
+                            </p:stCondLst>
+                            <p:childTnLst>
+                              <p:par>
+                                <p:cTn id="9" presetID="1" presetClass="entr" presetSubtype="0" fill="hold" nodeType="clickEffect">
+                                  <p:stCondLst>
+                                    <p:cond delay="0"/>
+                                  </p:stCondLst>
+                                  <p:childTnLst>
+                                    <p:set>
+                                      <p:cBhvr>
+                                        <p:cTn id="10" dur="1" fill="hold">
+                                          <p:stCondLst>
+                                            <p:cond delay="0"/>
+                                          </p:stCondLst>
+                                        </p:cTn>
+                                        <p:tgtEl>
+                                          <p:spTgt spid="14"/>
+                                        </p:tgtEl>
+                                        <p:attrNameLst>
+                                          <p:attrName>style.visibility</p:attrName>
+                                        </p:attrNameLst>
+                                      </p:cBhvr>
+                                      <p:to>
+                                        <p:strVal val="visible"/>
+                                      </p:to>
+                                    </p:set>
+                                  </p:childTnLst>
+                                </p:cTn>
+                              </p:par>
+                              <p:par>
+                                <p:cTn id="11" presetID="1" presetClass="entr" presetSubtype="0" fill="hold" nodeType="withEffect">
+                                  <p:stCondLst>
+                                    <p:cond delay="0"/>
+                                  </p:stCondLst>
+                                  <p:childTnLst>
+                                    <p:set>
+                                      <p:cBhvr>
+                                        <p:cTn id="12" dur="1" fill="hold">
+                                          <p:stCondLst>
+                                            <p:cond delay="0"/>
+                                          </p:stCondLst>
+                                        </p:cTn>
+                                        <p:tgtEl>
+                                          <p:spTgt spid="10"/>
+                                        </p:tgtEl>
+                                        <p:attrNameLst>
+                                          <p:attrName>style.visibility</p:attrName>
+                                        </p:attrNameLst>
+                                      </p:cBhvr>
+                                      <p:to>
+                                        <p:strVal val="visible"/>
+                                      </p:to>
+                                    </p:set>
+                                  </p:childTnLst>
+                                </p:cTn>
+                              </p:par>
+                            </p:childTnLst>
+                          </p:cTn>
+                        </p:par>
+                      </p:childTnLst>
+                    </p:cTn>
+                  </p:par>
+                  <p:par>
+                    <p:cTn id="13" fill="hold">
+                      <p:stCondLst>
+                        <p:cond delay="indefinite"/>
+                      </p:stCondLst>
+                      <p:childTnLst>
+                        <p:par>
+                          <p:cTn id="14" fill="hold">
+                            <p:stCondLst>
+                              <p:cond delay="0"/>
+                            </p:stCondLst>
+                            <p:childTnLst>
+                              <p:par>
+                                <p:cTn id="15" presetID="1" presetClass="entr" presetSubtype="0" fill="hold" nodeType="clickEffect">
+                                  <p:stCondLst>
+                                    <p:cond delay="0"/>
+                                  </p:stCondLst>
+                                  <p:childTnLst>
+                                    <p:set>
+                                      <p:cBhvr>
+                                        <p:cTn id="16" dur="1" fill="hold">
+                                          <p:stCondLst>
+                                            <p:cond delay="0"/>
+                                          </p:stCondLst>
+                                        </p:cTn>
+                                        <p:tgtEl>
+                                          <p:spTgt spid="12"/>
+                                        </p:tgtEl>
+                                        <p:attrNameLst>
+                                          <p:attrName>style.visibility</p:attrName>
+                                        </p:attrNameLst>
+                                      </p:cBhvr>
+                                      <p:to>
+                                        <p:strVal val="visible"/>
+                                      </p:to>
+                                    </p:set>
+                                  </p:childTnLst>
+                                </p:cTn>
+                              </p:par>
+                              <p:par>
+                                <p:cTn id="17" presetID="1" presetClass="entr" presetSubtype="0" fill="hold" grpId="0" nodeType="withEffect">
+                                  <p:stCondLst>
+                                    <p:cond delay="0"/>
+                                  </p:stCondLst>
+                                  <p:childTnLst>
+                                    <p:set>
+                                      <p:cBhvr>
+                                        <p:cTn id="18" dur="1" fill="hold">
+                                          <p:stCondLst>
+                                            <p:cond delay="0"/>
+                                          </p:stCondLst>
+                                        </p:cTn>
+                                        <p:tgtEl>
+                                          <p:spTgt spid="3"/>
+                                        </p:tgtEl>
+                                        <p:attrNameLst>
+                                          <p:attrName>style.visibility</p:attrName>
+                                        </p:attrNameLst>
+                                      </p:cBhvr>
+                                      <p:to>
+                                        <p:strVal val="visible"/>
+                                      </p:to>
+                                    </p:set>
+                                  </p:childTnLst>
+                                </p:cTn>
+                              </p:par>
+                            </p:childTnLst>
+                          </p:cTn>
+                        </p:par>
+                      </p:childTnLst>
+                    </p:cTn>
+                  </p:par>
+                </p:childTnLst>
+              </p:cTn>
+              <p:prevCondLst>
+                <p:cond evt="onPrev" delay="0">
+                  <p:tgtEl>
+                    <p:sldTgt/>
+                  </p:tgtEl>
+                </p:cond>
+              </p:prevCondLst>
+              <p:nextCondLst>
+                <p:cond evt="onNext" delay="0">
+                  <p:tgtEl>
+                    <p:sldTgt/>
+                  </p:tgtEl>
+                </p:cond>
+              </p:nextCondLst>
+            </p:seq>
+          </p:childTnLst>
+        </p:cTn>
+      </p:par>
+    </p:tnLst>
+    <p:bldLst>
+      <p:bldP spid="3" grpId="0"/>
+    </p:bldLst>
+  </p:timing>
 </p:sld>
 </file>
 
@@ -8353,7 +12260,7 @@
           <p:nvPr/>
         </p:nvPicPr>
         <p:blipFill>
-          <a:blip r:embed="rId2"/>
+          <a:blip r:embed="rId3"/>
           <a:srcRect t="20213"/>
           <a:stretch>
             <a:fillRect/>
@@ -8513,36 +12420,6 @@
           </a:p>
         </p:txBody>
       </p:sp>
-      <p:pic>
-        <p:nvPicPr>
-          <p:cNvPr id="10" name="Imagen 9">
-            <a:extLst>
-              <a:ext uri="{FF2B5EF4-FFF2-40B4-BE49-F238E27FC236}">
-                <a16:creationId xmlns:a16="http://schemas.microsoft.com/office/drawing/2014/main" id="{191FA759-843C-28DD-4400-B9B232C59ED1}"/>
-              </a:ext>
-            </a:extLst>
-          </p:cNvPr>
-          <p:cNvPicPr>
-            <a:picLocks noChangeAspect="1"/>
-          </p:cNvPicPr>
-          <p:nvPr/>
-        </p:nvPicPr>
-        <p:blipFill>
-          <a:blip r:embed="rId3"/>
-          <a:stretch>
-            <a:fillRect/>
-          </a:stretch>
-        </p:blipFill>
-        <p:spPr>
-          <a:xfrm>
-            <a:off x="5262446" y="2919341"/>
-            <a:ext cx="1667108" cy="1019317"/>
-          </a:xfrm>
-          <a:prstGeom prst="rect">
-            <a:avLst/>
-          </a:prstGeom>
-        </p:spPr>
-      </p:pic>
       <p:pic>
         <p:nvPicPr>
           <p:cNvPr id="12" name="Imagen 11">
@@ -8565,8 +12442,397 @@
         </p:blipFill>
         <p:spPr>
           <a:xfrm>
-            <a:off x="4686087" y="4315898"/>
-            <a:ext cx="3048425" cy="1247949"/>
+            <a:off x="5213181" y="3527927"/>
+            <a:ext cx="2627127" cy="1075480"/>
+          </a:xfrm>
+          <a:prstGeom prst="rect">
+            <a:avLst/>
+          </a:prstGeom>
+        </p:spPr>
+      </p:pic>
+      <p:pic>
+        <p:nvPicPr>
+          <p:cNvPr id="7" name="Imagen 6">
+            <a:extLst>
+              <a:ext uri="{FF2B5EF4-FFF2-40B4-BE49-F238E27FC236}">
+                <a16:creationId xmlns:a16="http://schemas.microsoft.com/office/drawing/2014/main" id="{FA116629-93D1-0667-945A-941012840C6B}"/>
+              </a:ext>
+            </a:extLst>
+          </p:cNvPr>
+          <p:cNvPicPr>
+            <a:picLocks noChangeAspect="1"/>
+          </p:cNvPicPr>
+          <p:nvPr/>
+        </p:nvPicPr>
+        <p:blipFill>
+          <a:blip r:embed="rId5"/>
+          <a:stretch>
+            <a:fillRect/>
+          </a:stretch>
+        </p:blipFill>
+        <p:spPr>
+          <a:xfrm>
+            <a:off x="1214019" y="3428994"/>
+            <a:ext cx="3048425" cy="1287837"/>
+          </a:xfrm>
+          <a:prstGeom prst="rect">
+            <a:avLst/>
+          </a:prstGeom>
+        </p:spPr>
+      </p:pic>
+      <p:sp>
+        <p:nvSpPr>
+          <p:cNvPr id="3" name="Marcador de contenido 7">
+            <a:extLst>
+              <a:ext uri="{FF2B5EF4-FFF2-40B4-BE49-F238E27FC236}">
+                <a16:creationId xmlns:a16="http://schemas.microsoft.com/office/drawing/2014/main" id="{1E4423A4-9AB5-16FD-0D4D-2FCD66362483}"/>
+              </a:ext>
+            </a:extLst>
+          </p:cNvPr>
+          <p:cNvSpPr>
+            <a:spLocks noGrp="1"/>
+          </p:cNvSpPr>
+          <p:nvPr>
+            <p:ph idx="1"/>
+          </p:nvPr>
+        </p:nvSpPr>
+        <p:spPr>
+          <a:xfrm>
+            <a:off x="4892040" y="2896864"/>
+            <a:ext cx="3438144" cy="425964"/>
+          </a:xfrm>
+        </p:spPr>
+        <p:txBody>
+          <a:bodyPr>
+            <a:normAutofit/>
+          </a:bodyPr>
+          <a:lstStyle/>
+          <a:p>
+            <a:pPr algn="ctr"/>
+            <a:r>
+              <a:rPr lang="en-US" sz="2400" dirty="0">
+                <a:solidFill>
+                  <a:schemeClr val="tx1"/>
+                </a:solidFill>
+                <a:latin typeface="+mj-lt"/>
+              </a:rPr>
+              <a:t>Deterministic eq.</a:t>
+            </a:r>
+          </a:p>
+        </p:txBody>
+      </p:sp>
+      <p:cxnSp>
+        <p:nvCxnSpPr>
+          <p:cNvPr id="8" name="Conector recto de flecha 7">
+            <a:extLst>
+              <a:ext uri="{FF2B5EF4-FFF2-40B4-BE49-F238E27FC236}">
+                <a16:creationId xmlns:a16="http://schemas.microsoft.com/office/drawing/2014/main" id="{AD9517B9-5DA5-7C6F-B42A-B613EAA3CA96}"/>
+              </a:ext>
+            </a:extLst>
+          </p:cNvPr>
+          <p:cNvCxnSpPr/>
+          <p:nvPr/>
+        </p:nvCxnSpPr>
+        <p:spPr>
+          <a:xfrm>
+            <a:off x="4396036" y="4063880"/>
+            <a:ext cx="445009" cy="0"/>
+          </a:xfrm>
+          <a:prstGeom prst="straightConnector1">
+            <a:avLst/>
+          </a:prstGeom>
+          <a:ln>
+            <a:tailEnd type="triangle"/>
+          </a:ln>
+        </p:spPr>
+        <p:style>
+          <a:lnRef idx="1">
+            <a:schemeClr val="accent1"/>
+          </a:lnRef>
+          <a:fillRef idx="0">
+            <a:schemeClr val="accent1"/>
+          </a:fillRef>
+          <a:effectRef idx="0">
+            <a:schemeClr val="accent1"/>
+          </a:effectRef>
+          <a:fontRef idx="minor">
+            <a:schemeClr val="tx1"/>
+          </a:fontRef>
+        </p:style>
+      </p:cxnSp>
+      <p:sp>
+        <p:nvSpPr>
+          <p:cNvPr id="9" name="Abrir llave 8">
+            <a:extLst>
+              <a:ext uri="{FF2B5EF4-FFF2-40B4-BE49-F238E27FC236}">
+                <a16:creationId xmlns:a16="http://schemas.microsoft.com/office/drawing/2014/main" id="{CF562E5E-8E40-2700-E3E0-86C5528477B2}"/>
+              </a:ext>
+            </a:extLst>
+          </p:cNvPr>
+          <p:cNvSpPr/>
+          <p:nvPr/>
+        </p:nvSpPr>
+        <p:spPr>
+          <a:xfrm>
+            <a:off x="4902217" y="3497428"/>
+            <a:ext cx="317299" cy="1117482"/>
+          </a:xfrm>
+          <a:prstGeom prst="leftBrace">
+            <a:avLst/>
+          </a:prstGeom>
+          <a:ln w="19050"/>
+        </p:spPr>
+        <p:style>
+          <a:lnRef idx="1">
+            <a:schemeClr val="accent1"/>
+          </a:lnRef>
+          <a:fillRef idx="0">
+            <a:schemeClr val="accent1"/>
+          </a:fillRef>
+          <a:effectRef idx="0">
+            <a:schemeClr val="accent1"/>
+          </a:effectRef>
+          <a:fontRef idx="minor">
+            <a:schemeClr val="tx1"/>
+          </a:fontRef>
+        </p:style>
+        <p:txBody>
+          <a:bodyPr rtlCol="0" anchor="ctr"/>
+          <a:lstStyle/>
+          <a:p>
+            <a:pPr algn="ctr"/>
+            <a:endParaRPr lang="en-US"/>
+          </a:p>
+        </p:txBody>
+      </p:sp>
+      <mc:AlternateContent xmlns:mc="http://schemas.openxmlformats.org/markup-compatibility/2006">
+        <mc:Choice xmlns:a14="http://schemas.microsoft.com/office/drawing/2010/main" Requires="a14">
+          <p:sp>
+            <p:nvSpPr>
+              <p:cNvPr id="10" name="CuadroTexto 9">
+                <a:extLst>
+                  <a:ext uri="{FF2B5EF4-FFF2-40B4-BE49-F238E27FC236}">
+                    <a16:creationId xmlns:a16="http://schemas.microsoft.com/office/drawing/2014/main" id="{BBF40E13-0C20-C32A-E1FB-0994C80C19DC}"/>
+                  </a:ext>
+                </a:extLst>
+              </p:cNvPr>
+              <p:cNvSpPr txBox="1"/>
+              <p:nvPr/>
+            </p:nvSpPr>
+            <p:spPr>
+              <a:xfrm>
+                <a:off x="7840308" y="3355947"/>
+                <a:ext cx="4219690" cy="505523"/>
+              </a:xfrm>
+              <a:prstGeom prst="rect">
+                <a:avLst/>
+              </a:prstGeom>
+              <a:noFill/>
+            </p:spPr>
+            <p:txBody>
+              <a:bodyPr wrap="square">
+                <a:spAutoFit/>
+              </a:bodyPr>
+              <a:lstStyle/>
+              <a:p>
+                <a:pPr algn="just">
+                  <a:lnSpc>
+                    <a:spcPct val="150000"/>
+                  </a:lnSpc>
+                </a:pPr>
+                <a14:m>
+                  <m:oMath xmlns:m="http://schemas.openxmlformats.org/officeDocument/2006/math">
+                    <m:r>
+                      <a:rPr lang="es-ES" sz="2000" b="0" i="1" smtClean="0">
+                        <a:latin typeface="Cambria Math" panose="02040503050406030204" pitchFamily="18" charset="0"/>
+                      </a:rPr>
+                      <m:t>&lt;0</m:t>
+                    </m:r>
+                  </m:oMath>
+                </a14:m>
+                <a:r>
+                  <a:rPr lang="en-US" sz="2000" dirty="0"/>
+                  <a:t> Defectors have advantage</a:t>
+                </a:r>
+              </a:p>
+            </p:txBody>
+          </p:sp>
+        </mc:Choice>
+        <mc:Fallback>
+          <p:sp>
+            <p:nvSpPr>
+              <p:cNvPr id="10" name="CuadroTexto 9">
+                <a:extLst>
+                  <a:ext uri="{FF2B5EF4-FFF2-40B4-BE49-F238E27FC236}">
+                    <a16:creationId xmlns:a16="http://schemas.microsoft.com/office/drawing/2014/main" id="{BBF40E13-0C20-C32A-E1FB-0994C80C19DC}"/>
+                  </a:ext>
+                </a:extLst>
+              </p:cNvPr>
+              <p:cNvSpPr txBox="1">
+                <a:spLocks noRot="1" noChangeAspect="1" noMove="1" noResize="1" noEditPoints="1" noAdjustHandles="1" noChangeArrowheads="1" noChangeShapeType="1" noTextEdit="1"/>
+              </p:cNvSpPr>
+              <p:nvPr/>
+            </p:nvSpPr>
+            <p:spPr>
+              <a:xfrm>
+                <a:off x="7840308" y="3355947"/>
+                <a:ext cx="4219690" cy="505523"/>
+              </a:xfrm>
+              <a:prstGeom prst="rect">
+                <a:avLst/>
+              </a:prstGeom>
+              <a:blipFill>
+                <a:blip r:embed="rId6"/>
+                <a:stretch>
+                  <a:fillRect b="-21951"/>
+                </a:stretch>
+              </a:blipFill>
+            </p:spPr>
+            <p:txBody>
+              <a:bodyPr/>
+              <a:lstStyle/>
+              <a:p>
+                <a:r>
+                  <a:rPr lang="en-US">
+                    <a:noFill/>
+                  </a:rPr>
+                  <a:t> </a:t>
+                </a:r>
+              </a:p>
+            </p:txBody>
+          </p:sp>
+        </mc:Fallback>
+      </mc:AlternateContent>
+      <mc:AlternateContent xmlns:mc="http://schemas.openxmlformats.org/markup-compatibility/2006">
+        <mc:Choice xmlns:a14="http://schemas.microsoft.com/office/drawing/2010/main" Requires="a14">
+          <p:sp>
+            <p:nvSpPr>
+              <p:cNvPr id="11" name="CuadroTexto 10">
+                <a:extLst>
+                  <a:ext uri="{FF2B5EF4-FFF2-40B4-BE49-F238E27FC236}">
+                    <a16:creationId xmlns:a16="http://schemas.microsoft.com/office/drawing/2014/main" id="{D7C5E266-79F2-819D-203A-E393CD5B7935}"/>
+                  </a:ext>
+                </a:extLst>
+              </p:cNvPr>
+              <p:cNvSpPr txBox="1"/>
+              <p:nvPr/>
+            </p:nvSpPr>
+            <p:spPr>
+              <a:xfrm>
+                <a:off x="7840308" y="3889974"/>
+                <a:ext cx="4272444" cy="505523"/>
+              </a:xfrm>
+              <a:prstGeom prst="rect">
+                <a:avLst/>
+              </a:prstGeom>
+              <a:noFill/>
+            </p:spPr>
+            <p:txBody>
+              <a:bodyPr wrap="square">
+                <a:spAutoFit/>
+              </a:bodyPr>
+              <a:lstStyle/>
+              <a:p>
+                <a:pPr algn="just">
+                  <a:lnSpc>
+                    <a:spcPct val="150000"/>
+                  </a:lnSpc>
+                </a:pPr>
+                <a14:m>
+                  <m:oMath xmlns:m="http://schemas.openxmlformats.org/officeDocument/2006/math">
+                    <m:r>
+                      <a:rPr lang="en-US" sz="2000" i="1" smtClean="0">
+                        <a:latin typeface="Cambria Math" panose="02040503050406030204" pitchFamily="18" charset="0"/>
+                        <a:ea typeface="Cambria Math" panose="02040503050406030204" pitchFamily="18" charset="0"/>
+                      </a:rPr>
+                      <m:t>∝</m:t>
+                    </m:r>
+                    <m:r>
+                      <a:rPr lang="es-ES" sz="2000" b="0" i="1" smtClean="0">
+                        <a:latin typeface="Cambria Math" panose="02040503050406030204" pitchFamily="18" charset="0"/>
+                        <a:ea typeface="Cambria Math" panose="02040503050406030204" pitchFamily="18" charset="0"/>
+                      </a:rPr>
+                      <m:t>𝑥</m:t>
+                    </m:r>
+                  </m:oMath>
+                </a14:m>
+                <a:r>
+                  <a:rPr lang="en-US" sz="2000" dirty="0"/>
+                  <a:t> Overshoot?</a:t>
+                </a:r>
+              </a:p>
+            </p:txBody>
+          </p:sp>
+        </mc:Choice>
+        <mc:Fallback>
+          <p:sp>
+            <p:nvSpPr>
+              <p:cNvPr id="11" name="CuadroTexto 10">
+                <a:extLst>
+                  <a:ext uri="{FF2B5EF4-FFF2-40B4-BE49-F238E27FC236}">
+                    <a16:creationId xmlns:a16="http://schemas.microsoft.com/office/drawing/2014/main" id="{D7C5E266-79F2-819D-203A-E393CD5B7935}"/>
+                  </a:ext>
+                </a:extLst>
+              </p:cNvPr>
+              <p:cNvSpPr txBox="1">
+                <a:spLocks noRot="1" noChangeAspect="1" noMove="1" noResize="1" noEditPoints="1" noAdjustHandles="1" noChangeArrowheads="1" noChangeShapeType="1" noTextEdit="1"/>
+              </p:cNvSpPr>
+              <p:nvPr/>
+            </p:nvSpPr>
+            <p:spPr>
+              <a:xfrm>
+                <a:off x="7840308" y="3889974"/>
+                <a:ext cx="4272444" cy="505523"/>
+              </a:xfrm>
+              <a:prstGeom prst="rect">
+                <a:avLst/>
+              </a:prstGeom>
+              <a:blipFill>
+                <a:blip r:embed="rId7"/>
+                <a:stretch>
+                  <a:fillRect b="-20482"/>
+                </a:stretch>
+              </a:blipFill>
+            </p:spPr>
+            <p:txBody>
+              <a:bodyPr/>
+              <a:lstStyle/>
+              <a:p>
+                <a:r>
+                  <a:rPr lang="en-US">
+                    <a:noFill/>
+                  </a:rPr>
+                  <a:t> </a:t>
+                </a:r>
+              </a:p>
+            </p:txBody>
+          </p:sp>
+        </mc:Fallback>
+      </mc:AlternateContent>
+      <p:pic>
+        <p:nvPicPr>
+          <p:cNvPr id="15" name="Imagen 14">
+            <a:extLst>
+              <a:ext uri="{FF2B5EF4-FFF2-40B4-BE49-F238E27FC236}">
+                <a16:creationId xmlns:a16="http://schemas.microsoft.com/office/drawing/2014/main" id="{A722539C-53EC-4920-92AA-FFF10B272DDE}"/>
+              </a:ext>
+            </a:extLst>
+          </p:cNvPr>
+          <p:cNvPicPr>
+            <a:picLocks noChangeAspect="1"/>
+          </p:cNvPicPr>
+          <p:nvPr/>
+        </p:nvPicPr>
+        <p:blipFill>
+          <a:blip r:embed="rId8"/>
+          <a:stretch>
+            <a:fillRect/>
+          </a:stretch>
+        </p:blipFill>
+        <p:spPr>
+          <a:xfrm>
+            <a:off x="4698847" y="5097126"/>
+            <a:ext cx="2794305" cy="723826"/>
           </a:xfrm>
           <a:prstGeom prst="rect">
             <a:avLst/>
@@ -8583,6 +12849,289 @@
   <p:clrMapOvr>
     <a:masterClrMapping/>
   </p:clrMapOvr>
+  <p:timing>
+    <p:tnLst>
+      <p:par>
+        <p:cTn id="1" dur="indefinite" restart="never" nodeType="tmRoot">
+          <p:childTnLst>
+            <p:seq concurrent="1" nextAc="seek">
+              <p:cTn id="2" dur="indefinite" nodeType="mainSeq">
+                <p:childTnLst>
+                  <p:par>
+                    <p:cTn id="3" fill="hold">
+                      <p:stCondLst>
+                        <p:cond delay="indefinite"/>
+                      </p:stCondLst>
+                      <p:childTnLst>
+                        <p:par>
+                          <p:cTn id="4" fill="hold">
+                            <p:stCondLst>
+                              <p:cond delay="0"/>
+                            </p:stCondLst>
+                            <p:childTnLst>
+                              <p:par>
+                                <p:cTn id="5" presetID="1" presetClass="entr" presetSubtype="0" fill="hold" nodeType="clickEffect">
+                                  <p:stCondLst>
+                                    <p:cond delay="0"/>
+                                  </p:stCondLst>
+                                  <p:childTnLst>
+                                    <p:set>
+                                      <p:cBhvr>
+                                        <p:cTn id="6" dur="1" fill="hold">
+                                          <p:stCondLst>
+                                            <p:cond delay="0"/>
+                                          </p:stCondLst>
+                                        </p:cTn>
+                                        <p:tgtEl>
+                                          <p:spTgt spid="8"/>
+                                        </p:tgtEl>
+                                        <p:attrNameLst>
+                                          <p:attrName>style.visibility</p:attrName>
+                                        </p:attrNameLst>
+                                      </p:cBhvr>
+                                      <p:to>
+                                        <p:strVal val="visible"/>
+                                      </p:to>
+                                    </p:set>
+                                  </p:childTnLst>
+                                </p:cTn>
+                              </p:par>
+                              <p:par>
+                                <p:cTn id="7" presetID="1" presetClass="entr" presetSubtype="0" fill="hold" grpId="0" nodeType="withEffect">
+                                  <p:stCondLst>
+                                    <p:cond delay="0"/>
+                                  </p:stCondLst>
+                                  <p:childTnLst>
+                                    <p:set>
+                                      <p:cBhvr>
+                                        <p:cTn id="8" dur="1" fill="hold">
+                                          <p:stCondLst>
+                                            <p:cond delay="0"/>
+                                          </p:stCondLst>
+                                        </p:cTn>
+                                        <p:tgtEl>
+                                          <p:spTgt spid="9"/>
+                                        </p:tgtEl>
+                                        <p:attrNameLst>
+                                          <p:attrName>style.visibility</p:attrName>
+                                        </p:attrNameLst>
+                                      </p:cBhvr>
+                                      <p:to>
+                                        <p:strVal val="visible"/>
+                                      </p:to>
+                                    </p:set>
+                                  </p:childTnLst>
+                                </p:cTn>
+                              </p:par>
+                              <p:par>
+                                <p:cTn id="9" presetID="1" presetClass="entr" presetSubtype="0" fill="hold" nodeType="withEffect">
+                                  <p:stCondLst>
+                                    <p:cond delay="0"/>
+                                  </p:stCondLst>
+                                  <p:childTnLst>
+                                    <p:set>
+                                      <p:cBhvr>
+                                        <p:cTn id="10" dur="1" fill="hold">
+                                          <p:stCondLst>
+                                            <p:cond delay="0"/>
+                                          </p:stCondLst>
+                                        </p:cTn>
+                                        <p:tgtEl>
+                                          <p:spTgt spid="12"/>
+                                        </p:tgtEl>
+                                        <p:attrNameLst>
+                                          <p:attrName>style.visibility</p:attrName>
+                                        </p:attrNameLst>
+                                      </p:cBhvr>
+                                      <p:to>
+                                        <p:strVal val="visible"/>
+                                      </p:to>
+                                    </p:set>
+                                  </p:childTnLst>
+                                </p:cTn>
+                              </p:par>
+                              <p:par>
+                                <p:cTn id="11" presetID="1" presetClass="entr" presetSubtype="0" fill="hold" grpId="0" nodeType="withEffect">
+                                  <p:stCondLst>
+                                    <p:cond delay="0"/>
+                                  </p:stCondLst>
+                                  <p:childTnLst>
+                                    <p:set>
+                                      <p:cBhvr>
+                                        <p:cTn id="12" dur="1" fill="hold">
+                                          <p:stCondLst>
+                                            <p:cond delay="0"/>
+                                          </p:stCondLst>
+                                        </p:cTn>
+                                        <p:tgtEl>
+                                          <p:spTgt spid="3">
+                                            <p:txEl>
+                                              <p:pRg st="0" end="0"/>
+                                            </p:txEl>
+                                          </p:spTgt>
+                                        </p:tgtEl>
+                                        <p:attrNameLst>
+                                          <p:attrName>style.visibility</p:attrName>
+                                        </p:attrNameLst>
+                                      </p:cBhvr>
+                                      <p:to>
+                                        <p:strVal val="visible"/>
+                                      </p:to>
+                                    </p:set>
+                                  </p:childTnLst>
+                                </p:cTn>
+                              </p:par>
+                            </p:childTnLst>
+                          </p:cTn>
+                        </p:par>
+                      </p:childTnLst>
+                    </p:cTn>
+                  </p:par>
+                  <p:par>
+                    <p:cTn id="13" fill="hold">
+                      <p:stCondLst>
+                        <p:cond delay="indefinite"/>
+                      </p:stCondLst>
+                      <p:childTnLst>
+                        <p:par>
+                          <p:cTn id="14" fill="hold">
+                            <p:stCondLst>
+                              <p:cond delay="0"/>
+                            </p:stCondLst>
+                            <p:childTnLst>
+                              <p:par>
+                                <p:cTn id="15" presetID="1" presetClass="entr" presetSubtype="0" fill="hold" grpId="0" nodeType="clickEffect">
+                                  <p:stCondLst>
+                                    <p:cond delay="0"/>
+                                  </p:stCondLst>
+                                  <p:childTnLst>
+                                    <p:set>
+                                      <p:cBhvr>
+                                        <p:cTn id="16" dur="1" fill="hold">
+                                          <p:stCondLst>
+                                            <p:cond delay="0"/>
+                                          </p:stCondLst>
+                                        </p:cTn>
+                                        <p:tgtEl>
+                                          <p:spTgt spid="10"/>
+                                        </p:tgtEl>
+                                        <p:attrNameLst>
+                                          <p:attrName>style.visibility</p:attrName>
+                                        </p:attrNameLst>
+                                      </p:cBhvr>
+                                      <p:to>
+                                        <p:strVal val="visible"/>
+                                      </p:to>
+                                    </p:set>
+                                  </p:childTnLst>
+                                </p:cTn>
+                              </p:par>
+                              <p:par>
+                                <p:cTn id="17" presetID="1" presetClass="entr" presetSubtype="0" fill="hold" grpId="0" nodeType="withEffect">
+                                  <p:stCondLst>
+                                    <p:cond delay="0"/>
+                                  </p:stCondLst>
+                                  <p:childTnLst>
+                                    <p:set>
+                                      <p:cBhvr>
+                                        <p:cTn id="18" dur="1" fill="hold">
+                                          <p:stCondLst>
+                                            <p:cond delay="0"/>
+                                          </p:stCondLst>
+                                        </p:cTn>
+                                        <p:tgtEl>
+                                          <p:spTgt spid="11"/>
+                                        </p:tgtEl>
+                                        <p:attrNameLst>
+                                          <p:attrName>style.visibility</p:attrName>
+                                        </p:attrNameLst>
+                                      </p:cBhvr>
+                                      <p:to>
+                                        <p:strVal val="visible"/>
+                                      </p:to>
+                                    </p:set>
+                                  </p:childTnLst>
+                                </p:cTn>
+                              </p:par>
+                            </p:childTnLst>
+                          </p:cTn>
+                        </p:par>
+                      </p:childTnLst>
+                    </p:cTn>
+                  </p:par>
+                  <p:par>
+                    <p:cTn id="19" fill="hold">
+                      <p:stCondLst>
+                        <p:cond delay="indefinite"/>
+                      </p:stCondLst>
+                      <p:childTnLst>
+                        <p:par>
+                          <p:cTn id="20" fill="hold">
+                            <p:stCondLst>
+                              <p:cond delay="0"/>
+                            </p:stCondLst>
+                            <p:childTnLst>
+                              <p:par>
+                                <p:cTn id="21" presetID="1" presetClass="entr" presetSubtype="0" fill="hold" nodeType="clickEffect">
+                                  <p:stCondLst>
+                                    <p:cond delay="0"/>
+                                  </p:stCondLst>
+                                  <p:childTnLst>
+                                    <p:set>
+                                      <p:cBhvr>
+                                        <p:cTn id="22" dur="1" fill="hold">
+                                          <p:stCondLst>
+                                            <p:cond delay="0"/>
+                                          </p:stCondLst>
+                                        </p:cTn>
+                                        <p:tgtEl>
+                                          <p:spTgt spid="15"/>
+                                        </p:tgtEl>
+                                        <p:attrNameLst>
+                                          <p:attrName>style.visibility</p:attrName>
+                                        </p:attrNameLst>
+                                      </p:cBhvr>
+                                      <p:to>
+                                        <p:strVal val="visible"/>
+                                      </p:to>
+                                    </p:set>
+                                  </p:childTnLst>
+                                </p:cTn>
+                              </p:par>
+                            </p:childTnLst>
+                          </p:cTn>
+                        </p:par>
+                      </p:childTnLst>
+                    </p:cTn>
+                  </p:par>
+                </p:childTnLst>
+              </p:cTn>
+              <p:prevCondLst>
+                <p:cond evt="onPrev" delay="0">
+                  <p:tgtEl>
+                    <p:sldTgt/>
+                  </p:tgtEl>
+                </p:cond>
+              </p:prevCondLst>
+              <p:nextCondLst>
+                <p:cond evt="onNext" delay="0">
+                  <p:tgtEl>
+                    <p:sldTgt/>
+                  </p:tgtEl>
+                </p:cond>
+              </p:nextCondLst>
+            </p:seq>
+          </p:childTnLst>
+        </p:cTn>
+      </p:par>
+    </p:tnLst>
+    <p:bldLst>
+      <p:bldP spid="3" grpId="0" build="p"/>
+      <p:bldP spid="9" grpId="0" animBg="1"/>
+      <p:bldP spid="10" grpId="0"/>
+      <p:bldP spid="11" grpId="0"/>
+    </p:bldLst>
+  </p:timing>
 </p:sld>
 </file>
 
@@ -8705,7 +13254,7 @@
         <p:spPr>
           <a:xfrm>
             <a:off x="957071" y="765110"/>
-            <a:ext cx="10127695" cy="790872"/>
+            <a:ext cx="10198608" cy="790872"/>
           </a:xfrm>
         </p:spPr>
         <p:txBody>
@@ -8736,7 +13285,7 @@
             </a:extLst>
           </p:cNvPr>
           <p:cNvSpPr>
-            <a:spLocks/>
+            <a:spLocks noGrp="1" noRot="1" noMove="1" noResize="1" noEditPoints="1" noAdjustHandles="1" noChangeArrowheads="1" noChangeShapeType="1"/>
           </p:cNvSpPr>
           <p:nvPr/>
         </p:nvSpPr>
@@ -8779,8 +13328,16 @@
           <a:bodyPr rtlCol="0" anchor="ctr"/>
           <a:lstStyle/>
           <a:p>
-            <a:pPr algn="ctr"/>
-            <a:endParaRPr lang="en-US"/>
+            <a:pPr algn="just">
+              <a:lnSpc>
+                <a:spcPct val="150000"/>
+              </a:lnSpc>
+            </a:pPr>
+            <a:endParaRPr lang="en-US" dirty="0">
+              <a:solidFill>
+                <a:schemeClr val="tx1"/>
+              </a:solidFill>
+            </a:endParaRPr>
           </a:p>
         </p:txBody>
       </p:sp>
@@ -8860,6 +13417,198 @@
           </a:prstGeom>
         </p:spPr>
       </p:pic>
+      <p:sp>
+        <p:nvSpPr>
+          <p:cNvPr id="3" name="CuadroTexto 2">
+            <a:extLst>
+              <a:ext uri="{FF2B5EF4-FFF2-40B4-BE49-F238E27FC236}">
+                <a16:creationId xmlns:a16="http://schemas.microsoft.com/office/drawing/2014/main" id="{27366390-38D7-2815-8579-6A23B55D0A85}"/>
+              </a:ext>
+            </a:extLst>
+          </p:cNvPr>
+          <p:cNvSpPr txBox="1"/>
+          <p:nvPr/>
+        </p:nvSpPr>
+        <p:spPr>
+          <a:xfrm>
+            <a:off x="6736076" y="4448585"/>
+            <a:ext cx="4726133" cy="1295868"/>
+          </a:xfrm>
+          <a:prstGeom prst="rect">
+            <a:avLst/>
+          </a:prstGeom>
+          <a:noFill/>
+        </p:spPr>
+        <p:txBody>
+          <a:bodyPr wrap="square">
+            <a:spAutoFit/>
+          </a:bodyPr>
+          <a:lstStyle/>
+          <a:p>
+            <a:pPr algn="just">
+              <a:lnSpc>
+                <a:spcPct val="150000"/>
+              </a:lnSpc>
+            </a:pPr>
+            <a:r>
+              <a:rPr lang="en-US" dirty="0"/>
+              <a:t>(Fig1) Overshoot in N: When the initial fraction of cooperators is large enough, the population first grows. Then, selection reduces it.</a:t>
+            </a:r>
+          </a:p>
+        </p:txBody>
+      </p:sp>
+      <mc:AlternateContent xmlns:mc="http://schemas.openxmlformats.org/markup-compatibility/2006">
+        <mc:Choice xmlns:a14="http://schemas.microsoft.com/office/drawing/2010/main" Requires="a14">
+          <p:sp>
+            <p:nvSpPr>
+              <p:cNvPr id="8" name="CuadroTexto 7">
+                <a:extLst>
+                  <a:ext uri="{FF2B5EF4-FFF2-40B4-BE49-F238E27FC236}">
+                    <a16:creationId xmlns:a16="http://schemas.microsoft.com/office/drawing/2014/main" id="{FC70A29E-102A-422F-EB52-41D5B229B3DC}"/>
+                  </a:ext>
+                </a:extLst>
+              </p:cNvPr>
+              <p:cNvSpPr txBox="1"/>
+              <p:nvPr/>
+            </p:nvSpPr>
+            <p:spPr>
+              <a:xfrm>
+                <a:off x="6752723" y="5744453"/>
+                <a:ext cx="4726133" cy="464166"/>
+              </a:xfrm>
+              <a:prstGeom prst="rect">
+                <a:avLst/>
+              </a:prstGeom>
+              <a:noFill/>
+            </p:spPr>
+            <p:txBody>
+              <a:bodyPr wrap="square">
+                <a:spAutoFit/>
+              </a:bodyPr>
+              <a:lstStyle/>
+              <a:p>
+                <a:pPr algn="just">
+                  <a:lnSpc>
+                    <a:spcPct val="150000"/>
+                  </a:lnSpc>
+                </a:pPr>
+                <a:r>
+                  <a:rPr lang="en-US" dirty="0"/>
+                  <a:t>(Fig2) Smaller </a:t>
+                </a:r>
+                <a14:m>
+                  <m:oMath xmlns:m="http://schemas.openxmlformats.org/officeDocument/2006/math">
+                    <m:sSub>
+                      <m:sSubPr>
+                        <m:ctrlPr>
+                          <a:rPr lang="es-ES" b="0" i="1" smtClean="0">
+                            <a:latin typeface="Cambria Math" panose="02040503050406030204" pitchFamily="18" charset="0"/>
+                          </a:rPr>
+                        </m:ctrlPr>
+                      </m:sSubPr>
+                      <m:e>
+                        <m:r>
+                          <a:rPr lang="es-ES" b="0" i="1" smtClean="0">
+                            <a:latin typeface="Cambria Math" panose="02040503050406030204" pitchFamily="18" charset="0"/>
+                          </a:rPr>
+                          <m:t>𝑁</m:t>
+                        </m:r>
+                      </m:e>
+                      <m:sub>
+                        <m:r>
+                          <a:rPr lang="es-ES" b="0" i="1" smtClean="0">
+                            <a:latin typeface="Cambria Math" panose="02040503050406030204" pitchFamily="18" charset="0"/>
+                          </a:rPr>
+                          <m:t>0</m:t>
+                        </m:r>
+                      </m:sub>
+                    </m:sSub>
+                  </m:oMath>
+                </a14:m>
+                <a:r>
+                  <a:rPr lang="en-US" dirty="0"/>
+                  <a:t> are the more affected.</a:t>
+                </a:r>
+              </a:p>
+            </p:txBody>
+          </p:sp>
+        </mc:Choice>
+        <mc:Fallback>
+          <p:sp>
+            <p:nvSpPr>
+              <p:cNvPr id="8" name="CuadroTexto 7">
+                <a:extLst>
+                  <a:ext uri="{FF2B5EF4-FFF2-40B4-BE49-F238E27FC236}">
+                    <a16:creationId xmlns:a16="http://schemas.microsoft.com/office/drawing/2014/main" id="{FC70A29E-102A-422F-EB52-41D5B229B3DC}"/>
+                  </a:ext>
+                </a:extLst>
+              </p:cNvPr>
+              <p:cNvSpPr txBox="1">
+                <a:spLocks noRot="1" noChangeAspect="1" noMove="1" noResize="1" noEditPoints="1" noAdjustHandles="1" noChangeArrowheads="1" noChangeShapeType="1" noTextEdit="1"/>
+              </p:cNvSpPr>
+              <p:nvPr/>
+            </p:nvSpPr>
+            <p:spPr>
+              <a:xfrm>
+                <a:off x="6752723" y="5744453"/>
+                <a:ext cx="4726133" cy="464166"/>
+              </a:xfrm>
+              <a:prstGeom prst="rect">
+                <a:avLst/>
+              </a:prstGeom>
+              <a:blipFill>
+                <a:blip r:embed="rId5"/>
+                <a:stretch>
+                  <a:fillRect l="-1161" b="-21053"/>
+                </a:stretch>
+              </a:blipFill>
+            </p:spPr>
+            <p:txBody>
+              <a:bodyPr/>
+              <a:lstStyle/>
+              <a:p>
+                <a:r>
+                  <a:rPr lang="en-US">
+                    <a:noFill/>
+                  </a:rPr>
+                  <a:t> </a:t>
+                </a:r>
+              </a:p>
+            </p:txBody>
+          </p:sp>
+        </mc:Fallback>
+      </mc:AlternateContent>
+      <p:pic>
+        <p:nvPicPr>
+          <p:cNvPr id="9" name="Imagen 8">
+            <a:extLst>
+              <a:ext uri="{FF2B5EF4-FFF2-40B4-BE49-F238E27FC236}">
+                <a16:creationId xmlns:a16="http://schemas.microsoft.com/office/drawing/2014/main" id="{09E52593-27C3-2172-CBC9-EE5A81E83001}"/>
+              </a:ext>
+            </a:extLst>
+          </p:cNvPr>
+          <p:cNvPicPr>
+            <a:picLocks noChangeAspect="1"/>
+          </p:cNvPicPr>
+          <p:nvPr/>
+        </p:nvPicPr>
+        <p:blipFill>
+          <a:blip r:embed="rId6"/>
+          <a:srcRect t="32189"/>
+          <a:stretch>
+            <a:fillRect/>
+          </a:stretch>
+        </p:blipFill>
+        <p:spPr>
+          <a:xfrm>
+            <a:off x="4289676" y="5284533"/>
+            <a:ext cx="1941790" cy="539047"/>
+          </a:xfrm>
+          <a:prstGeom prst="rect">
+            <a:avLst/>
+          </a:prstGeom>
+        </p:spPr>
+      </p:pic>
     </p:spTree>
     <p:extLst>
       <p:ext uri="{BB962C8B-B14F-4D97-AF65-F5344CB8AC3E}">
@@ -8870,6 +13619,142 @@
   <p:clrMapOvr>
     <a:masterClrMapping/>
   </p:clrMapOvr>
+  <p:timing>
+    <p:tnLst>
+      <p:par>
+        <p:cTn id="1" dur="indefinite" restart="never" nodeType="tmRoot">
+          <p:childTnLst>
+            <p:seq concurrent="1" nextAc="seek">
+              <p:cTn id="2" dur="indefinite" nodeType="mainSeq">
+                <p:childTnLst>
+                  <p:par>
+                    <p:cTn id="3" fill="hold">
+                      <p:stCondLst>
+                        <p:cond delay="indefinite"/>
+                        <p:cond evt="onBegin" delay="0">
+                          <p:tn val="2"/>
+                        </p:cond>
+                      </p:stCondLst>
+                      <p:childTnLst>
+                        <p:par>
+                          <p:cTn id="4" fill="hold">
+                            <p:stCondLst>
+                              <p:cond delay="0"/>
+                            </p:stCondLst>
+                            <p:childTnLst>
+                              <p:par>
+                                <p:cTn id="5" presetID="1" presetClass="entr" presetSubtype="0" fill="hold" grpId="0" nodeType="withEffect">
+                                  <p:stCondLst>
+                                    <p:cond delay="0"/>
+                                  </p:stCondLst>
+                                  <p:childTnLst>
+                                    <p:set>
+                                      <p:cBhvr>
+                                        <p:cTn id="6" dur="1" fill="hold">
+                                          <p:stCondLst>
+                                            <p:cond delay="0"/>
+                                          </p:stCondLst>
+                                        </p:cTn>
+                                        <p:tgtEl>
+                                          <p:spTgt spid="3"/>
+                                        </p:tgtEl>
+                                        <p:attrNameLst>
+                                          <p:attrName>style.visibility</p:attrName>
+                                        </p:attrNameLst>
+                                      </p:cBhvr>
+                                      <p:to>
+                                        <p:strVal val="visible"/>
+                                      </p:to>
+                                    </p:set>
+                                  </p:childTnLst>
+                                </p:cTn>
+                              </p:par>
+                              <p:par>
+                                <p:cTn id="7" presetID="1" presetClass="entr" presetSubtype="0" fill="hold" grpId="0" nodeType="withEffect">
+                                  <p:stCondLst>
+                                    <p:cond delay="0"/>
+                                  </p:stCondLst>
+                                  <p:childTnLst>
+                                    <p:set>
+                                      <p:cBhvr>
+                                        <p:cTn id="8" dur="1" fill="hold">
+                                          <p:stCondLst>
+                                            <p:cond delay="0"/>
+                                          </p:stCondLst>
+                                        </p:cTn>
+                                        <p:tgtEl>
+                                          <p:spTgt spid="8"/>
+                                        </p:tgtEl>
+                                        <p:attrNameLst>
+                                          <p:attrName>style.visibility</p:attrName>
+                                        </p:attrNameLst>
+                                      </p:cBhvr>
+                                      <p:to>
+                                        <p:strVal val="visible"/>
+                                      </p:to>
+                                    </p:set>
+                                  </p:childTnLst>
+                                </p:cTn>
+                              </p:par>
+                              <p:par>
+                                <p:cTn id="9" presetID="1" presetClass="entr" presetSubtype="0" fill="hold" nodeType="withEffect">
+                                  <p:stCondLst>
+                                    <p:cond delay="0"/>
+                                  </p:stCondLst>
+                                  <p:childTnLst>
+                                    <p:set>
+                                      <p:cBhvr>
+                                        <p:cTn id="10" dur="1" fill="hold">
+                                          <p:stCondLst>
+                                            <p:cond delay="0"/>
+                                          </p:stCondLst>
+                                        </p:cTn>
+                                        <p:tgtEl>
+                                          <p:spTgt spid="9"/>
+                                        </p:tgtEl>
+                                        <p:attrNameLst>
+                                          <p:attrName>style.visibility</p:attrName>
+                                        </p:attrNameLst>
+                                      </p:cBhvr>
+                                      <p:to>
+                                        <p:strVal val="visible"/>
+                                      </p:to>
+                                    </p:set>
+                                  </p:childTnLst>
+                                </p:cTn>
+                              </p:par>
+                            </p:childTnLst>
+                          </p:cTn>
+                        </p:par>
+                      </p:childTnLst>
+                    </p:cTn>
+                  </p:par>
+                </p:childTnLst>
+              </p:cTn>
+              <p:prevCondLst>
+                <p:cond evt="onPrev" delay="0">
+                  <p:tgtEl>
+                    <p:sldTgt/>
+                  </p:tgtEl>
+                </p:cond>
+              </p:prevCondLst>
+              <p:nextCondLst>
+                <p:cond evt="onNext" delay="0">
+                  <p:tgtEl>
+                    <p:sldTgt/>
+                  </p:tgtEl>
+                </p:cond>
+              </p:nextCondLst>
+            </p:seq>
+          </p:childTnLst>
+        </p:cTn>
+      </p:par>
+    </p:tnLst>
+    <p:bldLst>
+      <p:bldP spid="3" grpId="0"/>
+      <p:bldP spid="8" grpId="0"/>
+    </p:bldLst>
+  </p:timing>
 </p:sld>
 </file>
 
